--- a/documents/Estrategia de Sensibilidad de Precios.pptx
+++ b/documents/Estrategia de Sensibilidad de Precios.pptx
@@ -1,129 +1,180 @@
 
 <file path=ppt/presentation.xml><?xml version="1.0" encoding="utf-8"?>
-<ns0:presentation xmlns:ns0="http://schemas.openxmlformats.org/presentationml/2006/main" xmlns:ns1="http://schemas.openxmlformats.org/officeDocument/2006/relationships" xmlns:ns2="http://schemas.openxmlformats.org/drawingml/2006/main" saveSubsetFonts="1" autoCompressPictures="0" embedTrueTypeFonts="1">
-  <ns0:sldMasterIdLst>
-    <ns0:sldMasterId id="2147483648" ns1:id="rId1"/>
-  </ns0:sldMasterIdLst>
-  <ns0:sldIdLst>
-    <ns0:sldId id="256" ns1:id="rId7"/>
-    <ns0:sldId id="257" ns1:id="rId8"/>
-    <ns0:sldId id="258" ns1:id="rId9"/>
-    <ns0:sldId id="259" ns1:id="rId10"/>
-    <ns0:sldId id="260" ns1:id="rId11"/>
-    <ns0:sldId id="261" ns1:id="rId12"/>
-    <ns0:sldId id="262" ns1:id="rId13"/>
-    <ns0:sldId id="263" ns1:id="rId14"/>
-    <ns0:sldId id="264" ns1:id="rId15"/>
-    <ns0:sldId id="265" ns1:id="rId16"/>
-    <ns0:sldId id="266" ns1:id="rId17"/>
-    <ns0:sldId id="267" ns1:id="rId18"/>
-  </ns0:sldIdLst>
-  <ns0:sldSz cx="12192000" cy="6858000" type="screen4x3"/>
-  <ns0:notesSz cx="6858000" cy="9144000"/>
-  <ns0:embeddedFontLst>
-    <ns0:embeddedFont>
-      <ns0:font typeface="Inter"/>
-      <ns0:italic ns1:id="rIdFont19"/>
-      <ns0:bold ns1:id="rIdFont20"/>
-      <ns0:regular ns1:id="rIdFont21"/>
-    </ns0:embeddedFont>
-  </ns0:embeddedFontLst>
-  <ns0:defaultTextStyle>
-    <ns2:defPPr>
-      <ns2:defRPr lang="en-US"/>
-    </ns2:defPPr>
-    <ns2:lvl1pPr marL="0" algn="l" defTabSz="457200" rtl="0" eaLnBrk="1" latinLnBrk="0" hangingPunct="1">
-      <ns2:defRPr sz="1800" kern="1200">
-        <ns2:solidFill>
-          <ns2:schemeClr val="tx1"/>
-        </ns2:solidFill>
-        <ns2:latin typeface="+mn-lt"/>
-        <ns2:ea typeface="+mn-ea"/>
-        <ns2:cs typeface="+mn-cs"/>
-      </ns2:defRPr>
-    </ns2:lvl1pPr>
-    <ns2:lvl2pPr marL="457200" algn="l" defTabSz="457200" rtl="0" eaLnBrk="1" latinLnBrk="0" hangingPunct="1">
-      <ns2:defRPr sz="1800" kern="1200">
-        <ns2:solidFill>
-          <ns2:schemeClr val="tx1"/>
-        </ns2:solidFill>
-        <ns2:latin typeface="+mn-lt"/>
-        <ns2:ea typeface="+mn-ea"/>
-        <ns2:cs typeface="+mn-cs"/>
-      </ns2:defRPr>
-    </ns2:lvl2pPr>
-    <ns2:lvl3pPr marL="914400" algn="l" defTabSz="457200" rtl="0" eaLnBrk="1" latinLnBrk="0" hangingPunct="1">
-      <ns2:defRPr sz="1800" kern="1200">
-        <ns2:solidFill>
-          <ns2:schemeClr val="tx1"/>
-        </ns2:solidFill>
-        <ns2:latin typeface="+mn-lt"/>
-        <ns2:ea typeface="+mn-ea"/>
-        <ns2:cs typeface="+mn-cs"/>
-      </ns2:defRPr>
-    </ns2:lvl3pPr>
-    <ns2:lvl4pPr marL="1371600" algn="l" defTabSz="457200" rtl="0" eaLnBrk="1" latinLnBrk="0" hangingPunct="1">
-      <ns2:defRPr sz="1800" kern="1200">
-        <ns2:solidFill>
-          <ns2:schemeClr val="tx1"/>
-        </ns2:solidFill>
-        <ns2:latin typeface="+mn-lt"/>
-        <ns2:ea typeface="+mn-ea"/>
-        <ns2:cs typeface="+mn-cs"/>
-      </ns2:defRPr>
-    </ns2:lvl4pPr>
-    <ns2:lvl5pPr marL="1828800" algn="l" defTabSz="457200" rtl="0" eaLnBrk="1" latinLnBrk="0" hangingPunct="1">
-      <ns2:defRPr sz="1800" kern="1200">
-        <ns2:solidFill>
-          <ns2:schemeClr val="tx1"/>
-        </ns2:solidFill>
-        <ns2:latin typeface="+mn-lt"/>
-        <ns2:ea typeface="+mn-ea"/>
-        <ns2:cs typeface="+mn-cs"/>
-      </ns2:defRPr>
-    </ns2:lvl5pPr>
-    <ns2:lvl6pPr marL="2286000" algn="l" defTabSz="457200" rtl="0" eaLnBrk="1" latinLnBrk="0" hangingPunct="1">
-      <ns2:defRPr sz="1800" kern="1200">
-        <ns2:solidFill>
-          <ns2:schemeClr val="tx1"/>
-        </ns2:solidFill>
-        <ns2:latin typeface="+mn-lt"/>
-        <ns2:ea typeface="+mn-ea"/>
-        <ns2:cs typeface="+mn-cs"/>
-      </ns2:defRPr>
-    </ns2:lvl6pPr>
-    <ns2:lvl7pPr marL="2743200" algn="l" defTabSz="457200" rtl="0" eaLnBrk="1" latinLnBrk="0" hangingPunct="1">
-      <ns2:defRPr sz="1800" kern="1200">
-        <ns2:solidFill>
-          <ns2:schemeClr val="tx1"/>
-        </ns2:solidFill>
-        <ns2:latin typeface="+mn-lt"/>
-        <ns2:ea typeface="+mn-ea"/>
-        <ns2:cs typeface="+mn-cs"/>
-      </ns2:defRPr>
-    </ns2:lvl7pPr>
-    <ns2:lvl8pPr marL="3200400" algn="l" defTabSz="457200" rtl="0" eaLnBrk="1" latinLnBrk="0" hangingPunct="1">
-      <ns2:defRPr sz="1800" kern="1200">
-        <ns2:solidFill>
-          <ns2:schemeClr val="tx1"/>
-        </ns2:solidFill>
-        <ns2:latin typeface="+mn-lt"/>
-        <ns2:ea typeface="+mn-ea"/>
-        <ns2:cs typeface="+mn-cs"/>
-      </ns2:defRPr>
-    </ns2:lvl8pPr>
-    <ns2:lvl9pPr marL="3657600" algn="l" defTabSz="457200" rtl="0" eaLnBrk="1" latinLnBrk="0" hangingPunct="1">
-      <ns2:defRPr sz="1800" kern="1200">
-        <ns2:solidFill>
-          <ns2:schemeClr val="tx1"/>
-        </ns2:solidFill>
-        <ns2:latin typeface="+mn-lt"/>
-        <ns2:ea typeface="+mn-ea"/>
-        <ns2:cs typeface="+mn-cs"/>
-      </ns2:defRPr>
-    </ns2:lvl9pPr>
-  </ns0:defaultTextStyle>
-</ns0:presentation>
+<p:presentation xmlns:a="http://schemas.openxmlformats.org/drawingml/2006/main" xmlns:r="http://schemas.openxmlformats.org/officeDocument/2006/relationships" xmlns:p="http://schemas.openxmlformats.org/presentationml/2006/main" embedTrueTypeFonts="1" saveSubsetFonts="1" autoCompressPictures="0">
+  <p:sldMasterIdLst>
+    <p:sldMasterId id="2147483648" r:id="rId1"/>
+  </p:sldMasterIdLst>
+  <p:sldIdLst>
+    <p:sldId id="256" r:id="rId2"/>
+    <p:sldId id="257" r:id="rId3"/>
+    <p:sldId id="258" r:id="rId4"/>
+    <p:sldId id="259" r:id="rId5"/>
+    <p:sldId id="260" r:id="rId6"/>
+    <p:sldId id="261" r:id="rId7"/>
+    <p:sldId id="262" r:id="rId8"/>
+    <p:sldId id="263" r:id="rId9"/>
+    <p:sldId id="264" r:id="rId10"/>
+    <p:sldId id="265" r:id="rId11"/>
+    <p:sldId id="266" r:id="rId12"/>
+    <p:sldId id="267" r:id="rId13"/>
+  </p:sldIdLst>
+  <p:sldSz cx="12192000" cy="6858000"/>
+  <p:notesSz cx="6858000" cy="9144000"/>
+  <p:embeddedFontLst>
+    <p:embeddedFont>
+      <p:font typeface="Inter"/>
+      <p:italic r:id="rId14"/>
+    </p:embeddedFont>
+  </p:embeddedFontLst>
+  <p:defaultTextStyle>
+    <a:defPPr>
+      <a:defRPr lang="en-US"/>
+    </a:defPPr>
+    <a:lvl1pPr marL="0" algn="l" defTabSz="457200" rtl="0" eaLnBrk="1" latinLnBrk="0" hangingPunct="1">
+      <a:defRPr sz="1800" kern="1200">
+        <a:solidFill>
+          <a:schemeClr val="tx1"/>
+        </a:solidFill>
+        <a:latin typeface="+mn-lt"/>
+        <a:ea typeface="+mn-ea"/>
+        <a:cs typeface="+mn-cs"/>
+      </a:defRPr>
+    </a:lvl1pPr>
+    <a:lvl2pPr marL="457200" algn="l" defTabSz="457200" rtl="0" eaLnBrk="1" latinLnBrk="0" hangingPunct="1">
+      <a:defRPr sz="1800" kern="1200">
+        <a:solidFill>
+          <a:schemeClr val="tx1"/>
+        </a:solidFill>
+        <a:latin typeface="+mn-lt"/>
+        <a:ea typeface="+mn-ea"/>
+        <a:cs typeface="+mn-cs"/>
+      </a:defRPr>
+    </a:lvl2pPr>
+    <a:lvl3pPr marL="914400" algn="l" defTabSz="457200" rtl="0" eaLnBrk="1" latinLnBrk="0" hangingPunct="1">
+      <a:defRPr sz="1800" kern="1200">
+        <a:solidFill>
+          <a:schemeClr val="tx1"/>
+        </a:solidFill>
+        <a:latin typeface="+mn-lt"/>
+        <a:ea typeface="+mn-ea"/>
+        <a:cs typeface="+mn-cs"/>
+      </a:defRPr>
+    </a:lvl3pPr>
+    <a:lvl4pPr marL="1371600" algn="l" defTabSz="457200" rtl="0" eaLnBrk="1" latinLnBrk="0" hangingPunct="1">
+      <a:defRPr sz="1800" kern="1200">
+        <a:solidFill>
+          <a:schemeClr val="tx1"/>
+        </a:solidFill>
+        <a:latin typeface="+mn-lt"/>
+        <a:ea typeface="+mn-ea"/>
+        <a:cs typeface="+mn-cs"/>
+      </a:defRPr>
+    </a:lvl4pPr>
+    <a:lvl5pPr marL="1828800" algn="l" defTabSz="457200" rtl="0" eaLnBrk="1" latinLnBrk="0" hangingPunct="1">
+      <a:defRPr sz="1800" kern="1200">
+        <a:solidFill>
+          <a:schemeClr val="tx1"/>
+        </a:solidFill>
+        <a:latin typeface="+mn-lt"/>
+        <a:ea typeface="+mn-ea"/>
+        <a:cs typeface="+mn-cs"/>
+      </a:defRPr>
+    </a:lvl5pPr>
+    <a:lvl6pPr marL="2286000" algn="l" defTabSz="457200" rtl="0" eaLnBrk="1" latinLnBrk="0" hangingPunct="1">
+      <a:defRPr sz="1800" kern="1200">
+        <a:solidFill>
+          <a:schemeClr val="tx1"/>
+        </a:solidFill>
+        <a:latin typeface="+mn-lt"/>
+        <a:ea typeface="+mn-ea"/>
+        <a:cs typeface="+mn-cs"/>
+      </a:defRPr>
+    </a:lvl6pPr>
+    <a:lvl7pPr marL="2743200" algn="l" defTabSz="457200" rtl="0" eaLnBrk="1" latinLnBrk="0" hangingPunct="1">
+      <a:defRPr sz="1800" kern="1200">
+        <a:solidFill>
+          <a:schemeClr val="tx1"/>
+        </a:solidFill>
+        <a:latin typeface="+mn-lt"/>
+        <a:ea typeface="+mn-ea"/>
+        <a:cs typeface="+mn-cs"/>
+      </a:defRPr>
+    </a:lvl7pPr>
+    <a:lvl8pPr marL="3200400" algn="l" defTabSz="457200" rtl="0" eaLnBrk="1" latinLnBrk="0" hangingPunct="1">
+      <a:defRPr sz="1800" kern="1200">
+        <a:solidFill>
+          <a:schemeClr val="tx1"/>
+        </a:solidFill>
+        <a:latin typeface="+mn-lt"/>
+        <a:ea typeface="+mn-ea"/>
+        <a:cs typeface="+mn-cs"/>
+      </a:defRPr>
+    </a:lvl8pPr>
+    <a:lvl9pPr marL="3657600" algn="l" defTabSz="457200" rtl="0" eaLnBrk="1" latinLnBrk="0" hangingPunct="1">
+      <a:defRPr sz="1800" kern="1200">
+        <a:solidFill>
+          <a:schemeClr val="tx1"/>
+        </a:solidFill>
+        <a:latin typeface="+mn-lt"/>
+        <a:ea typeface="+mn-ea"/>
+        <a:cs typeface="+mn-cs"/>
+      </a:defRPr>
+    </a:lvl9pPr>
+  </p:defaultTextStyle>
+  <p:extLst>
+    <p:ext uri="{EFAFB233-063F-42B5-8137-9DF3F51BA10A}">
+      <p15:sldGuideLst xmlns:p15="http://schemas.microsoft.com/office/powerpoint/2012/main">
+        <p15:guide id="1" orient="horz" pos="2160">
+          <p15:clr>
+            <a:srgbClr val="A4A3A4"/>
+          </p15:clr>
+        </p15:guide>
+        <p15:guide id="2" pos="2880">
+          <p15:clr>
+            <a:srgbClr val="A4A3A4"/>
+          </p15:clr>
+        </p15:guide>
+      </p15:sldGuideLst>
+    </p:ext>
+  </p:extLst>
+</p:presentation>
+</file>
+
+<file path=ppt/revisionInfo.xml><?xml version="1.0" encoding="utf-8"?>
+<p1510:revInfo xmlns:a="http://schemas.openxmlformats.org/drawingml/2006/main" xmlns:r="http://schemas.openxmlformats.org/officeDocument/2006/relationships" xmlns:p1510="http://schemas.microsoft.com/office/powerpoint/2015/10/main">
+  <p1510:revLst>
+    <p1510:client id="{631B57D4-BC43-4158-B61A-0B284066802B}" v="4" dt="2026-10-19T22:26:27.768"/>
+  </p1510:revLst>
+</p1510:revInfo>
+</file>
+
+<file path=ppt/changesInfos/changesInfo1.xml><?xml version="1.0" encoding="utf-8"?>
+<pc:chgInfo xmlns:a="http://schemas.openxmlformats.org/drawingml/2006/main" xmlns:r="http://schemas.openxmlformats.org/officeDocument/2006/relationships" xmlns:ac="http://schemas.microsoft.com/office/drawing/2013/main/command" xmlns:pc="http://schemas.microsoft.com/office/powerpoint/2013/main/command">
+  <pc:docChgLst>
+    <pc:chgData name="Rene Sangacha" userId="a4e5b6bb3df78a73" providerId="LiveId" clId="{9F2BEB09-8DC3-4CD1-B6B3-2ADC2BF56918}"/>
+    <pc:docChg chg="modSld">
+      <pc:chgData name="Rene Sangacha" userId="a4e5b6bb3df78a73" providerId="LiveId" clId="{9F2BEB09-8DC3-4CD1-B6B3-2ADC2BF56918}" dt="2026-10-19T22:26:28.956" v="14" actId="20577"/>
+      <pc:docMkLst>
+        <pc:docMk/>
+      </pc:docMkLst>
+      <pc:sldChg chg="modSp mod">
+        <pc:chgData name="Rene Sangacha" userId="a4e5b6bb3df78a73" providerId="LiveId" clId="{9F2BEB09-8DC3-4CD1-B6B3-2ADC2BF56918}" dt="2026-10-19T22:26:28.956" v="14" actId="20577"/>
+        <pc:sldMkLst>
+          <pc:docMk/>
+          <pc:sldMk cId="0" sldId="262"/>
+        </pc:sldMkLst>
+        <pc:graphicFrameChg chg="mod modGraphic">
+          <ac:chgData name="Rene Sangacha" userId="a4e5b6bb3df78a73" providerId="LiveId" clId="{9F2BEB09-8DC3-4CD1-B6B3-2ADC2BF56918}" dt="2026-10-19T22:26:28.956" v="14" actId="20577"/>
+          <ac:graphicFrameMkLst>
+            <pc:docMk/>
+            <pc:sldMk cId="0" sldId="262"/>
+            <ac:graphicFrameMk id="5" creationId="{00000000-0000-0000-0000-000000000000}"/>
+          </ac:graphicFrameMkLst>
+        </pc:graphicFrameChg>
+      </pc:sldChg>
+    </pc:docChg>
+  </pc:docChgLst>
+</pc:chgInfo>
 </file>
 
 <file path=ppt/slideLayouts/slideLayout1.xml><?xml version="1.0" encoding="utf-8"?>
@@ -164,10 +215,9 @@
           <a:lstStyle/>
           <a:p>
             <a:r>
-              <a:rPr lang="en-US" smtClean="0"/>
+              <a:rPr lang="en-US"/>
               <a:t>Click to edit Master title style</a:t>
             </a:r>
-            <a:endParaRPr lang="en-US"/>
           </a:p>
         </p:txBody>
       </p:sp>
@@ -283,10 +333,9 @@
           </a:lstStyle>
           <a:p>
             <a:r>
-              <a:rPr lang="en-US" smtClean="0"/>
+              <a:rPr lang="en-US"/>
               <a:t>Click to edit Master subtitle style</a:t>
             </a:r>
-            <a:endParaRPr lang="en-US"/>
           </a:p>
         </p:txBody>
       </p:sp>
@@ -307,7 +356,7 @@
           <a:p>
             <a:fld id="{5BCAD085-E8A6-8845-BD4E-CB4CCA059FC4}" type="datetimeFigureOut">
               <a:rPr lang="en-US" smtClean="0"/>
-              <a:t>1/27/13</a:t>
+              <a:t>10/19/2026</a:t>
             </a:fld>
             <a:endParaRPr lang="en-US"/>
           </a:p>
@@ -349,7 +398,7 @@
           <a:p>
             <a:fld id="{C1FF6DA9-008F-8B48-92A6-B652298478BF}" type="slidenum">
               <a:rPr lang="en-US" smtClean="0"/>
-              <a:t>‹#›</a:t>
+              <a:t>‹Nº›</a:t>
             </a:fld>
             <a:endParaRPr lang="en-US"/>
           </a:p>
@@ -401,10 +450,9 @@
           <a:lstStyle/>
           <a:p>
             <a:r>
-              <a:rPr lang="en-US" smtClean="0"/>
+              <a:rPr lang="en-US"/>
               <a:t>Click to edit Master title style</a:t>
             </a:r>
-            <a:endParaRPr lang="en-US"/>
           </a:p>
         </p:txBody>
       </p:sp>
@@ -425,38 +473,37 @@
           <a:p>
             <a:pPr lvl="0"/>
             <a:r>
-              <a:rPr lang="en-US" smtClean="0"/>
+              <a:rPr lang="en-US"/>
               <a:t>Click to edit Master text styles</a:t>
             </a:r>
           </a:p>
           <a:p>
             <a:pPr lvl="1"/>
             <a:r>
-              <a:rPr lang="en-US" smtClean="0"/>
+              <a:rPr lang="en-US"/>
               <a:t>Second level</a:t>
             </a:r>
           </a:p>
           <a:p>
             <a:pPr lvl="2"/>
             <a:r>
-              <a:rPr lang="en-US" smtClean="0"/>
+              <a:rPr lang="en-US"/>
               <a:t>Third level</a:t>
             </a:r>
           </a:p>
           <a:p>
             <a:pPr lvl="3"/>
             <a:r>
-              <a:rPr lang="en-US" smtClean="0"/>
+              <a:rPr lang="en-US"/>
               <a:t>Fourth level</a:t>
             </a:r>
           </a:p>
           <a:p>
             <a:pPr lvl="4"/>
             <a:r>
-              <a:rPr lang="en-US" smtClean="0"/>
+              <a:rPr lang="en-US"/>
               <a:t>Fifth level</a:t>
             </a:r>
-            <a:endParaRPr lang="en-US"/>
           </a:p>
         </p:txBody>
       </p:sp>
@@ -477,7 +524,7 @@
           <a:p>
             <a:fld id="{5BCAD085-E8A6-8845-BD4E-CB4CCA059FC4}" type="datetimeFigureOut">
               <a:rPr lang="en-US" smtClean="0"/>
-              <a:t>1/27/13</a:t>
+              <a:t>10/19/2026</a:t>
             </a:fld>
             <a:endParaRPr lang="en-US"/>
           </a:p>
@@ -519,7 +566,7 @@
           <a:p>
             <a:fld id="{C1FF6DA9-008F-8B48-92A6-B652298478BF}" type="slidenum">
               <a:rPr lang="en-US" smtClean="0"/>
-              <a:t>‹#›</a:t>
+              <a:t>‹Nº›</a:t>
             </a:fld>
             <a:endParaRPr lang="en-US"/>
           </a:p>
@@ -576,10 +623,9 @@
           <a:lstStyle/>
           <a:p>
             <a:r>
-              <a:rPr lang="en-US" smtClean="0"/>
+              <a:rPr lang="en-US"/>
               <a:t>Click to edit Master title style</a:t>
             </a:r>
-            <a:endParaRPr lang="en-US"/>
           </a:p>
         </p:txBody>
       </p:sp>
@@ -605,38 +651,37 @@
           <a:p>
             <a:pPr lvl="0"/>
             <a:r>
-              <a:rPr lang="en-US" smtClean="0"/>
+              <a:rPr lang="en-US"/>
               <a:t>Click to edit Master text styles</a:t>
             </a:r>
           </a:p>
           <a:p>
             <a:pPr lvl="1"/>
             <a:r>
-              <a:rPr lang="en-US" smtClean="0"/>
+              <a:rPr lang="en-US"/>
               <a:t>Second level</a:t>
             </a:r>
           </a:p>
           <a:p>
             <a:pPr lvl="2"/>
             <a:r>
-              <a:rPr lang="en-US" smtClean="0"/>
+              <a:rPr lang="en-US"/>
               <a:t>Third level</a:t>
             </a:r>
           </a:p>
           <a:p>
             <a:pPr lvl="3"/>
             <a:r>
-              <a:rPr lang="en-US" smtClean="0"/>
+              <a:rPr lang="en-US"/>
               <a:t>Fourth level</a:t>
             </a:r>
           </a:p>
           <a:p>
             <a:pPr lvl="4"/>
             <a:r>
-              <a:rPr lang="en-US" smtClean="0"/>
+              <a:rPr lang="en-US"/>
               <a:t>Fifth level</a:t>
             </a:r>
-            <a:endParaRPr lang="en-US"/>
           </a:p>
         </p:txBody>
       </p:sp>
@@ -657,7 +702,7 @@
           <a:p>
             <a:fld id="{5BCAD085-E8A6-8845-BD4E-CB4CCA059FC4}" type="datetimeFigureOut">
               <a:rPr lang="en-US" smtClean="0"/>
-              <a:t>1/27/13</a:t>
+              <a:t>10/19/2026</a:t>
             </a:fld>
             <a:endParaRPr lang="en-US"/>
           </a:p>
@@ -699,7 +744,7 @@
           <a:p>
             <a:fld id="{C1FF6DA9-008F-8B48-92A6-B652298478BF}" type="slidenum">
               <a:rPr lang="en-US" smtClean="0"/>
-              <a:t>‹#›</a:t>
+              <a:t>‹Nº›</a:t>
             </a:fld>
             <a:endParaRPr lang="en-US"/>
           </a:p>
@@ -751,10 +796,9 @@
           <a:lstStyle/>
           <a:p>
             <a:r>
-              <a:rPr lang="en-US" smtClean="0"/>
+              <a:rPr lang="en-US"/>
               <a:t>Click to edit Master title style</a:t>
             </a:r>
-            <a:endParaRPr lang="en-US"/>
           </a:p>
         </p:txBody>
       </p:sp>
@@ -775,38 +819,37 @@
           <a:p>
             <a:pPr lvl="0"/>
             <a:r>
-              <a:rPr lang="en-US" smtClean="0"/>
+              <a:rPr lang="en-US"/>
               <a:t>Click to edit Master text styles</a:t>
             </a:r>
           </a:p>
           <a:p>
             <a:pPr lvl="1"/>
             <a:r>
-              <a:rPr lang="en-US" smtClean="0"/>
+              <a:rPr lang="en-US"/>
               <a:t>Second level</a:t>
             </a:r>
           </a:p>
           <a:p>
             <a:pPr lvl="2"/>
             <a:r>
-              <a:rPr lang="en-US" smtClean="0"/>
+              <a:rPr lang="en-US"/>
               <a:t>Third level</a:t>
             </a:r>
           </a:p>
           <a:p>
             <a:pPr lvl="3"/>
             <a:r>
-              <a:rPr lang="en-US" smtClean="0"/>
+              <a:rPr lang="en-US"/>
               <a:t>Fourth level</a:t>
             </a:r>
           </a:p>
           <a:p>
             <a:pPr lvl="4"/>
             <a:r>
-              <a:rPr lang="en-US" smtClean="0"/>
+              <a:rPr lang="en-US"/>
               <a:t>Fifth level</a:t>
             </a:r>
-            <a:endParaRPr lang="en-US"/>
           </a:p>
         </p:txBody>
       </p:sp>
@@ -827,7 +870,7 @@
           <a:p>
             <a:fld id="{5BCAD085-E8A6-8845-BD4E-CB4CCA059FC4}" type="datetimeFigureOut">
               <a:rPr lang="en-US" smtClean="0"/>
-              <a:t>1/27/13</a:t>
+              <a:t>10/19/2026</a:t>
             </a:fld>
             <a:endParaRPr lang="en-US"/>
           </a:p>
@@ -869,7 +912,7 @@
           <a:p>
             <a:fld id="{C1FF6DA9-008F-8B48-92A6-B652298478BF}" type="slidenum">
               <a:rPr lang="en-US" smtClean="0"/>
-              <a:t>‹#›</a:t>
+              <a:t>‹Nº›</a:t>
             </a:fld>
             <a:endParaRPr lang="en-US"/>
           </a:p>
@@ -930,10 +973,9 @@
           </a:lstStyle>
           <a:p>
             <a:r>
-              <a:rPr lang="en-US" smtClean="0"/>
+              <a:rPr lang="en-US"/>
               <a:t>Click to edit Master title style</a:t>
             </a:r>
-            <a:endParaRPr lang="en-US"/>
           </a:p>
         </p:txBody>
       </p:sp>
@@ -1050,7 +1092,7 @@
           <a:p>
             <a:pPr lvl="0"/>
             <a:r>
-              <a:rPr lang="en-US" smtClean="0"/>
+              <a:rPr lang="en-US"/>
               <a:t>Click to edit Master text styles</a:t>
             </a:r>
           </a:p>
@@ -1073,7 +1115,7 @@
           <a:p>
             <a:fld id="{5BCAD085-E8A6-8845-BD4E-CB4CCA059FC4}" type="datetimeFigureOut">
               <a:rPr lang="en-US" smtClean="0"/>
-              <a:t>1/27/13</a:t>
+              <a:t>10/19/2026</a:t>
             </a:fld>
             <a:endParaRPr lang="en-US"/>
           </a:p>
@@ -1115,7 +1157,7 @@
           <a:p>
             <a:fld id="{C1FF6DA9-008F-8B48-92A6-B652298478BF}" type="slidenum">
               <a:rPr lang="en-US" smtClean="0"/>
-              <a:t>‹#›</a:t>
+              <a:t>‹Nº›</a:t>
             </a:fld>
             <a:endParaRPr lang="en-US"/>
           </a:p>
@@ -1167,10 +1209,9 @@
           <a:lstStyle/>
           <a:p>
             <a:r>
-              <a:rPr lang="en-US" smtClean="0"/>
+              <a:rPr lang="en-US"/>
               <a:t>Click to edit Master title style</a:t>
             </a:r>
-            <a:endParaRPr lang="en-US"/>
           </a:p>
         </p:txBody>
       </p:sp>
@@ -1224,38 +1265,37 @@
           <a:p>
             <a:pPr lvl="0"/>
             <a:r>
-              <a:rPr lang="en-US" smtClean="0"/>
+              <a:rPr lang="en-US"/>
               <a:t>Click to edit Master text styles</a:t>
             </a:r>
           </a:p>
           <a:p>
             <a:pPr lvl="1"/>
             <a:r>
-              <a:rPr lang="en-US" smtClean="0"/>
+              <a:rPr lang="en-US"/>
               <a:t>Second level</a:t>
             </a:r>
           </a:p>
           <a:p>
             <a:pPr lvl="2"/>
             <a:r>
-              <a:rPr lang="en-US" smtClean="0"/>
+              <a:rPr lang="en-US"/>
               <a:t>Third level</a:t>
             </a:r>
           </a:p>
           <a:p>
             <a:pPr lvl="3"/>
             <a:r>
-              <a:rPr lang="en-US" smtClean="0"/>
+              <a:rPr lang="en-US"/>
               <a:t>Fourth level</a:t>
             </a:r>
           </a:p>
           <a:p>
             <a:pPr lvl="4"/>
             <a:r>
-              <a:rPr lang="en-US" smtClean="0"/>
+              <a:rPr lang="en-US"/>
               <a:t>Fifth level</a:t>
             </a:r>
-            <a:endParaRPr lang="en-US"/>
           </a:p>
         </p:txBody>
       </p:sp>
@@ -1309,38 +1349,37 @@
           <a:p>
             <a:pPr lvl="0"/>
             <a:r>
-              <a:rPr lang="en-US" smtClean="0"/>
+              <a:rPr lang="en-US"/>
               <a:t>Click to edit Master text styles</a:t>
             </a:r>
           </a:p>
           <a:p>
             <a:pPr lvl="1"/>
             <a:r>
-              <a:rPr lang="en-US" smtClean="0"/>
+              <a:rPr lang="en-US"/>
               <a:t>Second level</a:t>
             </a:r>
           </a:p>
           <a:p>
             <a:pPr lvl="2"/>
             <a:r>
-              <a:rPr lang="en-US" smtClean="0"/>
+              <a:rPr lang="en-US"/>
               <a:t>Third level</a:t>
             </a:r>
           </a:p>
           <a:p>
             <a:pPr lvl="3"/>
             <a:r>
-              <a:rPr lang="en-US" smtClean="0"/>
+              <a:rPr lang="en-US"/>
               <a:t>Fourth level</a:t>
             </a:r>
           </a:p>
           <a:p>
             <a:pPr lvl="4"/>
             <a:r>
-              <a:rPr lang="en-US" smtClean="0"/>
+              <a:rPr lang="en-US"/>
               <a:t>Fifth level</a:t>
             </a:r>
-            <a:endParaRPr lang="en-US"/>
           </a:p>
         </p:txBody>
       </p:sp>
@@ -1361,7 +1400,7 @@
           <a:p>
             <a:fld id="{5BCAD085-E8A6-8845-BD4E-CB4CCA059FC4}" type="datetimeFigureOut">
               <a:rPr lang="en-US" smtClean="0"/>
-              <a:t>1/27/13</a:t>
+              <a:t>10/19/2026</a:t>
             </a:fld>
             <a:endParaRPr lang="en-US"/>
           </a:p>
@@ -1403,7 +1442,7 @@
           <a:p>
             <a:fld id="{C1FF6DA9-008F-8B48-92A6-B652298478BF}" type="slidenum">
               <a:rPr lang="en-US" smtClean="0"/>
-              <a:t>‹#›</a:t>
+              <a:t>‹Nº›</a:t>
             </a:fld>
             <a:endParaRPr lang="en-US"/>
           </a:p>
@@ -1459,10 +1498,9 @@
           </a:lstStyle>
           <a:p>
             <a:r>
-              <a:rPr lang="en-US" smtClean="0"/>
+              <a:rPr lang="en-US"/>
               <a:t>Click to edit Master title style</a:t>
             </a:r>
-            <a:endParaRPr lang="en-US"/>
           </a:p>
         </p:txBody>
       </p:sp>
@@ -1525,7 +1563,7 @@
           <a:p>
             <a:pPr lvl="0"/>
             <a:r>
-              <a:rPr lang="en-US" smtClean="0"/>
+              <a:rPr lang="en-US"/>
               <a:t>Click to edit Master text styles</a:t>
             </a:r>
           </a:p>
@@ -1581,38 +1619,37 @@
           <a:p>
             <a:pPr lvl="0"/>
             <a:r>
-              <a:rPr lang="en-US" smtClean="0"/>
+              <a:rPr lang="en-US"/>
               <a:t>Click to edit Master text styles</a:t>
             </a:r>
           </a:p>
           <a:p>
             <a:pPr lvl="1"/>
             <a:r>
-              <a:rPr lang="en-US" smtClean="0"/>
+              <a:rPr lang="en-US"/>
               <a:t>Second level</a:t>
             </a:r>
           </a:p>
           <a:p>
             <a:pPr lvl="2"/>
             <a:r>
-              <a:rPr lang="en-US" smtClean="0"/>
+              <a:rPr lang="en-US"/>
               <a:t>Third level</a:t>
             </a:r>
           </a:p>
           <a:p>
             <a:pPr lvl="3"/>
             <a:r>
-              <a:rPr lang="en-US" smtClean="0"/>
+              <a:rPr lang="en-US"/>
               <a:t>Fourth level</a:t>
             </a:r>
           </a:p>
           <a:p>
             <a:pPr lvl="4"/>
             <a:r>
-              <a:rPr lang="en-US" smtClean="0"/>
+              <a:rPr lang="en-US"/>
               <a:t>Fifth level</a:t>
             </a:r>
-            <a:endParaRPr lang="en-US"/>
           </a:p>
         </p:txBody>
       </p:sp>
@@ -1675,7 +1712,7 @@
           <a:p>
             <a:pPr lvl="0"/>
             <a:r>
-              <a:rPr lang="en-US" smtClean="0"/>
+              <a:rPr lang="en-US"/>
               <a:t>Click to edit Master text styles</a:t>
             </a:r>
           </a:p>
@@ -1731,38 +1768,37 @@
           <a:p>
             <a:pPr lvl="0"/>
             <a:r>
-              <a:rPr lang="en-US" smtClean="0"/>
+              <a:rPr lang="en-US"/>
               <a:t>Click to edit Master text styles</a:t>
             </a:r>
           </a:p>
           <a:p>
             <a:pPr lvl="1"/>
             <a:r>
-              <a:rPr lang="en-US" smtClean="0"/>
+              <a:rPr lang="en-US"/>
               <a:t>Second level</a:t>
             </a:r>
           </a:p>
           <a:p>
             <a:pPr lvl="2"/>
             <a:r>
-              <a:rPr lang="en-US" smtClean="0"/>
+              <a:rPr lang="en-US"/>
               <a:t>Third level</a:t>
             </a:r>
           </a:p>
           <a:p>
             <a:pPr lvl="3"/>
             <a:r>
-              <a:rPr lang="en-US" smtClean="0"/>
+              <a:rPr lang="en-US"/>
               <a:t>Fourth level</a:t>
             </a:r>
           </a:p>
           <a:p>
             <a:pPr lvl="4"/>
             <a:r>
-              <a:rPr lang="en-US" smtClean="0"/>
+              <a:rPr lang="en-US"/>
               <a:t>Fifth level</a:t>
             </a:r>
-            <a:endParaRPr lang="en-US"/>
           </a:p>
         </p:txBody>
       </p:sp>
@@ -1783,7 +1819,7 @@
           <a:p>
             <a:fld id="{5BCAD085-E8A6-8845-BD4E-CB4CCA059FC4}" type="datetimeFigureOut">
               <a:rPr lang="en-US" smtClean="0"/>
-              <a:t>1/27/13</a:t>
+              <a:t>10/19/2026</a:t>
             </a:fld>
             <a:endParaRPr lang="en-US"/>
           </a:p>
@@ -1825,7 +1861,7 @@
           <a:p>
             <a:fld id="{C1FF6DA9-008F-8B48-92A6-B652298478BF}" type="slidenum">
               <a:rPr lang="en-US" smtClean="0"/>
-              <a:t>‹#›</a:t>
+              <a:t>‹Nº›</a:t>
             </a:fld>
             <a:endParaRPr lang="en-US"/>
           </a:p>
@@ -1877,10 +1913,9 @@
           <a:lstStyle/>
           <a:p>
             <a:r>
-              <a:rPr lang="en-US" smtClean="0"/>
+              <a:rPr lang="en-US"/>
               <a:t>Click to edit Master title style</a:t>
             </a:r>
-            <a:endParaRPr lang="en-US"/>
           </a:p>
         </p:txBody>
       </p:sp>
@@ -1901,7 +1936,7 @@
           <a:p>
             <a:fld id="{5BCAD085-E8A6-8845-BD4E-CB4CCA059FC4}" type="datetimeFigureOut">
               <a:rPr lang="en-US" smtClean="0"/>
-              <a:t>1/27/13</a:t>
+              <a:t>10/19/2026</a:t>
             </a:fld>
             <a:endParaRPr lang="en-US"/>
           </a:p>
@@ -1943,7 +1978,7 @@
           <a:p>
             <a:fld id="{C1FF6DA9-008F-8B48-92A6-B652298478BF}" type="slidenum">
               <a:rPr lang="en-US" smtClean="0"/>
-              <a:t>‹#›</a:t>
+              <a:t>‹Nº›</a:t>
             </a:fld>
             <a:endParaRPr lang="en-US"/>
           </a:p>
@@ -1996,7 +2031,7 @@
           <a:p>
             <a:fld id="{5BCAD085-E8A6-8845-BD4E-CB4CCA059FC4}" type="datetimeFigureOut">
               <a:rPr lang="en-US" smtClean="0"/>
-              <a:t>1/27/13</a:t>
+              <a:t>10/19/2026</a:t>
             </a:fld>
             <a:endParaRPr lang="en-US"/>
           </a:p>
@@ -2038,7 +2073,7 @@
           <a:p>
             <a:fld id="{C1FF6DA9-008F-8B48-92A6-B652298478BF}" type="slidenum">
               <a:rPr lang="en-US" smtClean="0"/>
-              <a:t>‹#›</a:t>
+              <a:t>‹Nº›</a:t>
             </a:fld>
             <a:endParaRPr lang="en-US"/>
           </a:p>
@@ -2099,10 +2134,9 @@
           </a:lstStyle>
           <a:p>
             <a:r>
-              <a:rPr lang="en-US" smtClean="0"/>
+              <a:rPr lang="en-US"/>
               <a:t>Click to edit Master title style</a:t>
             </a:r>
-            <a:endParaRPr lang="en-US"/>
           </a:p>
         </p:txBody>
       </p:sp>
@@ -2156,38 +2190,37 @@
           <a:p>
             <a:pPr lvl="0"/>
             <a:r>
-              <a:rPr lang="en-US" smtClean="0"/>
+              <a:rPr lang="en-US"/>
               <a:t>Click to edit Master text styles</a:t>
             </a:r>
           </a:p>
           <a:p>
             <a:pPr lvl="1"/>
             <a:r>
-              <a:rPr lang="en-US" smtClean="0"/>
+              <a:rPr lang="en-US"/>
               <a:t>Second level</a:t>
             </a:r>
           </a:p>
           <a:p>
             <a:pPr lvl="2"/>
             <a:r>
-              <a:rPr lang="en-US" smtClean="0"/>
+              <a:rPr lang="en-US"/>
               <a:t>Third level</a:t>
             </a:r>
           </a:p>
           <a:p>
             <a:pPr lvl="3"/>
             <a:r>
-              <a:rPr lang="en-US" smtClean="0"/>
+              <a:rPr lang="en-US"/>
               <a:t>Fourth level</a:t>
             </a:r>
           </a:p>
           <a:p>
             <a:pPr lvl="4"/>
             <a:r>
-              <a:rPr lang="en-US" smtClean="0"/>
+              <a:rPr lang="en-US"/>
               <a:t>Fifth level</a:t>
             </a:r>
-            <a:endParaRPr lang="en-US"/>
           </a:p>
         </p:txBody>
       </p:sp>
@@ -2250,7 +2283,7 @@
           <a:p>
             <a:pPr lvl="0"/>
             <a:r>
-              <a:rPr lang="en-US" smtClean="0"/>
+              <a:rPr lang="en-US"/>
               <a:t>Click to edit Master text styles</a:t>
             </a:r>
           </a:p>
@@ -2273,7 +2306,7 @@
           <a:p>
             <a:fld id="{5BCAD085-E8A6-8845-BD4E-CB4CCA059FC4}" type="datetimeFigureOut">
               <a:rPr lang="en-US" smtClean="0"/>
-              <a:t>1/27/13</a:t>
+              <a:t>10/19/2026</a:t>
             </a:fld>
             <a:endParaRPr lang="en-US"/>
           </a:p>
@@ -2315,7 +2348,7 @@
           <a:p>
             <a:fld id="{C1FF6DA9-008F-8B48-92A6-B652298478BF}" type="slidenum">
               <a:rPr lang="en-US" smtClean="0"/>
-              <a:t>‹#›</a:t>
+              <a:t>‹Nº›</a:t>
             </a:fld>
             <a:endParaRPr lang="en-US"/>
           </a:p>
@@ -2376,10 +2409,9 @@
           </a:lstStyle>
           <a:p>
             <a:r>
-              <a:rPr lang="en-US" smtClean="0"/>
+              <a:rPr lang="en-US"/>
               <a:t>Click to edit Master title style</a:t>
             </a:r>
-            <a:endParaRPr lang="en-US"/>
           </a:p>
         </p:txBody>
       </p:sp>
@@ -2503,7 +2535,7 @@
           <a:p>
             <a:pPr lvl="0"/>
             <a:r>
-              <a:rPr lang="en-US" smtClean="0"/>
+              <a:rPr lang="en-US"/>
               <a:t>Click to edit Master text styles</a:t>
             </a:r>
           </a:p>
@@ -2526,7 +2558,7 @@
           <a:p>
             <a:fld id="{5BCAD085-E8A6-8845-BD4E-CB4CCA059FC4}" type="datetimeFigureOut">
               <a:rPr lang="en-US" smtClean="0"/>
-              <a:t>1/27/13</a:t>
+              <a:t>10/19/2026</a:t>
             </a:fld>
             <a:endParaRPr lang="en-US"/>
           </a:p>
@@ -2568,7 +2600,7 @@
           <a:p>
             <a:fld id="{C1FF6DA9-008F-8B48-92A6-B652298478BF}" type="slidenum">
               <a:rPr lang="en-US" smtClean="0"/>
-              <a:t>‹#›</a:t>
+              <a:t>‹Nº›</a:t>
             </a:fld>
             <a:endParaRPr lang="en-US"/>
           </a:p>
@@ -2635,10 +2667,9 @@
           <a:lstStyle/>
           <a:p>
             <a:r>
-              <a:rPr lang="en-US" smtClean="0"/>
+              <a:rPr lang="en-US"/>
               <a:t>Click to edit Master title style</a:t>
             </a:r>
-            <a:endParaRPr lang="en-US"/>
           </a:p>
         </p:txBody>
       </p:sp>
@@ -2669,38 +2700,37 @@
           <a:p>
             <a:pPr lvl="0"/>
             <a:r>
-              <a:rPr lang="en-US" smtClean="0"/>
+              <a:rPr lang="en-US"/>
               <a:t>Click to edit Master text styles</a:t>
             </a:r>
           </a:p>
           <a:p>
             <a:pPr lvl="1"/>
             <a:r>
-              <a:rPr lang="en-US" smtClean="0"/>
+              <a:rPr lang="en-US"/>
               <a:t>Second level</a:t>
             </a:r>
           </a:p>
           <a:p>
             <a:pPr lvl="2"/>
             <a:r>
-              <a:rPr lang="en-US" smtClean="0"/>
+              <a:rPr lang="en-US"/>
               <a:t>Third level</a:t>
             </a:r>
           </a:p>
           <a:p>
             <a:pPr lvl="3"/>
             <a:r>
-              <a:rPr lang="en-US" smtClean="0"/>
+              <a:rPr lang="en-US"/>
               <a:t>Fourth level</a:t>
             </a:r>
           </a:p>
           <a:p>
             <a:pPr lvl="4"/>
             <a:r>
-              <a:rPr lang="en-US" smtClean="0"/>
+              <a:rPr lang="en-US"/>
               <a:t>Fifth level</a:t>
             </a:r>
-            <a:endParaRPr lang="en-US"/>
           </a:p>
         </p:txBody>
       </p:sp>
@@ -2739,7 +2769,7 @@
           <a:p>
             <a:fld id="{5BCAD085-E8A6-8845-BD4E-CB4CCA059FC4}" type="datetimeFigureOut">
               <a:rPr lang="en-US" smtClean="0"/>
-              <a:t>1/27/13</a:t>
+              <a:t>10/19/2026</a:t>
             </a:fld>
             <a:endParaRPr lang="en-US"/>
           </a:p>
@@ -2817,7 +2847,7 @@
           <a:p>
             <a:fld id="{C1FF6DA9-008F-8B48-92A6-B652298478BF}" type="slidenum">
               <a:rPr lang="en-US" smtClean="0"/>
-              <a:t>‹#›</a:t>
+              <a:t>‹Nº›</a:t>
             </a:fld>
             <a:endParaRPr lang="en-US"/>
           </a:p>
@@ -3098,7 +3128,7 @@
 </file>
 
 <file path=ppt/slides/slide1.xml><?xml version="1.0" encoding="utf-8"?>
-<p:sld xmlns:a="http://schemas.openxmlformats.org/drawingml/2006/main" xmlns:p="http://schemas.openxmlformats.org/presentationml/2006/main" xmlns:r="http://schemas.openxmlformats.org/officeDocument/2006/relationships">
+<p:sld xmlns:a="http://schemas.openxmlformats.org/drawingml/2006/main" xmlns:r="http://schemas.openxmlformats.org/officeDocument/2006/relationships" xmlns:p="http://schemas.openxmlformats.org/presentationml/2006/main">
   <p:cSld>
     <p:bg>
       <p:bgPr>
@@ -3114,7 +3144,14 @@
         <p:cNvGrpSpPr/>
         <p:nvPr/>
       </p:nvGrpSpPr>
-      <p:grpSpPr/>
+      <p:grpSpPr>
+        <a:xfrm>
+          <a:off x="0" y="0"/>
+          <a:ext cx="0" cy="0"/>
+          <a:chOff x="0" y="0"/>
+          <a:chExt cx="0" cy="0"/>
+        </a:xfrm>
+      </p:grpSpPr>
       <p:sp>
         <p:nvSpPr>
           <p:cNvPr id="2" name="Rectangle 1"/>
@@ -3154,6 +3191,7 @@
           <a:lstStyle/>
           <a:p>
             <a:pPr algn="ctr"/>
+            <a:endParaRPr/>
           </a:p>
         </p:txBody>
       </p:sp>
@@ -3198,6 +3236,7 @@
           <a:lstStyle/>
           <a:p>
             <a:pPr algn="ctr"/>
+            <a:endParaRPr/>
           </a:p>
         </p:txBody>
       </p:sp>
@@ -3218,14 +3257,14 @@
           <a:noFill/>
         </p:spPr>
         <p:txBody>
-          <a:bodyPr wrap="none" lIns="0" rIns="0" tIns="0" bIns="0" anchor="t">
+          <a:bodyPr wrap="none" lIns="0" tIns="0" rIns="0" bIns="0" anchor="t">
             <a:spAutoFit/>
           </a:bodyPr>
           <a:lstStyle/>
           <a:p>
             <a:pPr algn="l"/>
             <a:r>
-              <a:rPr b="1" sz="1050" i="0" u="none">
+              <a:rPr sz="1050" b="1" i="0" u="none">
                 <a:solidFill>
                   <a:srgbClr val="60A5FA"/>
                 </a:solidFill>
@@ -3253,7 +3292,7 @@
           <a:noFill/>
         </p:spPr>
         <p:txBody>
-          <a:bodyPr wrap="none" lIns="0" rIns="0" tIns="0" bIns="0" anchor="t">
+          <a:bodyPr wrap="none" lIns="0" tIns="0" rIns="0" bIns="0" anchor="t">
             <a:spAutoFit/>
           </a:bodyPr>
           <a:lstStyle/>
@@ -3264,7 +3303,7 @@
               </a:lnSpc>
             </a:pPr>
             <a:r>
-              <a:rPr b="1" sz="3900" i="0" u="none">
+              <a:rPr sz="3900" b="1" i="0" u="none">
                 <a:solidFill>
                   <a:srgbClr val="FFFFFF"/>
                 </a:solidFill>
@@ -3292,7 +3331,7 @@
           <a:noFill/>
         </p:spPr>
         <p:txBody>
-          <a:bodyPr wrap="square" lIns="0" rIns="0" tIns="0" bIns="0" anchor="t">
+          <a:bodyPr wrap="square" lIns="0" tIns="0" rIns="0" bIns="0" anchor="t">
             <a:spAutoFit/>
           </a:bodyPr>
           <a:lstStyle/>
@@ -3303,7 +3342,7 @@
               </a:lnSpc>
             </a:pPr>
             <a:r>
-              <a:rPr b="0" sz="1500" i="0" u="none">
+              <a:rPr sz="1500" b="0" i="0" u="none">
                 <a:solidFill>
                   <a:srgbClr val="94A3B8"/>
                 </a:solidFill>
@@ -3331,14 +3370,14 @@
           <a:noFill/>
         </p:spPr>
         <p:txBody>
-          <a:bodyPr wrap="none" lIns="0" rIns="0" tIns="0" bIns="0" anchor="t">
+          <a:bodyPr wrap="none" lIns="0" tIns="0" rIns="0" bIns="0" anchor="t">
             <a:spAutoFit/>
           </a:bodyPr>
           <a:lstStyle/>
           <a:p>
             <a:pPr algn="l"/>
             <a:r>
-              <a:rPr b="0" sz="975" i="0" u="none">
+              <a:rPr sz="975" b="0" i="0" u="none">
                 <a:solidFill>
                   <a:srgbClr val="64748B"/>
                 </a:solidFill>
@@ -3366,14 +3405,14 @@
           <a:noFill/>
         </p:spPr>
         <p:txBody>
-          <a:bodyPr wrap="none" lIns="0" rIns="0" tIns="0" bIns="0" anchor="t">
+          <a:bodyPr wrap="none" lIns="0" tIns="0" rIns="0" bIns="0" anchor="t">
             <a:spAutoFit/>
           </a:bodyPr>
           <a:lstStyle/>
           <a:p>
             <a:pPr algn="l"/>
             <a:r>
-              <a:rPr b="1" sz="1200" i="0" u="none">
+              <a:rPr sz="1200" b="1" i="0" u="none">
                 <a:solidFill>
                   <a:srgbClr val="F8FAFC"/>
                 </a:solidFill>
@@ -3401,14 +3440,14 @@
           <a:noFill/>
         </p:spPr>
         <p:txBody>
-          <a:bodyPr wrap="none" lIns="0" rIns="0" tIns="0" bIns="0" anchor="t">
+          <a:bodyPr wrap="none" lIns="0" tIns="0" rIns="0" bIns="0" anchor="t">
             <a:spAutoFit/>
           </a:bodyPr>
           <a:lstStyle/>
           <a:p>
             <a:pPr algn="l"/>
             <a:r>
-              <a:rPr b="0" sz="975" i="0" u="none">
+              <a:rPr sz="975" b="0" i="0" u="none">
                 <a:solidFill>
                   <a:srgbClr val="64748B"/>
                 </a:solidFill>
@@ -3436,14 +3475,14 @@
           <a:noFill/>
         </p:spPr>
         <p:txBody>
-          <a:bodyPr wrap="none" lIns="0" rIns="0" tIns="0" bIns="0" anchor="t">
+          <a:bodyPr wrap="none" lIns="0" tIns="0" rIns="0" bIns="0" anchor="t">
             <a:spAutoFit/>
           </a:bodyPr>
           <a:lstStyle/>
           <a:p>
             <a:pPr algn="l"/>
             <a:r>
-              <a:rPr b="1" sz="1200" i="0" u="none">
+              <a:rPr sz="1200" b="1" i="0" u="none">
                 <a:solidFill>
                   <a:srgbClr val="F8FAFC"/>
                 </a:solidFill>
@@ -3463,7 +3502,7 @@
 </file>
 
 <file path=ppt/slides/slide10.xml><?xml version="1.0" encoding="utf-8"?>
-<p:sld xmlns:a="http://schemas.openxmlformats.org/drawingml/2006/main" xmlns:p="http://schemas.openxmlformats.org/presentationml/2006/main" xmlns:r="http://schemas.openxmlformats.org/officeDocument/2006/relationships">
+<p:sld xmlns:a="http://schemas.openxmlformats.org/drawingml/2006/main" xmlns:r="http://schemas.openxmlformats.org/officeDocument/2006/relationships" xmlns:p="http://schemas.openxmlformats.org/presentationml/2006/main">
   <p:cSld>
     <p:bg>
       <p:bgPr>
@@ -3479,7 +3518,14 @@
         <p:cNvGrpSpPr/>
         <p:nvPr/>
       </p:nvGrpSpPr>
-      <p:grpSpPr/>
+      <p:grpSpPr>
+        <a:xfrm>
+          <a:off x="0" y="0"/>
+          <a:ext cx="0" cy="0"/>
+          <a:chOff x="0" y="0"/>
+          <a:chExt cx="0" cy="0"/>
+        </a:xfrm>
+      </p:grpSpPr>
       <p:sp>
         <p:nvSpPr>
           <p:cNvPr id="2" name="Rounded Rectangle 1"/>
@@ -3525,6 +3571,7 @@
           <a:lstStyle/>
           <a:p>
             <a:pPr algn="ctr"/>
+            <a:endParaRPr/>
           </a:p>
         </p:txBody>
       </p:sp>
@@ -3573,6 +3620,7 @@
           <a:lstStyle/>
           <a:p>
             <a:pPr algn="ctr"/>
+            <a:endParaRPr/>
           </a:p>
         </p:txBody>
       </p:sp>
@@ -3619,6 +3667,7 @@
           <a:lstStyle/>
           <a:p>
             <a:pPr algn="ctr"/>
+            <a:endParaRPr/>
           </a:p>
         </p:txBody>
       </p:sp>
@@ -3665,6 +3714,7 @@
           <a:lstStyle/>
           <a:p>
             <a:pPr algn="ctr"/>
+            <a:endParaRPr/>
           </a:p>
         </p:txBody>
       </p:sp>
@@ -3685,14 +3735,14 @@
           <a:noFill/>
         </p:spPr>
         <p:txBody>
-          <a:bodyPr wrap="none" lIns="0" rIns="0" tIns="0" bIns="0" anchor="t">
+          <a:bodyPr wrap="none" lIns="0" tIns="0" rIns="0" bIns="0" anchor="t">
             <a:spAutoFit/>
           </a:bodyPr>
           <a:lstStyle/>
           <a:p>
             <a:pPr algn="l"/>
             <a:r>
-              <a:rPr b="1" sz="1050" i="0" u="none">
+              <a:rPr sz="1050" b="1" i="0" u="none">
                 <a:solidFill>
                   <a:srgbClr val="2563EB"/>
                 </a:solidFill>
@@ -3720,7 +3770,7 @@
           <a:noFill/>
         </p:spPr>
         <p:txBody>
-          <a:bodyPr wrap="none" lIns="0" rIns="0" tIns="0" bIns="0" anchor="t">
+          <a:bodyPr wrap="none" lIns="0" tIns="0" rIns="0" bIns="0" anchor="t">
             <a:spAutoFit/>
           </a:bodyPr>
           <a:lstStyle/>
@@ -3731,7 +3781,7 @@
               </a:lnSpc>
             </a:pPr>
             <a:r>
-              <a:rPr b="1" sz="2400" i="0" u="none">
+              <a:rPr sz="2400" b="1" i="0" u="none">
                 <a:solidFill>
                   <a:srgbClr val="0F172A"/>
                 </a:solidFill>
@@ -3759,14 +3809,14 @@
           <a:noFill/>
         </p:spPr>
         <p:txBody>
-          <a:bodyPr wrap="none" lIns="0" rIns="0" tIns="0" bIns="0" anchor="t">
+          <a:bodyPr wrap="none" lIns="0" tIns="0" rIns="0" bIns="0" anchor="t">
             <a:spAutoFit/>
           </a:bodyPr>
           <a:lstStyle/>
           <a:p>
             <a:pPr algn="l"/>
             <a:r>
-              <a:rPr b="0" sz="1200" i="0" u="none">
+              <a:rPr sz="1200" b="0" i="0" u="none">
                 <a:solidFill>
                   <a:srgbClr val="64748B"/>
                 </a:solidFill>
@@ -3794,14 +3844,14 @@
           <a:noFill/>
         </p:spPr>
         <p:txBody>
-          <a:bodyPr wrap="square" lIns="0" rIns="0" tIns="0" bIns="0" anchor="t">
+          <a:bodyPr wrap="square" lIns="0" tIns="0" rIns="0" bIns="0" anchor="t">
             <a:spAutoFit/>
           </a:bodyPr>
           <a:lstStyle/>
           <a:p>
             <a:pPr algn="l"/>
             <a:r>
-              <a:rPr b="1" sz="975" i="0" u="none">
+              <a:rPr sz="975" b="1" i="0" u="none">
                 <a:solidFill>
                   <a:srgbClr val="065F46"/>
                 </a:solidFill>
@@ -3829,14 +3879,14 @@
           <a:noFill/>
         </p:spPr>
         <p:txBody>
-          <a:bodyPr wrap="none" lIns="0" rIns="0" tIns="0" bIns="0" anchor="t">
+          <a:bodyPr wrap="none" lIns="0" tIns="0" rIns="0" bIns="0" anchor="t">
             <a:spAutoFit/>
           </a:bodyPr>
           <a:lstStyle/>
           <a:p>
             <a:pPr algn="l"/>
             <a:r>
-              <a:rPr b="1" sz="1650" i="0" u="none">
+              <a:rPr sz="1650" b="1" i="0" u="none">
                 <a:solidFill>
                   <a:srgbClr val="0F172A"/>
                 </a:solidFill>
@@ -3864,7 +3914,7 @@
           <a:noFill/>
         </p:spPr>
         <p:txBody>
-          <a:bodyPr wrap="square" lIns="0" rIns="0" tIns="0" bIns="0" anchor="t">
+          <a:bodyPr wrap="square" lIns="0" tIns="0" rIns="0" bIns="0" anchor="t">
             <a:spAutoFit/>
           </a:bodyPr>
           <a:lstStyle/>
@@ -3875,7 +3925,7 @@
               </a:lnSpc>
             </a:pPr>
             <a:r>
-              <a:rPr b="0" sz="1200" i="0" u="none">
+              <a:rPr sz="1200" b="0" i="0" u="none">
                 <a:solidFill>
                   <a:srgbClr val="475569"/>
                 </a:solidFill>
@@ -3903,14 +3953,14 @@
           <a:noFill/>
         </p:spPr>
         <p:txBody>
-          <a:bodyPr wrap="square" lIns="0" rIns="0" tIns="0" bIns="0" anchor="t">
+          <a:bodyPr wrap="square" lIns="0" tIns="0" rIns="0" bIns="0" anchor="t">
             <a:spAutoFit/>
           </a:bodyPr>
           <a:lstStyle/>
           <a:p>
             <a:pPr algn="l"/>
             <a:r>
-              <a:rPr b="1" sz="975" i="0" u="none">
+              <a:rPr sz="975" b="1" i="0" u="none">
                 <a:solidFill>
                   <a:srgbClr val="92400E"/>
                 </a:solidFill>
@@ -3938,14 +3988,14 @@
           <a:noFill/>
         </p:spPr>
         <p:txBody>
-          <a:bodyPr wrap="none" lIns="0" rIns="0" tIns="0" bIns="0" anchor="t">
+          <a:bodyPr wrap="none" lIns="0" tIns="0" rIns="0" bIns="0" anchor="t">
             <a:spAutoFit/>
           </a:bodyPr>
           <a:lstStyle/>
           <a:p>
             <a:pPr algn="l"/>
             <a:r>
-              <a:rPr b="1" sz="1650" i="0" u="none">
+              <a:rPr sz="1650" b="1" i="0" u="none">
                 <a:solidFill>
                   <a:srgbClr val="78350F"/>
                 </a:solidFill>
@@ -3973,7 +4023,7 @@
           <a:noFill/>
         </p:spPr>
         <p:txBody>
-          <a:bodyPr wrap="square" lIns="0" rIns="0" tIns="0" bIns="0" anchor="t">
+          <a:bodyPr wrap="square" lIns="0" tIns="0" rIns="0" bIns="0" anchor="t">
             <a:spAutoFit/>
           </a:bodyPr>
           <a:lstStyle/>
@@ -3984,7 +4034,7 @@
               </a:lnSpc>
             </a:pPr>
             <a:r>
-              <a:rPr b="0" sz="1200" i="0" u="none">
+              <a:rPr sz="1200" b="0" i="0" u="none">
                 <a:solidFill>
                   <a:srgbClr val="92400E"/>
                 </a:solidFill>
@@ -4004,7 +4054,7 @@
 </file>
 
 <file path=ppt/slides/slide11.xml><?xml version="1.0" encoding="utf-8"?>
-<p:sld xmlns:a="http://schemas.openxmlformats.org/drawingml/2006/main" xmlns:p="http://schemas.openxmlformats.org/presentationml/2006/main" xmlns:r="http://schemas.openxmlformats.org/officeDocument/2006/relationships">
+<p:sld xmlns:a="http://schemas.openxmlformats.org/drawingml/2006/main" xmlns:r="http://schemas.openxmlformats.org/officeDocument/2006/relationships" xmlns:p="http://schemas.openxmlformats.org/presentationml/2006/main">
   <p:cSld>
     <p:bg>
       <p:bgPr>
@@ -4020,7 +4070,14 @@
         <p:cNvGrpSpPr/>
         <p:nvPr/>
       </p:nvGrpSpPr>
-      <p:grpSpPr/>
+      <p:grpSpPr>
+        <a:xfrm>
+          <a:off x="0" y="0"/>
+          <a:ext cx="0" cy="0"/>
+          <a:chOff x="0" y="0"/>
+          <a:chExt cx="0" cy="0"/>
+        </a:xfrm>
+      </p:grpSpPr>
       <p:sp>
         <p:nvSpPr>
           <p:cNvPr id="2" name="Rounded Rectangle 1"/>
@@ -4066,6 +4123,7 @@
           <a:lstStyle/>
           <a:p>
             <a:pPr algn="ctr"/>
+            <a:endParaRPr/>
           </a:p>
         </p:txBody>
       </p:sp>
@@ -4114,6 +4172,7 @@
           <a:lstStyle/>
           <a:p>
             <a:pPr algn="ctr"/>
+            <a:endParaRPr/>
           </a:p>
         </p:txBody>
       </p:sp>
@@ -4162,6 +4221,7 @@
           <a:lstStyle/>
           <a:p>
             <a:pPr algn="ctr"/>
+            <a:endParaRPr/>
           </a:p>
         </p:txBody>
       </p:sp>
@@ -4210,6 +4270,7 @@
           <a:lstStyle/>
           <a:p>
             <a:pPr algn="ctr"/>
+            <a:endParaRPr/>
           </a:p>
         </p:txBody>
       </p:sp>
@@ -4230,14 +4291,14 @@
           <a:noFill/>
         </p:spPr>
         <p:txBody>
-          <a:bodyPr wrap="none" lIns="0" rIns="0" tIns="0" bIns="0" anchor="t">
+          <a:bodyPr wrap="none" lIns="0" tIns="0" rIns="0" bIns="0" anchor="t">
             <a:spAutoFit/>
           </a:bodyPr>
           <a:lstStyle/>
           <a:p>
             <a:pPr algn="l"/>
             <a:r>
-              <a:rPr b="1" sz="1050" i="0" u="none">
+              <a:rPr sz="1050" b="1" i="0" u="none">
                 <a:solidFill>
                   <a:srgbClr val="2563EB"/>
                 </a:solidFill>
@@ -4265,7 +4326,7 @@
           <a:noFill/>
         </p:spPr>
         <p:txBody>
-          <a:bodyPr wrap="none" lIns="0" rIns="0" tIns="0" bIns="0" anchor="t">
+          <a:bodyPr wrap="none" lIns="0" tIns="0" rIns="0" bIns="0" anchor="t">
             <a:spAutoFit/>
           </a:bodyPr>
           <a:lstStyle/>
@@ -4276,7 +4337,7 @@
               </a:lnSpc>
             </a:pPr>
             <a:r>
-              <a:rPr b="1" sz="2400" i="0" u="none">
+              <a:rPr sz="2400" b="1" i="0" u="none">
                 <a:solidFill>
                   <a:srgbClr val="0F172A"/>
                 </a:solidFill>
@@ -4304,14 +4365,14 @@
           <a:noFill/>
         </p:spPr>
         <p:txBody>
-          <a:bodyPr wrap="none" lIns="0" rIns="0" tIns="0" bIns="0" anchor="t">
+          <a:bodyPr wrap="none" lIns="0" tIns="0" rIns="0" bIns="0" anchor="t">
             <a:spAutoFit/>
           </a:bodyPr>
           <a:lstStyle/>
           <a:p>
             <a:pPr algn="l"/>
             <a:r>
-              <a:rPr b="0" sz="1200" i="0" u="none">
+              <a:rPr sz="1200" b="0" i="0" u="none">
                 <a:solidFill>
                   <a:srgbClr val="64748B"/>
                 </a:solidFill>
@@ -4339,14 +4400,14 @@
           <a:noFill/>
         </p:spPr>
         <p:txBody>
-          <a:bodyPr wrap="none" lIns="0" rIns="0" tIns="0" bIns="0" anchor="t">
+          <a:bodyPr wrap="none" lIns="0" tIns="0" rIns="0" bIns="0" anchor="t">
             <a:spAutoFit/>
           </a:bodyPr>
           <a:lstStyle/>
           <a:p>
             <a:pPr algn="l"/>
             <a:r>
-              <a:rPr b="1" sz="2400" i="0" u="none">
+              <a:rPr sz="2400" b="1" i="0" u="none">
                 <a:solidFill>
                   <a:srgbClr val="0F172A"/>
                 </a:solidFill>
@@ -4374,14 +4435,14 @@
           <a:noFill/>
         </p:spPr>
         <p:txBody>
-          <a:bodyPr wrap="none" lIns="0" rIns="0" tIns="0" bIns="0" anchor="t">
+          <a:bodyPr wrap="none" lIns="0" tIns="0" rIns="0" bIns="0" anchor="t">
             <a:spAutoFit/>
           </a:bodyPr>
           <a:lstStyle/>
           <a:p>
             <a:pPr algn="l"/>
             <a:r>
-              <a:rPr b="1" sz="1350" i="0" u="none">
+              <a:rPr sz="1350" b="1" i="0" u="none">
                 <a:solidFill>
                   <a:srgbClr val="0F172A"/>
                 </a:solidFill>
@@ -4409,14 +4470,14 @@
           <a:noFill/>
         </p:spPr>
         <p:txBody>
-          <a:bodyPr wrap="square" lIns="0" rIns="0" tIns="0" bIns="0" anchor="t">
+          <a:bodyPr wrap="square" lIns="0" tIns="0" rIns="0" bIns="0" anchor="t">
             <a:spAutoFit/>
           </a:bodyPr>
           <a:lstStyle/>
           <a:p>
             <a:pPr algn="l"/>
             <a:r>
-              <a:rPr b="0" sz="1050" i="0" u="none">
+              <a:rPr sz="1050" b="0" i="0" u="none">
                 <a:solidFill>
                   <a:srgbClr val="475569"/>
                 </a:solidFill>
@@ -4444,14 +4505,14 @@
           <a:noFill/>
         </p:spPr>
         <p:txBody>
-          <a:bodyPr wrap="none" lIns="0" rIns="0" tIns="0" bIns="0" anchor="t">
+          <a:bodyPr wrap="none" lIns="0" tIns="0" rIns="0" bIns="0" anchor="t">
             <a:spAutoFit/>
           </a:bodyPr>
           <a:lstStyle/>
           <a:p>
             <a:pPr algn="l"/>
             <a:r>
-              <a:rPr b="1" sz="2400" i="0" u="none">
+              <a:rPr sz="2400" b="1" i="0" u="none">
                 <a:solidFill>
                   <a:srgbClr val="0F172A"/>
                 </a:solidFill>
@@ -4479,14 +4540,14 @@
           <a:noFill/>
         </p:spPr>
         <p:txBody>
-          <a:bodyPr wrap="none" lIns="0" rIns="0" tIns="0" bIns="0" anchor="t">
+          <a:bodyPr wrap="none" lIns="0" tIns="0" rIns="0" bIns="0" anchor="t">
             <a:spAutoFit/>
           </a:bodyPr>
           <a:lstStyle/>
           <a:p>
             <a:pPr algn="l"/>
             <a:r>
-              <a:rPr b="1" sz="1350" i="0" u="none">
+              <a:rPr sz="1350" b="1" i="0" u="none">
                 <a:solidFill>
                   <a:srgbClr val="0F172A"/>
                 </a:solidFill>
@@ -4514,14 +4575,14 @@
           <a:noFill/>
         </p:spPr>
         <p:txBody>
-          <a:bodyPr wrap="square" lIns="0" rIns="0" tIns="0" bIns="0" anchor="t">
+          <a:bodyPr wrap="square" lIns="0" tIns="0" rIns="0" bIns="0" anchor="t">
             <a:spAutoFit/>
           </a:bodyPr>
           <a:lstStyle/>
           <a:p>
             <a:pPr algn="l"/>
             <a:r>
-              <a:rPr b="0" sz="1050" i="0" u="none">
+              <a:rPr sz="1050" b="0" i="0" u="none">
                 <a:solidFill>
                   <a:srgbClr val="475569"/>
                 </a:solidFill>
@@ -4549,14 +4610,14 @@
           <a:noFill/>
         </p:spPr>
         <p:txBody>
-          <a:bodyPr wrap="none" lIns="0" rIns="0" tIns="0" bIns="0" anchor="t">
+          <a:bodyPr wrap="none" lIns="0" tIns="0" rIns="0" bIns="0" anchor="t">
             <a:spAutoFit/>
           </a:bodyPr>
           <a:lstStyle/>
           <a:p>
             <a:pPr algn="l"/>
             <a:r>
-              <a:rPr b="1" sz="2400" i="0" u="none">
+              <a:rPr sz="2400" b="1" i="0" u="none">
                 <a:solidFill>
                   <a:srgbClr val="3B82F6"/>
                 </a:solidFill>
@@ -4584,14 +4645,14 @@
           <a:noFill/>
         </p:spPr>
         <p:txBody>
-          <a:bodyPr wrap="none" lIns="0" rIns="0" tIns="0" bIns="0" anchor="t">
+          <a:bodyPr wrap="none" lIns="0" tIns="0" rIns="0" bIns="0" anchor="t">
             <a:spAutoFit/>
           </a:bodyPr>
           <a:lstStyle/>
           <a:p>
             <a:pPr algn="l"/>
             <a:r>
-              <a:rPr b="1" sz="1350" i="0" u="none">
+              <a:rPr sz="1350" b="1" i="0" u="none">
                 <a:solidFill>
                   <a:srgbClr val="1E40AF"/>
                 </a:solidFill>
@@ -4619,14 +4680,14 @@
           <a:noFill/>
         </p:spPr>
         <p:txBody>
-          <a:bodyPr wrap="square" lIns="0" rIns="0" tIns="0" bIns="0" anchor="t">
+          <a:bodyPr wrap="square" lIns="0" tIns="0" rIns="0" bIns="0" anchor="t">
             <a:spAutoFit/>
           </a:bodyPr>
           <a:lstStyle/>
           <a:p>
             <a:pPr algn="l"/>
             <a:r>
-              <a:rPr b="0" sz="1050" i="0" u="none">
+              <a:rPr sz="1050" b="0" i="0" u="none">
                 <a:solidFill>
                   <a:srgbClr val="1E3A8A"/>
                 </a:solidFill>
@@ -4654,14 +4715,14 @@
           <a:noFill/>
         </p:spPr>
         <p:txBody>
-          <a:bodyPr wrap="none" lIns="0" rIns="0" tIns="0" bIns="0" anchor="t">
+          <a:bodyPr wrap="none" lIns="0" tIns="0" rIns="0" bIns="0" anchor="t">
             <a:spAutoFit/>
           </a:bodyPr>
           <a:lstStyle/>
           <a:p>
             <a:pPr algn="l"/>
             <a:r>
-              <a:rPr b="1" sz="2400" i="0" u="none">
+              <a:rPr sz="2400" b="1" i="0" u="none">
                 <a:solidFill>
                   <a:srgbClr val="0F172A"/>
                 </a:solidFill>
@@ -4689,14 +4750,14 @@
           <a:noFill/>
         </p:spPr>
         <p:txBody>
-          <a:bodyPr wrap="none" lIns="0" rIns="0" tIns="0" bIns="0" anchor="t">
+          <a:bodyPr wrap="none" lIns="0" tIns="0" rIns="0" bIns="0" anchor="t">
             <a:spAutoFit/>
           </a:bodyPr>
           <a:lstStyle/>
           <a:p>
             <a:pPr algn="l"/>
             <a:r>
-              <a:rPr b="1" sz="1350" i="0" u="none">
+              <a:rPr sz="1350" b="1" i="0" u="none">
                 <a:solidFill>
                   <a:srgbClr val="0F172A"/>
                 </a:solidFill>
@@ -4724,14 +4785,14 @@
           <a:noFill/>
         </p:spPr>
         <p:txBody>
-          <a:bodyPr wrap="square" lIns="0" rIns="0" tIns="0" bIns="0" anchor="t">
+          <a:bodyPr wrap="square" lIns="0" tIns="0" rIns="0" bIns="0" anchor="t">
             <a:spAutoFit/>
           </a:bodyPr>
           <a:lstStyle/>
           <a:p>
             <a:pPr algn="l"/>
             <a:r>
-              <a:rPr b="0" sz="1050" i="0" u="none">
+              <a:rPr sz="1050" b="0" i="0" u="none">
                 <a:solidFill>
                   <a:srgbClr val="475569"/>
                 </a:solidFill>
@@ -4751,7 +4812,7 @@
 </file>
 
 <file path=ppt/slides/slide12.xml><?xml version="1.0" encoding="utf-8"?>
-<p:sld xmlns:a="http://schemas.openxmlformats.org/drawingml/2006/main" xmlns:p="http://schemas.openxmlformats.org/presentationml/2006/main" xmlns:r="http://schemas.openxmlformats.org/officeDocument/2006/relationships">
+<p:sld xmlns:a="http://schemas.openxmlformats.org/drawingml/2006/main" xmlns:r="http://schemas.openxmlformats.org/officeDocument/2006/relationships" xmlns:p="http://schemas.openxmlformats.org/presentationml/2006/main">
   <p:cSld>
     <p:bg>
       <p:bgPr>
@@ -4767,7 +4828,14 @@
         <p:cNvGrpSpPr/>
         <p:nvPr/>
       </p:nvGrpSpPr>
-      <p:grpSpPr/>
+      <p:grpSpPr>
+        <a:xfrm>
+          <a:off x="0" y="0"/>
+          <a:ext cx="0" cy="0"/>
+          <a:chOff x="0" y="0"/>
+          <a:chExt cx="0" cy="0"/>
+        </a:xfrm>
+      </p:grpSpPr>
       <p:sp>
         <p:nvSpPr>
           <p:cNvPr id="2" name="TextBox 1"/>
@@ -4785,14 +4853,14 @@
           <a:noFill/>
         </p:spPr>
         <p:txBody>
-          <a:bodyPr wrap="none" lIns="0" rIns="0" tIns="0" bIns="0" anchor="t">
+          <a:bodyPr wrap="none" lIns="0" tIns="0" rIns="0" bIns="0" anchor="t">
             <a:spAutoFit/>
           </a:bodyPr>
           <a:lstStyle/>
           <a:p>
             <a:pPr algn="ctr"/>
             <a:r>
-              <a:rPr b="1" sz="1050" i="0" u="none">
+              <a:rPr sz="1050" b="1" i="0" u="none">
                 <a:solidFill>
                   <a:srgbClr val="38BDF8"/>
                 </a:solidFill>
@@ -4820,7 +4888,7 @@
           <a:noFill/>
         </p:spPr>
         <p:txBody>
-          <a:bodyPr wrap="none" lIns="0" rIns="0" tIns="0" bIns="0" anchor="t">
+          <a:bodyPr wrap="none" lIns="0" tIns="0" rIns="0" bIns="0" anchor="t">
             <a:spAutoFit/>
           </a:bodyPr>
           <a:lstStyle/>
@@ -4831,7 +4899,7 @@
               </a:lnSpc>
             </a:pPr>
             <a:r>
-              <a:rPr b="1" sz="3600" i="0" u="none">
+              <a:rPr sz="3600" b="1" i="0" u="none">
                 <a:solidFill>
                   <a:srgbClr val="FFFFFF"/>
                 </a:solidFill>
@@ -4859,14 +4927,14 @@
           <a:noFill/>
         </p:spPr>
         <p:txBody>
-          <a:bodyPr wrap="square" lIns="0" rIns="0" tIns="0" bIns="0" anchor="t">
+          <a:bodyPr wrap="square" lIns="0" tIns="0" rIns="0" bIns="0" anchor="t">
             <a:spAutoFit/>
           </a:bodyPr>
           <a:lstStyle/>
           <a:p>
             <a:pPr algn="ctr"/>
             <a:r>
-              <a:rPr b="0" sz="1350" i="0" u="none">
+              <a:rPr sz="1350" b="0" i="0" u="none">
                 <a:solidFill>
                   <a:srgbClr val="94A3B8"/>
                 </a:solidFill>
@@ -4886,7 +4954,7 @@
 </file>
 
 <file path=ppt/slides/slide2.xml><?xml version="1.0" encoding="utf-8"?>
-<p:sld xmlns:a="http://schemas.openxmlformats.org/drawingml/2006/main" xmlns:p="http://schemas.openxmlformats.org/presentationml/2006/main" xmlns:r="http://schemas.openxmlformats.org/officeDocument/2006/relationships">
+<p:sld xmlns:a="http://schemas.openxmlformats.org/drawingml/2006/main" xmlns:r="http://schemas.openxmlformats.org/officeDocument/2006/relationships" xmlns:p="http://schemas.openxmlformats.org/presentationml/2006/main">
   <p:cSld>
     <p:bg>
       <p:bgPr>
@@ -4902,7 +4970,14 @@
         <p:cNvGrpSpPr/>
         <p:nvPr/>
       </p:nvGrpSpPr>
-      <p:grpSpPr/>
+      <p:grpSpPr>
+        <a:xfrm>
+          <a:off x="0" y="0"/>
+          <a:ext cx="0" cy="0"/>
+          <a:chOff x="0" y="0"/>
+          <a:chExt cx="0" cy="0"/>
+        </a:xfrm>
+      </p:grpSpPr>
       <p:sp>
         <p:nvSpPr>
           <p:cNvPr id="2" name="Rounded Rectangle 1"/>
@@ -4948,6 +5023,7 @@
           <a:lstStyle/>
           <a:p>
             <a:pPr algn="ctr"/>
+            <a:endParaRPr/>
           </a:p>
         </p:txBody>
       </p:sp>
@@ -4994,6 +5070,7 @@
           <a:lstStyle/>
           <a:p>
             <a:pPr algn="ctr"/>
+            <a:endParaRPr/>
           </a:p>
         </p:txBody>
       </p:sp>
@@ -5042,6 +5119,7 @@
           <a:lstStyle/>
           <a:p>
             <a:pPr algn="ctr"/>
+            <a:endParaRPr/>
           </a:p>
         </p:txBody>
       </p:sp>
@@ -5090,6 +5168,7 @@
           <a:lstStyle/>
           <a:p>
             <a:pPr algn="ctr"/>
+            <a:endParaRPr/>
           </a:p>
         </p:txBody>
       </p:sp>
@@ -5138,6 +5217,7 @@
           <a:lstStyle/>
           <a:p>
             <a:pPr algn="ctr"/>
+            <a:endParaRPr/>
           </a:p>
         </p:txBody>
       </p:sp>
@@ -5206,14 +5286,14 @@
           <a:noFill/>
         </p:spPr>
         <p:txBody>
-          <a:bodyPr wrap="none" lIns="0" rIns="0" tIns="0" bIns="0" anchor="t">
+          <a:bodyPr wrap="none" lIns="0" tIns="0" rIns="0" bIns="0" anchor="t">
             <a:spAutoFit/>
           </a:bodyPr>
           <a:lstStyle/>
           <a:p>
             <a:pPr algn="l"/>
             <a:r>
-              <a:rPr b="1" sz="1050" i="0" u="none">
+              <a:rPr sz="1050" b="1" i="0" u="none">
                 <a:solidFill>
                   <a:srgbClr val="2563EB"/>
                 </a:solidFill>
@@ -5241,7 +5321,7 @@
           <a:noFill/>
         </p:spPr>
         <p:txBody>
-          <a:bodyPr wrap="none" lIns="0" rIns="0" tIns="0" bIns="0" anchor="t">
+          <a:bodyPr wrap="none" lIns="0" tIns="0" rIns="0" bIns="0" anchor="t">
             <a:spAutoFit/>
           </a:bodyPr>
           <a:lstStyle/>
@@ -5252,7 +5332,7 @@
               </a:lnSpc>
             </a:pPr>
             <a:r>
-              <a:rPr b="1" sz="2400" i="0" u="none">
+              <a:rPr sz="2400" b="1" i="0" u="none">
                 <a:solidFill>
                   <a:srgbClr val="0F172A"/>
                 </a:solidFill>
@@ -5280,14 +5360,14 @@
           <a:noFill/>
         </p:spPr>
         <p:txBody>
-          <a:bodyPr wrap="none" lIns="0" rIns="0" tIns="0" bIns="0" anchor="t">
+          <a:bodyPr wrap="none" lIns="0" tIns="0" rIns="0" bIns="0" anchor="t">
             <a:spAutoFit/>
           </a:bodyPr>
           <a:lstStyle/>
           <a:p>
             <a:pPr algn="l"/>
             <a:r>
-              <a:rPr b="0" sz="1200" i="0" u="none">
+              <a:rPr sz="1200" b="0" i="0" u="none">
                 <a:solidFill>
                   <a:srgbClr val="64748B"/>
                 </a:solidFill>
@@ -5315,14 +5395,14 @@
           <a:noFill/>
         </p:spPr>
         <p:txBody>
-          <a:bodyPr wrap="square" lIns="0" rIns="0" tIns="0" bIns="0" anchor="t">
+          <a:bodyPr wrap="square" lIns="0" tIns="0" rIns="0" bIns="0" anchor="t">
             <a:spAutoFit/>
           </a:bodyPr>
           <a:lstStyle/>
           <a:p>
             <a:pPr algn="l"/>
             <a:r>
-              <a:rPr b="1" sz="975" i="0" u="none">
+              <a:rPr sz="975" b="1" i="0" u="none">
                 <a:solidFill>
                   <a:srgbClr val="1E40AF"/>
                 </a:solidFill>
@@ -5350,7 +5430,7 @@
           <a:noFill/>
         </p:spPr>
         <p:txBody>
-          <a:bodyPr wrap="none" lIns="0" rIns="0" tIns="0" bIns="0" anchor="t">
+          <a:bodyPr wrap="none" lIns="0" tIns="0" rIns="0" bIns="0" anchor="t">
             <a:spAutoFit/>
           </a:bodyPr>
           <a:lstStyle/>
@@ -5361,7 +5441,7 @@
               </a:lnSpc>
             </a:pPr>
             <a:r>
-              <a:rPr b="1" sz="4800" i="0" u="none">
+              <a:rPr sz="4800" b="1" i="0" u="none">
                 <a:solidFill>
                   <a:srgbClr val="1E40AF"/>
                 </a:solidFill>
@@ -5389,14 +5469,14 @@
           <a:noFill/>
         </p:spPr>
         <p:txBody>
-          <a:bodyPr wrap="none" lIns="0" rIns="0" tIns="0" bIns="0" anchor="t">
+          <a:bodyPr wrap="none" lIns="0" tIns="0" rIns="0" bIns="0" anchor="t">
             <a:spAutoFit/>
           </a:bodyPr>
           <a:lstStyle/>
           <a:p>
             <a:pPr algn="l"/>
             <a:r>
-              <a:rPr b="1" sz="1650" i="0" u="none">
+              <a:rPr sz="1650" b="1" i="0" u="none">
                 <a:solidFill>
                   <a:srgbClr val="1E3A8A"/>
                 </a:solidFill>
@@ -5424,7 +5504,7 @@
           <a:noFill/>
         </p:spPr>
         <p:txBody>
-          <a:bodyPr wrap="square" lIns="0" rIns="0" tIns="0" bIns="0" anchor="t">
+          <a:bodyPr wrap="square" lIns="0" tIns="0" rIns="0" bIns="0" anchor="t">
             <a:spAutoFit/>
           </a:bodyPr>
           <a:lstStyle/>
@@ -5435,7 +5515,7 @@
               </a:lnSpc>
             </a:pPr>
             <a:r>
-              <a:rPr b="0" sz="1200" i="0" u="none">
+              <a:rPr sz="1200" b="0" i="0" u="none">
                 <a:solidFill>
                   <a:srgbClr val="3B82F6"/>
                 </a:solidFill>
@@ -5463,14 +5543,14 @@
           <a:noFill/>
         </p:spPr>
         <p:txBody>
-          <a:bodyPr wrap="square" lIns="0" rIns="0" tIns="0" bIns="0" anchor="t">
+          <a:bodyPr wrap="square" lIns="0" tIns="0" rIns="0" bIns="0" anchor="t">
             <a:spAutoFit/>
           </a:bodyPr>
           <a:lstStyle/>
           <a:p>
             <a:pPr algn="l"/>
             <a:r>
-              <a:rPr b="0" sz="1200" i="0" u="none">
+              <a:rPr sz="1200" b="0" i="0" u="none">
                 <a:solidFill>
                   <a:srgbClr val="475569"/>
                 </a:solidFill>
@@ -5498,14 +5578,14 @@
           <a:noFill/>
         </p:spPr>
         <p:txBody>
-          <a:bodyPr wrap="square" lIns="0" rIns="0" tIns="0" bIns="0" anchor="t">
+          <a:bodyPr wrap="square" lIns="0" tIns="0" rIns="0" bIns="0" anchor="t">
             <a:spAutoFit/>
           </a:bodyPr>
           <a:lstStyle/>
           <a:p>
             <a:pPr algn="l"/>
             <a:r>
-              <a:rPr b="0" sz="1200" i="0" u="none">
+              <a:rPr sz="1200" b="0" i="0" u="none">
                 <a:solidFill>
                   <a:srgbClr val="475569"/>
                 </a:solidFill>
@@ -5533,14 +5613,14 @@
           <a:noFill/>
         </p:spPr>
         <p:txBody>
-          <a:bodyPr wrap="square" lIns="0" rIns="0" tIns="0" bIns="0" anchor="t">
+          <a:bodyPr wrap="square" lIns="0" tIns="0" rIns="0" bIns="0" anchor="t">
             <a:spAutoFit/>
           </a:bodyPr>
           <a:lstStyle/>
           <a:p>
             <a:pPr algn="l"/>
             <a:r>
-              <a:rPr b="0" sz="1200" i="0" u="none">
+              <a:rPr sz="1200" b="0" i="0" u="none">
                 <a:solidFill>
                   <a:srgbClr val="475569"/>
                 </a:solidFill>
@@ -5568,14 +5648,14 @@
           <a:noFill/>
         </p:spPr>
         <p:txBody>
-          <a:bodyPr wrap="none" lIns="0" rIns="0" tIns="0" bIns="0" anchor="t">
+          <a:bodyPr wrap="none" lIns="0" tIns="0" rIns="0" bIns="0" anchor="t">
             <a:spAutoFit/>
           </a:bodyPr>
           <a:lstStyle/>
           <a:p>
             <a:pPr algn="l"/>
             <a:r>
-              <a:rPr b="1" sz="1350" i="0" u="none">
+              <a:rPr sz="1350" b="1" i="0" u="none">
                 <a:solidFill>
                   <a:srgbClr val="0F172A"/>
                 </a:solidFill>
@@ -5603,14 +5683,14 @@
           <a:noFill/>
         </p:spPr>
         <p:txBody>
-          <a:bodyPr wrap="none" lIns="0" rIns="0" tIns="0" bIns="0" anchor="t">
+          <a:bodyPr wrap="none" lIns="0" tIns="0" rIns="0" bIns="0" anchor="t">
             <a:spAutoFit/>
           </a:bodyPr>
           <a:lstStyle/>
           <a:p>
             <a:pPr algn="l"/>
             <a:r>
-              <a:rPr b="1" sz="1350" i="0" u="none">
+              <a:rPr sz="1350" b="1" i="0" u="none">
                 <a:solidFill>
                   <a:srgbClr val="0F172A"/>
                 </a:solidFill>
@@ -5638,14 +5718,14 @@
           <a:noFill/>
         </p:spPr>
         <p:txBody>
-          <a:bodyPr wrap="none" lIns="0" rIns="0" tIns="0" bIns="0" anchor="t">
+          <a:bodyPr wrap="none" lIns="0" tIns="0" rIns="0" bIns="0" anchor="t">
             <a:spAutoFit/>
           </a:bodyPr>
           <a:lstStyle/>
           <a:p>
             <a:pPr algn="l"/>
             <a:r>
-              <a:rPr b="1" sz="1350" i="0" u="none">
+              <a:rPr sz="1350" b="1" i="0" u="none">
                 <a:solidFill>
                   <a:srgbClr val="0F172A"/>
                 </a:solidFill>
@@ -5665,7 +5745,7 @@
 </file>
 
 <file path=ppt/slides/slide3.xml><?xml version="1.0" encoding="utf-8"?>
-<p:sld xmlns:a="http://schemas.openxmlformats.org/drawingml/2006/main" xmlns:p="http://schemas.openxmlformats.org/presentationml/2006/main" xmlns:r="http://schemas.openxmlformats.org/officeDocument/2006/relationships">
+<p:sld xmlns:a="http://schemas.openxmlformats.org/drawingml/2006/main" xmlns:r="http://schemas.openxmlformats.org/officeDocument/2006/relationships" xmlns:p="http://schemas.openxmlformats.org/presentationml/2006/main">
   <p:cSld>
     <p:bg>
       <p:bgPr>
@@ -5681,7 +5761,14 @@
         <p:cNvGrpSpPr/>
         <p:nvPr/>
       </p:nvGrpSpPr>
-      <p:grpSpPr/>
+      <p:grpSpPr>
+        <a:xfrm>
+          <a:off x="0" y="0"/>
+          <a:ext cx="0" cy="0"/>
+          <a:chOff x="0" y="0"/>
+          <a:chExt cx="0" cy="0"/>
+        </a:xfrm>
+      </p:grpSpPr>
       <p:sp>
         <p:nvSpPr>
           <p:cNvPr id="2" name="Rounded Rectangle 1"/>
@@ -5727,6 +5814,7 @@
           <a:lstStyle/>
           <a:p>
             <a:pPr algn="ctr"/>
+            <a:endParaRPr/>
           </a:p>
         </p:txBody>
       </p:sp>
@@ -5775,6 +5863,7 @@
           <a:lstStyle/>
           <a:p>
             <a:pPr algn="ctr"/>
+            <a:endParaRPr/>
           </a:p>
         </p:txBody>
       </p:sp>
@@ -5823,6 +5912,7 @@
           <a:lstStyle/>
           <a:p>
             <a:pPr algn="ctr"/>
+            <a:endParaRPr/>
           </a:p>
         </p:txBody>
       </p:sp>
@@ -5865,6 +5955,7 @@
           <a:lstStyle/>
           <a:p>
             <a:pPr algn="ctr"/>
+            <a:endParaRPr/>
           </a:p>
         </p:txBody>
       </p:sp>
@@ -5907,6 +5998,7 @@
           <a:lstStyle/>
           <a:p>
             <a:pPr algn="ctr"/>
+            <a:endParaRPr/>
           </a:p>
         </p:txBody>
       </p:sp>
@@ -5949,6 +6041,7 @@
           <a:lstStyle/>
           <a:p>
             <a:pPr algn="ctr"/>
+            <a:endParaRPr/>
           </a:p>
         </p:txBody>
       </p:sp>
@@ -5995,6 +6088,7 @@
           <a:lstStyle/>
           <a:p>
             <a:pPr algn="ctr"/>
+            <a:endParaRPr/>
           </a:p>
         </p:txBody>
       </p:sp>
@@ -6039,6 +6133,7 @@
           <a:lstStyle/>
           <a:p>
             <a:pPr algn="ctr"/>
+            <a:endParaRPr/>
           </a:p>
         </p:txBody>
       </p:sp>
@@ -6085,6 +6180,7 @@
           <a:lstStyle/>
           <a:p>
             <a:pPr algn="ctr"/>
+            <a:endParaRPr/>
           </a:p>
         </p:txBody>
       </p:sp>
@@ -6129,6 +6225,7 @@
           <a:lstStyle/>
           <a:p>
             <a:pPr algn="ctr"/>
+            <a:endParaRPr/>
           </a:p>
         </p:txBody>
       </p:sp>
@@ -6175,6 +6272,7 @@
           <a:lstStyle/>
           <a:p>
             <a:pPr algn="ctr"/>
+            <a:endParaRPr/>
           </a:p>
         </p:txBody>
       </p:sp>
@@ -6219,6 +6317,7 @@
           <a:lstStyle/>
           <a:p>
             <a:pPr algn="ctr"/>
+            <a:endParaRPr/>
           </a:p>
         </p:txBody>
       </p:sp>
@@ -6239,14 +6338,14 @@
           <a:noFill/>
         </p:spPr>
         <p:txBody>
-          <a:bodyPr wrap="none" lIns="0" rIns="0" tIns="0" bIns="0" anchor="t">
+          <a:bodyPr wrap="none" lIns="0" tIns="0" rIns="0" bIns="0" anchor="t">
             <a:spAutoFit/>
           </a:bodyPr>
           <a:lstStyle/>
           <a:p>
             <a:pPr algn="l"/>
             <a:r>
-              <a:rPr b="1" sz="1050" i="0" u="none">
+              <a:rPr sz="1050" b="1" i="0" u="none">
                 <a:solidFill>
                   <a:srgbClr val="2563EB"/>
                 </a:solidFill>
@@ -6274,7 +6373,7 @@
           <a:noFill/>
         </p:spPr>
         <p:txBody>
-          <a:bodyPr wrap="none" lIns="0" rIns="0" tIns="0" bIns="0" anchor="t">
+          <a:bodyPr wrap="none" lIns="0" tIns="0" rIns="0" bIns="0" anchor="t">
             <a:spAutoFit/>
           </a:bodyPr>
           <a:lstStyle/>
@@ -6285,7 +6384,7 @@
               </a:lnSpc>
             </a:pPr>
             <a:r>
-              <a:rPr b="1" sz="2400" i="0" u="none">
+              <a:rPr sz="2400" b="1" i="0" u="none">
                 <a:solidFill>
                   <a:srgbClr val="0F172A"/>
                 </a:solidFill>
@@ -6313,14 +6412,14 @@
           <a:noFill/>
         </p:spPr>
         <p:txBody>
-          <a:bodyPr wrap="none" lIns="0" rIns="0" tIns="0" bIns="0" anchor="t">
+          <a:bodyPr wrap="none" lIns="0" tIns="0" rIns="0" bIns="0" anchor="t">
             <a:spAutoFit/>
           </a:bodyPr>
           <a:lstStyle/>
           <a:p>
             <a:pPr algn="l"/>
             <a:r>
-              <a:rPr b="0" sz="1200" i="0" u="none">
+              <a:rPr sz="1200" b="0" i="0" u="none">
                 <a:solidFill>
                   <a:srgbClr val="64748B"/>
                 </a:solidFill>
@@ -6348,14 +6447,14 @@
           <a:noFill/>
         </p:spPr>
         <p:txBody>
-          <a:bodyPr wrap="square" lIns="0" rIns="0" tIns="0" bIns="0" anchor="t">
+          <a:bodyPr wrap="square" lIns="0" tIns="0" rIns="0" bIns="0" anchor="t">
             <a:spAutoFit/>
           </a:bodyPr>
           <a:lstStyle/>
           <a:p>
             <a:pPr algn="l"/>
             <a:r>
-              <a:rPr b="1" sz="975" i="0" u="none">
+              <a:rPr sz="975" b="1" i="0" u="none">
                 <a:solidFill>
                   <a:srgbClr val="1E40AF"/>
                 </a:solidFill>
@@ -6383,14 +6482,14 @@
           <a:noFill/>
         </p:spPr>
         <p:txBody>
-          <a:bodyPr wrap="none" lIns="0" rIns="0" tIns="0" bIns="0" anchor="t">
+          <a:bodyPr wrap="none" lIns="0" tIns="0" rIns="0" bIns="0" anchor="t">
             <a:spAutoFit/>
           </a:bodyPr>
           <a:lstStyle/>
           <a:p>
             <a:pPr algn="l"/>
             <a:r>
-              <a:rPr b="1" sz="1500" i="0" u="none">
+              <a:rPr sz="1500" b="1" i="0" u="none">
                 <a:solidFill>
                   <a:srgbClr val="334155"/>
                 </a:solidFill>
@@ -6418,7 +6517,7 @@
           <a:noFill/>
         </p:spPr>
         <p:txBody>
-          <a:bodyPr wrap="square" lIns="0" rIns="0" tIns="0" bIns="0" anchor="t">
+          <a:bodyPr wrap="square" lIns="0" tIns="0" rIns="0" bIns="0" anchor="t">
             <a:spAutoFit/>
           </a:bodyPr>
           <a:lstStyle/>
@@ -6429,7 +6528,7 @@
               </a:lnSpc>
             </a:pPr>
             <a:r>
-              <a:rPr b="0" sz="1125" i="0" u="none">
+              <a:rPr sz="1125" b="0" i="0" u="none">
                 <a:solidFill>
                   <a:srgbClr val="475569"/>
                 </a:solidFill>
@@ -6457,14 +6556,14 @@
           <a:noFill/>
         </p:spPr>
         <p:txBody>
-          <a:bodyPr wrap="none" lIns="0" rIns="0" tIns="0" bIns="0" anchor="t">
+          <a:bodyPr wrap="none" lIns="0" tIns="0" rIns="0" bIns="0" anchor="t">
             <a:spAutoFit/>
           </a:bodyPr>
           <a:lstStyle/>
           <a:p>
             <a:pPr algn="l"/>
             <a:r>
-              <a:rPr b="1" sz="975" i="0" u="none">
+              <a:rPr sz="975" b="1" i="0" u="none">
                 <a:solidFill>
                   <a:srgbClr val="64748B"/>
                 </a:solidFill>
@@ -6492,14 +6591,14 @@
           <a:noFill/>
         </p:spPr>
         <p:txBody>
-          <a:bodyPr wrap="square" lIns="0" rIns="0" tIns="0" bIns="0" anchor="t">
+          <a:bodyPr wrap="square" lIns="0" tIns="0" rIns="0" bIns="0" anchor="t">
             <a:spAutoFit/>
           </a:bodyPr>
           <a:lstStyle/>
           <a:p>
             <a:pPr algn="l"/>
             <a:r>
-              <a:rPr b="1" sz="975" i="0" u="none">
+              <a:rPr sz="975" b="1" i="0" u="none">
                 <a:solidFill>
                   <a:srgbClr val="92400E"/>
                 </a:solidFill>
@@ -6527,14 +6626,14 @@
           <a:noFill/>
         </p:spPr>
         <p:txBody>
-          <a:bodyPr wrap="none" lIns="0" rIns="0" tIns="0" bIns="0" anchor="t">
+          <a:bodyPr wrap="none" lIns="0" tIns="0" rIns="0" bIns="0" anchor="t">
             <a:spAutoFit/>
           </a:bodyPr>
           <a:lstStyle/>
           <a:p>
             <a:pPr algn="l"/>
             <a:r>
-              <a:rPr b="1" sz="1500" i="0" u="none">
+              <a:rPr sz="1500" b="1" i="0" u="none">
                 <a:solidFill>
                   <a:srgbClr val="334155"/>
                 </a:solidFill>
@@ -6562,7 +6661,7 @@
           <a:noFill/>
         </p:spPr>
         <p:txBody>
-          <a:bodyPr wrap="square" lIns="0" rIns="0" tIns="0" bIns="0" anchor="t">
+          <a:bodyPr wrap="square" lIns="0" tIns="0" rIns="0" bIns="0" anchor="t">
             <a:spAutoFit/>
           </a:bodyPr>
           <a:lstStyle/>
@@ -6573,7 +6672,7 @@
               </a:lnSpc>
             </a:pPr>
             <a:r>
-              <a:rPr b="0" sz="1125" i="0" u="none">
+              <a:rPr sz="1125" b="0" i="0" u="none">
                 <a:solidFill>
                   <a:srgbClr val="475569"/>
                 </a:solidFill>
@@ -6601,14 +6700,14 @@
           <a:noFill/>
         </p:spPr>
         <p:txBody>
-          <a:bodyPr wrap="none" lIns="0" rIns="0" tIns="0" bIns="0" anchor="t">
+          <a:bodyPr wrap="none" lIns="0" tIns="0" rIns="0" bIns="0" anchor="t">
             <a:spAutoFit/>
           </a:bodyPr>
           <a:lstStyle/>
           <a:p>
             <a:pPr algn="l"/>
             <a:r>
-              <a:rPr b="1" sz="975" i="0" u="none">
+              <a:rPr sz="975" b="1" i="0" u="none">
                 <a:solidFill>
                   <a:srgbClr val="D97706"/>
                 </a:solidFill>
@@ -6636,14 +6735,14 @@
           <a:noFill/>
         </p:spPr>
         <p:txBody>
-          <a:bodyPr wrap="square" lIns="0" rIns="0" tIns="0" bIns="0" anchor="t">
+          <a:bodyPr wrap="square" lIns="0" tIns="0" rIns="0" bIns="0" anchor="t">
             <a:spAutoFit/>
           </a:bodyPr>
           <a:lstStyle/>
           <a:p>
             <a:pPr algn="l"/>
             <a:r>
-              <a:rPr b="1" sz="975" i="0" u="none">
+              <a:rPr sz="975" b="1" i="0" u="none">
                 <a:solidFill>
                   <a:srgbClr val="92400E"/>
                 </a:solidFill>
@@ -6671,14 +6770,14 @@
           <a:noFill/>
         </p:spPr>
         <p:txBody>
-          <a:bodyPr wrap="none" lIns="0" rIns="0" tIns="0" bIns="0" anchor="t">
+          <a:bodyPr wrap="none" lIns="0" tIns="0" rIns="0" bIns="0" anchor="t">
             <a:spAutoFit/>
           </a:bodyPr>
           <a:lstStyle/>
           <a:p>
             <a:pPr algn="l"/>
             <a:r>
-              <a:rPr b="1" sz="1500" i="0" u="none">
+              <a:rPr sz="1500" b="1" i="0" u="none">
                 <a:solidFill>
                   <a:srgbClr val="334155"/>
                 </a:solidFill>
@@ -6706,7 +6805,7 @@
           <a:noFill/>
         </p:spPr>
         <p:txBody>
-          <a:bodyPr wrap="square" lIns="0" rIns="0" tIns="0" bIns="0" anchor="t">
+          <a:bodyPr wrap="square" lIns="0" tIns="0" rIns="0" bIns="0" anchor="t">
             <a:spAutoFit/>
           </a:bodyPr>
           <a:lstStyle/>
@@ -6717,7 +6816,7 @@
               </a:lnSpc>
             </a:pPr>
             <a:r>
-              <a:rPr b="0" sz="1125" i="0" u="none">
+              <a:rPr sz="1125" b="0" i="0" u="none">
                 <a:solidFill>
                   <a:srgbClr val="475569"/>
                 </a:solidFill>
@@ -6745,14 +6844,14 @@
           <a:noFill/>
         </p:spPr>
         <p:txBody>
-          <a:bodyPr wrap="none" lIns="0" rIns="0" tIns="0" bIns="0" anchor="t">
+          <a:bodyPr wrap="none" lIns="0" tIns="0" rIns="0" bIns="0" anchor="t">
             <a:spAutoFit/>
           </a:bodyPr>
           <a:lstStyle/>
           <a:p>
             <a:pPr algn="l"/>
             <a:r>
-              <a:rPr b="1" sz="975" i="0" u="none">
+              <a:rPr sz="975" b="1" i="0" u="none">
                 <a:solidFill>
                   <a:srgbClr val="DC2626"/>
                 </a:solidFill>
@@ -6772,7 +6871,7 @@
 </file>
 
 <file path=ppt/slides/slide4.xml><?xml version="1.0" encoding="utf-8"?>
-<p:sld xmlns:a="http://schemas.openxmlformats.org/drawingml/2006/main" xmlns:p="http://schemas.openxmlformats.org/presentationml/2006/main" xmlns:r="http://schemas.openxmlformats.org/officeDocument/2006/relationships">
+<p:sld xmlns:a="http://schemas.openxmlformats.org/drawingml/2006/main" xmlns:r="http://schemas.openxmlformats.org/officeDocument/2006/relationships" xmlns:p="http://schemas.openxmlformats.org/presentationml/2006/main">
   <p:cSld>
     <p:bg>
       <p:bgPr>
@@ -6788,7 +6887,14 @@
         <p:cNvGrpSpPr/>
         <p:nvPr/>
       </p:nvGrpSpPr>
-      <p:grpSpPr/>
+      <p:grpSpPr>
+        <a:xfrm>
+          <a:off x="0" y="0"/>
+          <a:ext cx="0" cy="0"/>
+          <a:chOff x="0" y="0"/>
+          <a:chExt cx="0" cy="0"/>
+        </a:xfrm>
+      </p:grpSpPr>
       <p:sp>
         <p:nvSpPr>
           <p:cNvPr id="2" name="TextBox 1"/>
@@ -6806,14 +6912,14 @@
           <a:noFill/>
         </p:spPr>
         <p:txBody>
-          <a:bodyPr wrap="none" lIns="0" rIns="0" tIns="0" bIns="0" anchor="t">
+          <a:bodyPr wrap="none" lIns="0" tIns="0" rIns="0" bIns="0" anchor="t">
             <a:spAutoFit/>
           </a:bodyPr>
           <a:lstStyle/>
           <a:p>
             <a:pPr algn="l"/>
             <a:r>
-              <a:rPr b="1" sz="1050" i="0" u="none">
+              <a:rPr sz="1050" b="1" i="0" u="none">
                 <a:solidFill>
                   <a:srgbClr val="38BDF8"/>
                 </a:solidFill>
@@ -6841,7 +6947,7 @@
           <a:noFill/>
         </p:spPr>
         <p:txBody>
-          <a:bodyPr wrap="square" lIns="0" rIns="0" tIns="0" bIns="0" anchor="t">
+          <a:bodyPr wrap="square" lIns="0" tIns="0" rIns="0" bIns="0" anchor="t">
             <a:spAutoFit/>
           </a:bodyPr>
           <a:lstStyle/>
@@ -6852,7 +6958,7 @@
               </a:lnSpc>
             </a:pPr>
             <a:r>
-              <a:rPr b="1" sz="3300" i="0" u="none">
+              <a:rPr sz="3300" b="1" i="0" u="none">
                 <a:solidFill>
                   <a:srgbClr val="FFFFFF"/>
                 </a:solidFill>
@@ -6880,14 +6986,14 @@
           <a:noFill/>
         </p:spPr>
         <p:txBody>
-          <a:bodyPr wrap="square" lIns="0" rIns="0" tIns="0" bIns="0" anchor="t">
+          <a:bodyPr wrap="square" lIns="0" tIns="0" rIns="0" bIns="0" anchor="t">
             <a:spAutoFit/>
           </a:bodyPr>
           <a:lstStyle/>
           <a:p>
             <a:pPr algn="l"/>
             <a:r>
-              <a:rPr b="0" sz="1350" i="0" u="none">
+              <a:rPr sz="1350" b="0" i="0" u="none">
                 <a:solidFill>
                   <a:srgbClr val="94A3B8"/>
                 </a:solidFill>
@@ -6907,7 +7013,7 @@
 </file>
 
 <file path=ppt/slides/slide5.xml><?xml version="1.0" encoding="utf-8"?>
-<p:sld xmlns:a="http://schemas.openxmlformats.org/drawingml/2006/main" xmlns:p="http://schemas.openxmlformats.org/presentationml/2006/main" xmlns:r="http://schemas.openxmlformats.org/officeDocument/2006/relationships">
+<p:sld xmlns:a="http://schemas.openxmlformats.org/drawingml/2006/main" xmlns:r="http://schemas.openxmlformats.org/officeDocument/2006/relationships" xmlns:p="http://schemas.openxmlformats.org/presentationml/2006/main">
   <p:cSld>
     <p:bg>
       <p:bgPr>
@@ -6923,7 +7029,14 @@
         <p:cNvGrpSpPr/>
         <p:nvPr/>
       </p:nvGrpSpPr>
-      <p:grpSpPr/>
+      <p:grpSpPr>
+        <a:xfrm>
+          <a:off x="0" y="0"/>
+          <a:ext cx="0" cy="0"/>
+          <a:chOff x="0" y="0"/>
+          <a:chExt cx="0" cy="0"/>
+        </a:xfrm>
+      </p:grpSpPr>
       <p:sp>
         <p:nvSpPr>
           <p:cNvPr id="2" name="Rounded Rectangle 1"/>
@@ -6969,6 +7082,7 @@
           <a:lstStyle/>
           <a:p>
             <a:pPr algn="ctr"/>
+            <a:endParaRPr/>
           </a:p>
         </p:txBody>
       </p:sp>
@@ -7017,6 +7131,7 @@
           <a:lstStyle/>
           <a:p>
             <a:pPr algn="ctr"/>
+            <a:endParaRPr/>
           </a:p>
         </p:txBody>
       </p:sp>
@@ -7059,6 +7174,7 @@
           <a:lstStyle/>
           <a:p>
             <a:pPr algn="ctr"/>
+            <a:endParaRPr/>
           </a:p>
         </p:txBody>
       </p:sp>
@@ -7101,6 +7217,7 @@
           <a:lstStyle/>
           <a:p>
             <a:pPr algn="ctr"/>
+            <a:endParaRPr/>
           </a:p>
         </p:txBody>
       </p:sp>
@@ -7149,6 +7266,7 @@
           <a:lstStyle/>
           <a:p>
             <a:pPr algn="ctr"/>
+            <a:endParaRPr/>
           </a:p>
         </p:txBody>
       </p:sp>
@@ -7193,6 +7311,7 @@
           <a:lstStyle/>
           <a:p>
             <a:pPr algn="ctr"/>
+            <a:endParaRPr/>
           </a:p>
         </p:txBody>
       </p:sp>
@@ -7241,6 +7360,7 @@
           <a:lstStyle/>
           <a:p>
             <a:pPr algn="ctr"/>
+            <a:endParaRPr/>
           </a:p>
         </p:txBody>
       </p:sp>
@@ -7285,6 +7405,7 @@
           <a:lstStyle/>
           <a:p>
             <a:pPr algn="ctr"/>
+            <a:endParaRPr/>
           </a:p>
         </p:txBody>
       </p:sp>
@@ -7331,6 +7452,7 @@
           <a:lstStyle/>
           <a:p>
             <a:pPr algn="ctr"/>
+            <a:endParaRPr/>
           </a:p>
         </p:txBody>
       </p:sp>
@@ -7377,6 +7499,7 @@
           <a:lstStyle/>
           <a:p>
             <a:pPr algn="ctr"/>
+            <a:endParaRPr/>
           </a:p>
         </p:txBody>
       </p:sp>
@@ -7421,14 +7544,14 @@
           <a:noFill/>
         </p:spPr>
         <p:txBody>
-          <a:bodyPr wrap="none" lIns="0" rIns="0" tIns="0" bIns="0" anchor="t">
+          <a:bodyPr wrap="none" lIns="0" tIns="0" rIns="0" bIns="0" anchor="t">
             <a:spAutoFit/>
           </a:bodyPr>
           <a:lstStyle/>
           <a:p>
             <a:pPr algn="l"/>
             <a:r>
-              <a:rPr b="1" sz="1050" i="0" u="none">
+              <a:rPr sz="1050" b="1" i="0" u="none">
                 <a:solidFill>
                   <a:srgbClr val="2563EB"/>
                 </a:solidFill>
@@ -7456,7 +7579,7 @@
           <a:noFill/>
         </p:spPr>
         <p:txBody>
-          <a:bodyPr wrap="none" lIns="0" rIns="0" tIns="0" bIns="0" anchor="t">
+          <a:bodyPr wrap="none" lIns="0" tIns="0" rIns="0" bIns="0" anchor="t">
             <a:spAutoFit/>
           </a:bodyPr>
           <a:lstStyle/>
@@ -7467,7 +7590,7 @@
               </a:lnSpc>
             </a:pPr>
             <a:r>
-              <a:rPr b="1" sz="2400" i="0" u="none">
+              <a:rPr sz="2400" b="1" i="0" u="none">
                 <a:solidFill>
                   <a:srgbClr val="0F172A"/>
                 </a:solidFill>
@@ -7495,14 +7618,14 @@
           <a:noFill/>
         </p:spPr>
         <p:txBody>
-          <a:bodyPr wrap="none" lIns="0" rIns="0" tIns="0" bIns="0" anchor="t">
+          <a:bodyPr wrap="none" lIns="0" tIns="0" rIns="0" bIns="0" anchor="t">
             <a:spAutoFit/>
           </a:bodyPr>
           <a:lstStyle/>
           <a:p>
             <a:pPr algn="l"/>
             <a:r>
-              <a:rPr b="0" sz="1200" i="0" u="none">
+              <a:rPr sz="1200" b="0" i="0" u="none">
                 <a:solidFill>
                   <a:srgbClr val="64748B"/>
                 </a:solidFill>
@@ -7530,14 +7653,14 @@
           <a:noFill/>
         </p:spPr>
         <p:txBody>
-          <a:bodyPr wrap="square" lIns="0" rIns="0" tIns="0" bIns="0" anchor="t">
+          <a:bodyPr wrap="square" lIns="0" tIns="0" rIns="0" bIns="0" anchor="t">
             <a:spAutoFit/>
           </a:bodyPr>
           <a:lstStyle/>
           <a:p>
             <a:pPr algn="l"/>
             <a:r>
-              <a:rPr b="0" sz="1125" i="0" u="none">
+              <a:rPr sz="1125" b="0" i="0" u="none">
                 <a:solidFill>
                   <a:srgbClr val="334155"/>
                 </a:solidFill>
@@ -7565,14 +7688,14 @@
           <a:noFill/>
         </p:spPr>
         <p:txBody>
-          <a:bodyPr wrap="none" lIns="123825" rIns="0" tIns="0" bIns="0" anchor="t">
+          <a:bodyPr wrap="none" lIns="123825" tIns="0" rIns="0" bIns="0" anchor="t">
             <a:spAutoFit/>
           </a:bodyPr>
           <a:lstStyle/>
           <a:p>
             <a:pPr algn="l"/>
             <a:r>
-              <a:rPr b="1" sz="975" i="0" u="none">
+              <a:rPr sz="975" b="1" i="0" u="none">
                 <a:solidFill>
                   <a:srgbClr val="DC2626"/>
                 </a:solidFill>
@@ -7600,14 +7723,14 @@
           <a:noFill/>
         </p:spPr>
         <p:txBody>
-          <a:bodyPr wrap="square" lIns="0" rIns="0" tIns="0" bIns="0" anchor="t">
+          <a:bodyPr wrap="square" lIns="0" tIns="0" rIns="0" bIns="0" anchor="t">
             <a:spAutoFit/>
           </a:bodyPr>
           <a:lstStyle/>
           <a:p>
             <a:pPr algn="l"/>
             <a:r>
-              <a:rPr b="0" sz="1125" i="0" u="none">
+              <a:rPr sz="1125" b="0" i="0" u="none">
                 <a:solidFill>
                   <a:srgbClr val="334155"/>
                 </a:solidFill>
@@ -7635,14 +7758,14 @@
           <a:noFill/>
         </p:spPr>
         <p:txBody>
-          <a:bodyPr wrap="none" lIns="0" rIns="0" tIns="0" bIns="0" anchor="t">
+          <a:bodyPr wrap="none" lIns="0" tIns="0" rIns="0" bIns="0" anchor="t">
             <a:spAutoFit/>
           </a:bodyPr>
           <a:lstStyle/>
           <a:p>
             <a:pPr algn="l"/>
             <a:r>
-              <a:rPr b="1" sz="975" i="0" u="none">
+              <a:rPr sz="975" b="1" i="0" u="none">
                 <a:solidFill>
                   <a:srgbClr val="0369A1"/>
                 </a:solidFill>
@@ -7670,14 +7793,14 @@
           <a:noFill/>
         </p:spPr>
         <p:txBody>
-          <a:bodyPr wrap="none" lIns="0" rIns="0" tIns="0" bIns="0" anchor="t">
+          <a:bodyPr wrap="none" lIns="0" tIns="0" rIns="0" bIns="0" anchor="t">
             <a:spAutoFit/>
           </a:bodyPr>
           <a:lstStyle/>
           <a:p>
             <a:pPr algn="l"/>
             <a:r>
-              <a:rPr b="1" sz="1500" i="0" u="none">
+              <a:rPr sz="1500" b="1" i="0" u="none">
                 <a:solidFill>
                   <a:srgbClr val="0F172A"/>
                 </a:solidFill>
@@ -7705,14 +7828,14 @@
           <a:noFill/>
         </p:spPr>
         <p:txBody>
-          <a:bodyPr wrap="square" lIns="0" rIns="0" tIns="0" bIns="0" anchor="t">
+          <a:bodyPr wrap="square" lIns="0" tIns="0" rIns="0" bIns="0" anchor="t">
             <a:spAutoFit/>
           </a:bodyPr>
           <a:lstStyle/>
           <a:p>
             <a:pPr algn="l"/>
             <a:r>
-              <a:rPr b="1" sz="975" i="0" u="none">
+              <a:rPr sz="975" b="1" i="0" u="none">
                 <a:solidFill>
                   <a:srgbClr val="1E40AF"/>
                 </a:solidFill>
@@ -7740,14 +7863,14 @@
           <a:noFill/>
         </p:spPr>
         <p:txBody>
-          <a:bodyPr wrap="none" lIns="0" rIns="0" tIns="0" bIns="0" anchor="t">
+          <a:bodyPr wrap="none" lIns="0" tIns="0" rIns="0" bIns="0" anchor="t">
             <a:spAutoFit/>
           </a:bodyPr>
           <a:lstStyle/>
           <a:p>
             <a:pPr algn="l"/>
             <a:r>
-              <a:rPr b="1" sz="1050" i="0" u="none">
+              <a:rPr sz="1050" b="1" i="0" u="none">
                 <a:solidFill>
                   <a:srgbClr val="64748B"/>
                 </a:solidFill>
@@ -7775,14 +7898,14 @@
           <a:noFill/>
         </p:spPr>
         <p:txBody>
-          <a:bodyPr wrap="square" lIns="0" rIns="0" tIns="0" bIns="0" anchor="t">
+          <a:bodyPr wrap="square" lIns="0" tIns="0" rIns="0" bIns="0" anchor="t">
             <a:spAutoFit/>
           </a:bodyPr>
           <a:lstStyle/>
           <a:p>
             <a:pPr algn="l"/>
             <a:r>
-              <a:rPr b="0" sz="1050" i="0" u="none">
+              <a:rPr sz="1050" b="0" i="0" u="none">
                 <a:solidFill>
                   <a:srgbClr val="334155"/>
                 </a:solidFill>
@@ -7791,7 +7914,7 @@
               <a:t>Evaluación de significancia y consistencia económica </a:t>
             </a:r>
             <a:r>
-              <a:rPr b="0" sz="1050" i="1" u="none">
+              <a:rPr sz="1050" b="0" i="1" u="none">
                 <a:solidFill>
                   <a:srgbClr val="334155"/>
                 </a:solidFill>
@@ -7800,7 +7923,7 @@
               <a:t>a posteriori</a:t>
             </a:r>
             <a:r>
-              <a:rPr b="0" sz="1050" i="0" u="none">
+              <a:rPr sz="1050" b="0" i="0" u="none">
                 <a:solidFill>
                   <a:srgbClr val="334155"/>
                 </a:solidFill>
@@ -7828,14 +7951,14 @@
           <a:noFill/>
         </p:spPr>
         <p:txBody>
-          <a:bodyPr wrap="none" lIns="0" rIns="0" tIns="0" bIns="0" anchor="t">
+          <a:bodyPr wrap="none" lIns="0" tIns="0" rIns="0" bIns="0" anchor="t">
             <a:spAutoFit/>
           </a:bodyPr>
           <a:lstStyle/>
           <a:p>
             <a:pPr algn="l"/>
             <a:r>
-              <a:rPr b="1" sz="1500" i="0" u="none">
+              <a:rPr sz="1500" b="1" i="0" u="none">
                 <a:solidFill>
                   <a:srgbClr val="0369A1"/>
                 </a:solidFill>
@@ -7863,14 +7986,14 @@
           <a:noFill/>
         </p:spPr>
         <p:txBody>
-          <a:bodyPr wrap="square" lIns="0" rIns="0" tIns="0" bIns="0" anchor="t">
+          <a:bodyPr wrap="square" lIns="0" tIns="0" rIns="0" bIns="0" anchor="t">
             <a:spAutoFit/>
           </a:bodyPr>
           <a:lstStyle/>
           <a:p>
             <a:pPr algn="l"/>
             <a:r>
-              <a:rPr b="1" sz="975" i="0" u="none">
+              <a:rPr sz="975" b="1" i="0" u="none">
                 <a:solidFill>
                   <a:srgbClr val="065F46"/>
                 </a:solidFill>
@@ -7898,14 +8021,14 @@
           <a:noFill/>
         </p:spPr>
         <p:txBody>
-          <a:bodyPr wrap="none" lIns="0" rIns="0" tIns="0" bIns="0" anchor="t">
+          <a:bodyPr wrap="none" lIns="0" tIns="0" rIns="0" bIns="0" anchor="t">
             <a:spAutoFit/>
           </a:bodyPr>
           <a:lstStyle/>
           <a:p>
             <a:pPr algn="l"/>
             <a:r>
-              <a:rPr b="1" sz="1050" i="0" u="none">
+              <a:rPr sz="1050" b="1" i="0" u="none">
                 <a:solidFill>
                   <a:srgbClr val="0369A1"/>
                 </a:solidFill>
@@ -7933,14 +8056,14 @@
           <a:noFill/>
         </p:spPr>
         <p:txBody>
-          <a:bodyPr wrap="square" lIns="0" rIns="0" tIns="0" bIns="0" anchor="t">
+          <a:bodyPr wrap="square" lIns="0" tIns="0" rIns="0" bIns="0" anchor="t">
             <a:spAutoFit/>
           </a:bodyPr>
           <a:lstStyle/>
           <a:p>
             <a:pPr algn="l"/>
             <a:r>
-              <a:rPr b="0" sz="1050" i="0" u="none">
+              <a:rPr sz="1050" b="0" i="0" u="none">
                 <a:solidFill>
                   <a:srgbClr val="334155"/>
                 </a:solidFill>
@@ -7960,7 +8083,7 @@
 </file>
 
 <file path=ppt/slides/slide6.xml><?xml version="1.0" encoding="utf-8"?>
-<p:sld xmlns:a="http://schemas.openxmlformats.org/drawingml/2006/main" xmlns:p="http://schemas.openxmlformats.org/presentationml/2006/main" xmlns:r="http://schemas.openxmlformats.org/officeDocument/2006/relationships">
+<p:sld xmlns:a="http://schemas.openxmlformats.org/drawingml/2006/main" xmlns:r="http://schemas.openxmlformats.org/officeDocument/2006/relationships" xmlns:p="http://schemas.openxmlformats.org/presentationml/2006/main">
   <p:cSld>
     <p:bg>
       <p:bgPr>
@@ -7976,7 +8099,14 @@
         <p:cNvGrpSpPr/>
         <p:nvPr/>
       </p:nvGrpSpPr>
-      <p:grpSpPr/>
+      <p:grpSpPr>
+        <a:xfrm>
+          <a:off x="0" y="0"/>
+          <a:ext cx="0" cy="0"/>
+          <a:chOff x="0" y="0"/>
+          <a:chExt cx="0" cy="0"/>
+        </a:xfrm>
+      </p:grpSpPr>
       <p:sp>
         <p:nvSpPr>
           <p:cNvPr id="2" name="Rounded Rectangle 1"/>
@@ -8022,6 +8152,7 @@
           <a:lstStyle/>
           <a:p>
             <a:pPr algn="ctr"/>
+            <a:endParaRPr/>
           </a:p>
         </p:txBody>
       </p:sp>
@@ -8068,6 +8199,7 @@
           <a:lstStyle/>
           <a:p>
             <a:pPr algn="ctr"/>
+            <a:endParaRPr/>
           </a:p>
         </p:txBody>
       </p:sp>
@@ -8116,6 +8248,7 @@
           <a:lstStyle/>
           <a:p>
             <a:pPr algn="ctr"/>
+            <a:endParaRPr/>
           </a:p>
         </p:txBody>
       </p:sp>
@@ -8164,6 +8297,7 @@
           <a:lstStyle/>
           <a:p>
             <a:pPr algn="ctr"/>
+            <a:endParaRPr/>
           </a:p>
         </p:txBody>
       </p:sp>
@@ -8212,6 +8346,7 @@
           <a:lstStyle/>
           <a:p>
             <a:pPr algn="ctr"/>
+            <a:endParaRPr/>
           </a:p>
         </p:txBody>
       </p:sp>
@@ -8260,6 +8395,7 @@
           <a:lstStyle/>
           <a:p>
             <a:pPr algn="ctr"/>
+            <a:endParaRPr/>
           </a:p>
         </p:txBody>
       </p:sp>
@@ -8280,14 +8416,14 @@
           <a:noFill/>
         </p:spPr>
         <p:txBody>
-          <a:bodyPr wrap="none" lIns="0" rIns="0" tIns="0" bIns="0" anchor="t">
+          <a:bodyPr wrap="none" lIns="0" tIns="0" rIns="0" bIns="0" anchor="t">
             <a:spAutoFit/>
           </a:bodyPr>
           <a:lstStyle/>
           <a:p>
             <a:pPr algn="l"/>
             <a:r>
-              <a:rPr b="1" sz="1050" i="0" u="none">
+              <a:rPr sz="1050" b="1" i="0" u="none">
                 <a:solidFill>
                   <a:srgbClr val="2563EB"/>
                 </a:solidFill>
@@ -8315,7 +8451,7 @@
           <a:noFill/>
         </p:spPr>
         <p:txBody>
-          <a:bodyPr wrap="none" lIns="0" rIns="0" tIns="0" bIns="0" anchor="t">
+          <a:bodyPr wrap="none" lIns="0" tIns="0" rIns="0" bIns="0" anchor="t">
             <a:spAutoFit/>
           </a:bodyPr>
           <a:lstStyle/>
@@ -8326,7 +8462,7 @@
               </a:lnSpc>
             </a:pPr>
             <a:r>
-              <a:rPr b="1" sz="2400" i="0" u="none">
+              <a:rPr sz="2400" b="1" i="0" u="none">
                 <a:solidFill>
                   <a:srgbClr val="0F172A"/>
                 </a:solidFill>
@@ -8354,14 +8490,14 @@
           <a:noFill/>
         </p:spPr>
         <p:txBody>
-          <a:bodyPr wrap="none" lIns="0" rIns="0" tIns="0" bIns="0" anchor="t">
+          <a:bodyPr wrap="none" lIns="0" tIns="0" rIns="0" bIns="0" anchor="t">
             <a:spAutoFit/>
           </a:bodyPr>
           <a:lstStyle/>
           <a:p>
             <a:pPr algn="l"/>
             <a:r>
-              <a:rPr b="0" sz="1200" i="0" u="none">
+              <a:rPr sz="1200" b="0" i="0" u="none">
                 <a:solidFill>
                   <a:srgbClr val="64748B"/>
                 </a:solidFill>
@@ -8389,14 +8525,14 @@
           <a:noFill/>
         </p:spPr>
         <p:txBody>
-          <a:bodyPr wrap="square" lIns="0" rIns="0" tIns="0" bIns="0" anchor="t">
+          <a:bodyPr wrap="square" lIns="0" tIns="0" rIns="0" bIns="0" anchor="t">
             <a:spAutoFit/>
           </a:bodyPr>
           <a:lstStyle/>
           <a:p>
             <a:pPr algn="l"/>
             <a:r>
-              <a:rPr b="1" sz="975" i="0" u="none">
+              <a:rPr sz="975" b="1" i="0" u="none">
                 <a:solidFill>
                   <a:srgbClr val="7E22CE"/>
                 </a:solidFill>
@@ -8424,14 +8560,14 @@
           <a:noFill/>
         </p:spPr>
         <p:txBody>
-          <a:bodyPr wrap="none" lIns="0" rIns="0" tIns="0" bIns="0" anchor="t">
+          <a:bodyPr wrap="none" lIns="0" tIns="0" rIns="0" bIns="0" anchor="t">
             <a:spAutoFit/>
           </a:bodyPr>
           <a:lstStyle/>
           <a:p>
             <a:pPr algn="l"/>
             <a:r>
-              <a:rPr b="1" sz="1800" i="0" u="none">
+              <a:rPr sz="1800" b="1" i="0" u="none">
                 <a:solidFill>
                   <a:srgbClr val="581C87"/>
                 </a:solidFill>
@@ -8459,7 +8595,7 @@
           <a:noFill/>
         </p:spPr>
         <p:txBody>
-          <a:bodyPr wrap="square" lIns="0" rIns="0" tIns="0" bIns="0" anchor="t">
+          <a:bodyPr wrap="square" lIns="0" tIns="0" rIns="0" bIns="0" anchor="t">
             <a:spAutoFit/>
           </a:bodyPr>
           <a:lstStyle/>
@@ -8470,7 +8606,7 @@
               </a:lnSpc>
             </a:pPr>
             <a:r>
-              <a:rPr b="0" sz="1200" i="0" u="none">
+              <a:rPr sz="1200" b="0" i="0" u="none">
                 <a:solidFill>
                   <a:srgbClr val="6B21A8"/>
                 </a:solidFill>
@@ -8479,7 +8615,7 @@
               <a:t>Cualquier modalidad de consumo requiere que el modelo logre un buen </a:t>
             </a:r>
             <a:r>
-              <a:rPr b="0" sz="1200" i="1" u="none">
+              <a:rPr sz="1200" b="0" i="1" u="none">
                 <a:solidFill>
                   <a:srgbClr val="6B21A8"/>
                 </a:solidFill>
@@ -8488,7 +8624,7 @@
               <a:t>performance</a:t>
             </a:r>
             <a:r>
-              <a:rPr b="0" sz="1200" i="0" u="none">
+              <a:rPr sz="1200" b="0" i="0" u="none">
                 <a:solidFill>
                   <a:srgbClr val="6B21A8"/>
                 </a:solidFill>
@@ -8516,14 +8652,14 @@
           <a:noFill/>
         </p:spPr>
         <p:txBody>
-          <a:bodyPr wrap="none" lIns="0" rIns="0" tIns="0" bIns="0" anchor="t">
+          <a:bodyPr wrap="none" lIns="0" tIns="0" rIns="0" bIns="0" anchor="t">
             <a:spAutoFit/>
           </a:bodyPr>
           <a:lstStyle/>
           <a:p>
             <a:pPr algn="l"/>
             <a:r>
-              <a:rPr b="1" sz="1050" i="0" u="none">
+              <a:rPr sz="1050" b="1" i="0" u="none">
                 <a:solidFill>
                   <a:srgbClr val="7E22CE"/>
                 </a:solidFill>
@@ -8551,14 +8687,14 @@
           <a:noFill/>
         </p:spPr>
         <p:txBody>
-          <a:bodyPr wrap="square" lIns="0" rIns="0" tIns="0" bIns="0" anchor="t">
+          <a:bodyPr wrap="square" lIns="0" tIns="0" rIns="0" bIns="0" anchor="t">
             <a:spAutoFit/>
           </a:bodyPr>
           <a:lstStyle/>
           <a:p>
             <a:pPr algn="l"/>
             <a:r>
-              <a:rPr b="0" sz="1050" i="0" u="none">
+              <a:rPr sz="1050" b="0" i="0" u="none">
                 <a:solidFill>
                   <a:srgbClr val="4C1D95"/>
                 </a:solidFill>
@@ -8586,14 +8722,14 @@
           <a:noFill/>
         </p:spPr>
         <p:txBody>
-          <a:bodyPr wrap="none" lIns="0" rIns="0" tIns="0" bIns="0" anchor="t">
+          <a:bodyPr wrap="none" lIns="0" tIns="0" rIns="0" bIns="0" anchor="t">
             <a:spAutoFit/>
           </a:bodyPr>
           <a:lstStyle/>
           <a:p>
             <a:pPr algn="l"/>
             <a:r>
-              <a:rPr b="1" sz="1350" i="0" u="none">
+              <a:rPr sz="1350" b="1" i="0" u="none">
                 <a:solidFill>
                   <a:srgbClr val="0F172A"/>
                 </a:solidFill>
@@ -8621,14 +8757,14 @@
           <a:noFill/>
         </p:spPr>
         <p:txBody>
-          <a:bodyPr wrap="square" lIns="0" rIns="0" tIns="0" bIns="0" anchor="t">
+          <a:bodyPr wrap="square" lIns="0" tIns="0" rIns="0" bIns="0" anchor="t">
             <a:spAutoFit/>
           </a:bodyPr>
           <a:lstStyle/>
           <a:p>
             <a:pPr algn="l"/>
             <a:r>
-              <a:rPr b="0" sz="1125" i="0" u="none">
+              <a:rPr sz="1125" b="0" i="0" u="none">
                 <a:solidFill>
                   <a:srgbClr val="475569"/>
                 </a:solidFill>
@@ -8656,14 +8792,14 @@
           <a:noFill/>
         </p:spPr>
         <p:txBody>
-          <a:bodyPr wrap="none" lIns="0" rIns="0" tIns="0" bIns="0" anchor="t">
+          <a:bodyPr wrap="none" lIns="0" tIns="0" rIns="0" bIns="0" anchor="t">
             <a:spAutoFit/>
           </a:bodyPr>
           <a:lstStyle/>
           <a:p>
             <a:pPr algn="l"/>
             <a:r>
-              <a:rPr b="1" sz="1350" i="0" u="none">
+              <a:rPr sz="1350" b="1" i="0" u="none">
                 <a:solidFill>
                   <a:srgbClr val="0F172A"/>
                 </a:solidFill>
@@ -8691,14 +8827,14 @@
           <a:noFill/>
         </p:spPr>
         <p:txBody>
-          <a:bodyPr wrap="square" lIns="0" rIns="0" tIns="0" bIns="0" anchor="t">
+          <a:bodyPr wrap="square" lIns="0" tIns="0" rIns="0" bIns="0" anchor="t">
             <a:spAutoFit/>
           </a:bodyPr>
           <a:lstStyle/>
           <a:p>
             <a:pPr algn="l"/>
             <a:r>
-              <a:rPr b="0" sz="1125" i="0" u="none">
+              <a:rPr sz="1125" b="0" i="0" u="none">
                 <a:solidFill>
                   <a:srgbClr val="475569"/>
                 </a:solidFill>
@@ -8726,14 +8862,14 @@
           <a:noFill/>
         </p:spPr>
         <p:txBody>
-          <a:bodyPr wrap="none" lIns="0" rIns="0" tIns="0" bIns="0" anchor="t">
+          <a:bodyPr wrap="none" lIns="0" tIns="0" rIns="0" bIns="0" anchor="t">
             <a:spAutoFit/>
           </a:bodyPr>
           <a:lstStyle/>
           <a:p>
             <a:pPr algn="l"/>
             <a:r>
-              <a:rPr b="1" sz="1350" i="0" u="none">
+              <a:rPr sz="1350" b="1" i="0" u="none">
                 <a:solidFill>
                   <a:srgbClr val="0F172A"/>
                 </a:solidFill>
@@ -8761,14 +8897,14 @@
           <a:noFill/>
         </p:spPr>
         <p:txBody>
-          <a:bodyPr wrap="square" lIns="0" rIns="0" tIns="0" bIns="0" anchor="t">
+          <a:bodyPr wrap="square" lIns="0" tIns="0" rIns="0" bIns="0" anchor="t">
             <a:spAutoFit/>
           </a:bodyPr>
           <a:lstStyle/>
           <a:p>
             <a:pPr algn="l"/>
             <a:r>
-              <a:rPr b="0" sz="1125" i="0" u="none">
+              <a:rPr sz="1125" b="0" i="0" u="none">
                 <a:solidFill>
                   <a:srgbClr val="475569"/>
                 </a:solidFill>
@@ -8788,7 +8924,7 @@
 </file>
 
 <file path=ppt/slides/slide7.xml><?xml version="1.0" encoding="utf-8"?>
-<p:sld xmlns:a="http://schemas.openxmlformats.org/drawingml/2006/main" xmlns:p="http://schemas.openxmlformats.org/presentationml/2006/main" xmlns:r="http://schemas.openxmlformats.org/officeDocument/2006/relationships">
+<p:sld xmlns:a="http://schemas.openxmlformats.org/drawingml/2006/main" xmlns:r="http://schemas.openxmlformats.org/officeDocument/2006/relationships" xmlns:p="http://schemas.openxmlformats.org/presentationml/2006/main">
   <p:cSld>
     <p:bg>
       <p:bgPr>
@@ -8804,7 +8940,14 @@
         <p:cNvGrpSpPr/>
         <p:nvPr/>
       </p:nvGrpSpPr>
-      <p:grpSpPr/>
+      <p:grpSpPr>
+        <a:xfrm>
+          <a:off x="0" y="0"/>
+          <a:ext cx="0" cy="0"/>
+          <a:chOff x="0" y="0"/>
+          <a:chExt cx="0" cy="0"/>
+        </a:xfrm>
+      </p:grpSpPr>
       <p:sp>
         <p:nvSpPr>
           <p:cNvPr id="2" name="Rounded Rectangle 1"/>
@@ -8848,6 +8991,7 @@
           <a:lstStyle/>
           <a:p>
             <a:pPr algn="ctr"/>
+            <a:endParaRPr/>
           </a:p>
         </p:txBody>
       </p:sp>
@@ -8894,6 +9038,7 @@
           <a:lstStyle/>
           <a:p>
             <a:pPr algn="ctr"/>
+            <a:endParaRPr/>
           </a:p>
         </p:txBody>
       </p:sp>
@@ -8938,6 +9083,7 @@
           <a:lstStyle/>
           <a:p>
             <a:pPr algn="ctr"/>
+            <a:endParaRPr/>
           </a:p>
         </p:txBody>
       </p:sp>
@@ -8947,7 +9093,13 @@
           <p:cNvGraphicFramePr>
             <a:graphicFrameLocks noGrp="1"/>
           </p:cNvGraphicFramePr>
-          <p:nvPr/>
+          <p:nvPr>
+            <p:extLst>
+              <p:ext uri="{D42A27DB-BD31-4B8C-83A1-F6EECF244321}">
+                <p14:modId xmlns:p14="http://schemas.microsoft.com/office/powerpoint/2010/main" val="1184058712"/>
+              </p:ext>
+            </p:extLst>
+          </p:nvPr>
         </p:nvGraphicFramePr>
         <p:xfrm>
           <a:off x="619125" y="2692598"/>
@@ -8956,33 +9108,50 @@
         <a:graphic>
           <a:graphicData uri="http://schemas.openxmlformats.org/drawingml/2006/table">
             <a:tbl>
-              <a:tblPr firstRow="0" bandRow="0">
-                <a:lnL>
-                  <a:noFill/>
-                </a:lnL>
-                <a:lnR>
-                  <a:noFill/>
-                </a:lnR>
-                <a:lnT>
-                  <a:noFill/>
-                </a:lnT>
-                <a:lnB>
-                  <a:noFill/>
-                </a:lnB>
-                <a:lnV>
-                  <a:noFill/>
-                </a:lnV>
-                <a:lnH>
-                  <a:noFill/>
-                </a:lnH>
-              </a:tblPr>
+              <a:tblPr/>
               <a:tblGrid>
-                <a:gridCol w="3677542"/>
-                <a:gridCol w="1632644"/>
-                <a:gridCol w="1442442"/>
-                <a:gridCol w="1331565"/>
-                <a:gridCol w="1379041"/>
-                <a:gridCol w="1490513"/>
+                <a:gridCol w="3677542">
+                  <a:extLst>
+                    <a:ext uri="{9D8B030D-6E8A-4147-A177-3AD203B41FA5}">
+                      <a16:colId xmlns:a16="http://schemas.microsoft.com/office/drawing/2014/main" val="20000"/>
+                    </a:ext>
+                  </a:extLst>
+                </a:gridCol>
+                <a:gridCol w="1632644">
+                  <a:extLst>
+                    <a:ext uri="{9D8B030D-6E8A-4147-A177-3AD203B41FA5}">
+                      <a16:colId xmlns:a16="http://schemas.microsoft.com/office/drawing/2014/main" val="20001"/>
+                    </a:ext>
+                  </a:extLst>
+                </a:gridCol>
+                <a:gridCol w="1442442">
+                  <a:extLst>
+                    <a:ext uri="{9D8B030D-6E8A-4147-A177-3AD203B41FA5}">
+                      <a16:colId xmlns:a16="http://schemas.microsoft.com/office/drawing/2014/main" val="20002"/>
+                    </a:ext>
+                  </a:extLst>
+                </a:gridCol>
+                <a:gridCol w="1331565">
+                  <a:extLst>
+                    <a:ext uri="{9D8B030D-6E8A-4147-A177-3AD203B41FA5}">
+                      <a16:colId xmlns:a16="http://schemas.microsoft.com/office/drawing/2014/main" val="20003"/>
+                    </a:ext>
+                  </a:extLst>
+                </a:gridCol>
+                <a:gridCol w="1379041">
+                  <a:extLst>
+                    <a:ext uri="{9D8B030D-6E8A-4147-A177-3AD203B41FA5}">
+                      <a16:colId xmlns:a16="http://schemas.microsoft.com/office/drawing/2014/main" val="20004"/>
+                    </a:ext>
+                  </a:extLst>
+                </a:gridCol>
+                <a:gridCol w="1490513">
+                  <a:extLst>
+                    <a:ext uri="{9D8B030D-6E8A-4147-A177-3AD203B41FA5}">
+                      <a16:colId xmlns:a16="http://schemas.microsoft.com/office/drawing/2014/main" val="20005"/>
+                    </a:ext>
+                  </a:extLst>
+                </a:gridCol>
               </a:tblGrid>
               <a:tr h="457200">
                 <a:tc>
@@ -8992,7 +9161,7 @@
                     <a:p>
                       <a:pPr algn="l"/>
                       <a:r>
-                        <a:rPr b="1" sz="1125" i="0" u="none">
+                        <a:rPr sz="1125" b="1" i="0" u="none">
                           <a:solidFill>
                             <a:srgbClr val="0F172A"/>
                           </a:solidFill>
@@ -9002,7 +9171,7 @@
                       </a:r>
                     </a:p>
                   </a:txBody>
-                  <a:tcPr anchor="ctr" marL="63500" marR="63500" marT="25400" marB="25400">
+                  <a:tcPr marL="63500" marR="63500" marT="25400" marB="25400" anchor="ctr">
                     <a:lnL>
                       <a:noFill/>
                     </a:lnL>
@@ -9027,7 +9196,7 @@
                     <a:p>
                       <a:pPr algn="ctr"/>
                       <a:r>
-                        <a:rPr b="1" sz="1125" i="0" u="none">
+                        <a:rPr sz="1125" b="1" i="0" u="none" dirty="0">
                           <a:solidFill>
                             <a:srgbClr val="0F172A"/>
                           </a:solidFill>
@@ -9037,7 +9206,7 @@
                       </a:r>
                     </a:p>
                   </a:txBody>
-                  <a:tcPr anchor="ctr" marL="63500" marR="63500" marT="25400" marB="25400">
+                  <a:tcPr marL="63500" marR="63500" marT="25400" marB="25400" anchor="ctr">
                     <a:lnL>
                       <a:noFill/>
                     </a:lnL>
@@ -9062,7 +9231,7 @@
                     <a:p>
                       <a:pPr algn="ctr"/>
                       <a:r>
-                        <a:rPr b="1" sz="1125" i="0" u="none">
+                        <a:rPr sz="1125" b="1" i="0" u="none" dirty="0">
                           <a:solidFill>
                             <a:srgbClr val="047857"/>
                           </a:solidFill>
@@ -9072,7 +9241,7 @@
                       </a:r>
                     </a:p>
                   </a:txBody>
-                  <a:tcPr anchor="ctr" marL="63500" marR="63500" marT="25400" marB="25400">
+                  <a:tcPr marL="63500" marR="63500" marT="25400" marB="25400" anchor="ctr">
                     <a:lnL>
                       <a:noFill/>
                     </a:lnL>
@@ -9097,7 +9266,7 @@
                     <a:p>
                       <a:pPr algn="ctr"/>
                       <a:r>
-                        <a:rPr b="1" sz="1125" i="0" u="none">
+                        <a:rPr sz="1125" b="1" i="0" u="none">
                           <a:solidFill>
                             <a:srgbClr val="047857"/>
                           </a:solidFill>
@@ -9107,7 +9276,7 @@
                       </a:r>
                     </a:p>
                   </a:txBody>
-                  <a:tcPr anchor="ctr" marL="63500" marR="63500" marT="25400" marB="25400">
+                  <a:tcPr marL="63500" marR="63500" marT="25400" marB="25400" anchor="ctr">
                     <a:lnL>
                       <a:noFill/>
                     </a:lnL>
@@ -9132,7 +9301,7 @@
                     <a:p>
                       <a:pPr algn="ctr"/>
                       <a:r>
-                        <a:rPr b="1" sz="1125" i="0" u="none">
+                        <a:rPr sz="1125" b="1" i="0" u="none">
                           <a:solidFill>
                             <a:srgbClr val="B91C1C"/>
                           </a:solidFill>
@@ -9142,7 +9311,7 @@
                       </a:r>
                     </a:p>
                   </a:txBody>
-                  <a:tcPr anchor="ctr" marL="63500" marR="63500" marT="25400" marB="25400">
+                  <a:tcPr marL="63500" marR="63500" marT="25400" marB="25400" anchor="ctr">
                     <a:lnL>
                       <a:noFill/>
                     </a:lnL>
@@ -9167,7 +9336,7 @@
                     <a:p>
                       <a:pPr algn="ctr"/>
                       <a:r>
-                        <a:rPr b="1" sz="1125" i="0" u="none">
+                        <a:rPr sz="1125" b="1" i="0" u="none">
                           <a:solidFill>
                             <a:srgbClr val="B91C1C"/>
                           </a:solidFill>
@@ -9177,7 +9346,7 @@
                       </a:r>
                     </a:p>
                   </a:txBody>
-                  <a:tcPr anchor="ctr" marL="63500" marR="63500" marT="25400" marB="25400">
+                  <a:tcPr marL="63500" marR="63500" marT="25400" marB="25400" anchor="ctr">
                     <a:lnL>
                       <a:noFill/>
                     </a:lnL>
@@ -9195,6 +9364,11 @@
                     </a:solidFill>
                   </a:tcPr>
                 </a:tc>
+                <a:extLst>
+                  <a:ext uri="{0D108BD9-81ED-4DB2-BD59-A6C34878D82A}">
+                    <a16:rowId xmlns:a16="http://schemas.microsoft.com/office/drawing/2014/main" val="10000"/>
+                  </a:ext>
+                </a:extLst>
               </a:tr>
               <a:tr h="457200">
                 <a:tc>
@@ -9204,17 +9378,32 @@
                     <a:p>
                       <a:pPr algn="l"/>
                       <a:r>
-                        <a:rPr b="1" sz="1125" i="0" u="none">
+                        <a:rPr lang="es-EC" sz="1125" b="1" i="0" u="none" dirty="0" err="1">
                           <a:solidFill>
                             <a:srgbClr val="334155"/>
                           </a:solidFill>
                           <a:latin typeface="Inter"/>
                         </a:rPr>
-                        <a:t>P1 - Recurrente M-Ticket</a:t>
+                        <a:t>Bucket</a:t>
                       </a:r>
+                      <a:r>
+                        <a:rPr lang="es-EC" sz="1125" b="1" i="0" u="none" dirty="0">
+                          <a:solidFill>
+                            <a:srgbClr val="334155"/>
+                          </a:solidFill>
+                          <a:latin typeface="Inter"/>
+                        </a:rPr>
+                        <a:t> 1</a:t>
+                      </a:r>
+                      <a:endParaRPr sz="1125" b="1" i="0" u="none" dirty="0">
+                        <a:solidFill>
+                          <a:srgbClr val="334155"/>
+                        </a:solidFill>
+                        <a:latin typeface="Inter"/>
+                      </a:endParaRPr>
                     </a:p>
                   </a:txBody>
-                  <a:tcPr anchor="ctr" marL="63500" marR="63500" marT="25400" marB="25400">
+                  <a:tcPr marL="63500" marR="63500" marT="25400" marB="25400" anchor="ctr">
                     <a:lnL>
                       <a:noFill/>
                     </a:lnL>
@@ -9239,7 +9428,7 @@
                     <a:p>
                       <a:pPr algn="ctr"/>
                       <a:r>
-                        <a:rPr b="0" sz="1125" i="0" u="none">
+                        <a:rPr sz="1125" b="0" i="0" u="none" dirty="0">
                           <a:solidFill>
                             <a:srgbClr val="64748B"/>
                           </a:solidFill>
@@ -9249,7 +9438,7 @@
                       </a:r>
                     </a:p>
                   </a:txBody>
-                  <a:tcPr anchor="ctr" marL="63500" marR="63500" marT="25400" marB="25400">
+                  <a:tcPr marL="63500" marR="63500" marT="25400" marB="25400" anchor="ctr">
                     <a:lnL>
                       <a:noFill/>
                     </a:lnL>
@@ -9274,7 +9463,7 @@
                     <a:p>
                       <a:pPr algn="ctr"/>
                       <a:r>
-                        <a:rPr b="1" sz="1125" i="0" u="none">
+                        <a:rPr sz="1125" b="1" i="0" u="none" dirty="0">
                           <a:solidFill>
                             <a:srgbClr val="047857"/>
                           </a:solidFill>
@@ -9284,7 +9473,7 @@
                       </a:r>
                     </a:p>
                   </a:txBody>
-                  <a:tcPr anchor="ctr" marL="63500" marR="63500" marT="25400" marB="25400">
+                  <a:tcPr marL="63500" marR="63500" marT="25400" marB="25400" anchor="ctr">
                     <a:lnL>
                       <a:noFill/>
                     </a:lnL>
@@ -9309,7 +9498,7 @@
                     <a:p>
                       <a:pPr algn="ctr"/>
                       <a:r>
-                        <a:rPr b="1" sz="1125" i="0" u="none">
+                        <a:rPr sz="1125" b="1" i="0" u="none" dirty="0">
                           <a:solidFill>
                             <a:srgbClr val="047857"/>
                           </a:solidFill>
@@ -9319,7 +9508,7 @@
                       </a:r>
                     </a:p>
                   </a:txBody>
-                  <a:tcPr anchor="ctr" marL="63500" marR="63500" marT="25400" marB="25400">
+                  <a:tcPr marL="63500" marR="63500" marT="25400" marB="25400" anchor="ctr">
                     <a:lnL>
                       <a:noFill/>
                     </a:lnL>
@@ -9344,7 +9533,7 @@
                     <a:p>
                       <a:pPr algn="ctr"/>
                       <a:r>
-                        <a:rPr b="1" sz="1125" i="0" u="none">
+                        <a:rPr sz="1125" b="1" i="0" u="none">
                           <a:solidFill>
                             <a:srgbClr val="B91C1C"/>
                           </a:solidFill>
@@ -9354,7 +9543,7 @@
                       </a:r>
                     </a:p>
                   </a:txBody>
-                  <a:tcPr anchor="ctr" marL="63500" marR="63500" marT="25400" marB="25400">
+                  <a:tcPr marL="63500" marR="63500" marT="25400" marB="25400" anchor="ctr">
                     <a:lnL>
                       <a:noFill/>
                     </a:lnL>
@@ -9379,7 +9568,7 @@
                     <a:p>
                       <a:pPr algn="ctr"/>
                       <a:r>
-                        <a:rPr b="1" sz="1125" i="0" u="none">
+                        <a:rPr sz="1125" b="1" i="0" u="none">
                           <a:solidFill>
                             <a:srgbClr val="B91C1C"/>
                           </a:solidFill>
@@ -9389,7 +9578,7 @@
                       </a:r>
                     </a:p>
                   </a:txBody>
-                  <a:tcPr anchor="ctr" marL="63500" marR="63500" marT="25400" marB="25400">
+                  <a:tcPr marL="63500" marR="63500" marT="25400" marB="25400" anchor="ctr">
                     <a:lnL>
                       <a:noFill/>
                     </a:lnL>
@@ -9407,6 +9596,11 @@
                     </a:solidFill>
                   </a:tcPr>
                 </a:tc>
+                <a:extLst>
+                  <a:ext uri="{0D108BD9-81ED-4DB2-BD59-A6C34878D82A}">
+                    <a16:rowId xmlns:a16="http://schemas.microsoft.com/office/drawing/2014/main" val="10001"/>
+                  </a:ext>
+                </a:extLst>
               </a:tr>
               <a:tr h="457200">
                 <a:tc>
@@ -9416,17 +9610,32 @@
                     <a:p>
                       <a:pPr algn="l"/>
                       <a:r>
-                        <a:rPr b="1" sz="1125" i="0" u="none">
+                        <a:rPr lang="es-EC" sz="1125" b="1" i="0" u="none" dirty="0" err="1">
                           <a:solidFill>
                             <a:srgbClr val="334155"/>
                           </a:solidFill>
                           <a:latin typeface="Inter"/>
                         </a:rPr>
-                        <a:t>P2 - Recurrente High-Ticket</a:t>
+                        <a:t>Bucket</a:t>
                       </a:r>
+                      <a:r>
+                        <a:rPr lang="es-EC" sz="1125" b="1" i="0" u="none" dirty="0">
+                          <a:solidFill>
+                            <a:srgbClr val="334155"/>
+                          </a:solidFill>
+                          <a:latin typeface="Inter"/>
+                        </a:rPr>
+                        <a:t> 2</a:t>
+                      </a:r>
+                      <a:endParaRPr sz="1125" b="1" i="0" u="none" dirty="0">
+                        <a:solidFill>
+                          <a:srgbClr val="334155"/>
+                        </a:solidFill>
+                        <a:latin typeface="Inter"/>
+                      </a:endParaRPr>
                     </a:p>
                   </a:txBody>
-                  <a:tcPr anchor="ctr" marL="63500" marR="63500" marT="25400" marB="25400">
+                  <a:tcPr marL="63500" marR="63500" marT="25400" marB="25400" anchor="ctr">
                     <a:lnL>
                       <a:noFill/>
                     </a:lnL>
@@ -9451,7 +9660,7 @@
                     <a:p>
                       <a:pPr algn="ctr"/>
                       <a:r>
-                        <a:rPr b="0" sz="1125" i="0" u="none">
+                        <a:rPr sz="1125" b="0" i="0" u="none" dirty="0">
                           <a:solidFill>
                             <a:srgbClr val="64748B"/>
                           </a:solidFill>
@@ -9461,7 +9670,7 @@
                       </a:r>
                     </a:p>
                   </a:txBody>
-                  <a:tcPr anchor="ctr" marL="63500" marR="63500" marT="25400" marB="25400">
+                  <a:tcPr marL="63500" marR="63500" marT="25400" marB="25400" anchor="ctr">
                     <a:lnL>
                       <a:noFill/>
                     </a:lnL>
@@ -9486,7 +9695,7 @@
                     <a:p>
                       <a:pPr algn="ctr"/>
                       <a:r>
-                        <a:rPr b="1" sz="1125" i="0" u="none">
+                        <a:rPr sz="1125" b="1" i="0" u="none">
                           <a:solidFill>
                             <a:srgbClr val="047857"/>
                           </a:solidFill>
@@ -9496,7 +9705,7 @@
                       </a:r>
                     </a:p>
                   </a:txBody>
-                  <a:tcPr anchor="ctr" marL="63500" marR="63500" marT="25400" marB="25400">
+                  <a:tcPr marL="63500" marR="63500" marT="25400" marB="25400" anchor="ctr">
                     <a:lnL>
                       <a:noFill/>
                     </a:lnL>
@@ -9521,7 +9730,7 @@
                     <a:p>
                       <a:pPr algn="ctr"/>
                       <a:r>
-                        <a:rPr b="1" sz="1125" i="0" u="none">
+                        <a:rPr sz="1125" b="1" i="0" u="none" dirty="0">
                           <a:solidFill>
                             <a:srgbClr val="047857"/>
                           </a:solidFill>
@@ -9531,7 +9740,7 @@
                       </a:r>
                     </a:p>
                   </a:txBody>
-                  <a:tcPr anchor="ctr" marL="63500" marR="63500" marT="25400" marB="25400">
+                  <a:tcPr marL="63500" marR="63500" marT="25400" marB="25400" anchor="ctr">
                     <a:lnL>
                       <a:noFill/>
                     </a:lnL>
@@ -9556,7 +9765,7 @@
                     <a:p>
                       <a:pPr algn="ctr"/>
                       <a:r>
-                        <a:rPr b="1" sz="1125" i="0" u="none">
+                        <a:rPr sz="1125" b="1" i="0" u="none" dirty="0">
                           <a:solidFill>
                             <a:srgbClr val="B91C1C"/>
                           </a:solidFill>
@@ -9566,7 +9775,7 @@
                       </a:r>
                     </a:p>
                   </a:txBody>
-                  <a:tcPr anchor="ctr" marL="63500" marR="63500" marT="25400" marB="25400">
+                  <a:tcPr marL="63500" marR="63500" marT="25400" marB="25400" anchor="ctr">
                     <a:lnL>
                       <a:noFill/>
                     </a:lnL>
@@ -9591,7 +9800,7 @@
                     <a:p>
                       <a:pPr algn="ctr"/>
                       <a:r>
-                        <a:rPr b="1" sz="1125" i="0" u="none">
+                        <a:rPr sz="1125" b="1" i="0" u="none">
                           <a:solidFill>
                             <a:srgbClr val="B91C1C"/>
                           </a:solidFill>
@@ -9601,7 +9810,7 @@
                       </a:r>
                     </a:p>
                   </a:txBody>
-                  <a:tcPr anchor="ctr" marL="63500" marR="63500" marT="25400" marB="25400">
+                  <a:tcPr marL="63500" marR="63500" marT="25400" marB="25400" anchor="ctr">
                     <a:lnL>
                       <a:noFill/>
                     </a:lnL>
@@ -9619,6 +9828,11 @@
                     </a:solidFill>
                   </a:tcPr>
                 </a:tc>
+                <a:extLst>
+                  <a:ext uri="{0D108BD9-81ED-4DB2-BD59-A6C34878D82A}">
+                    <a16:rowId xmlns:a16="http://schemas.microsoft.com/office/drawing/2014/main" val="10002"/>
+                  </a:ext>
+                </a:extLst>
               </a:tr>
               <a:tr h="457200">
                 <a:tc>
@@ -9628,17 +9842,32 @@
                     <a:p>
                       <a:pPr algn="l"/>
                       <a:r>
-                        <a:rPr b="1" sz="1125" i="0" u="none">
+                        <a:rPr lang="es-EC" sz="1125" b="1" i="0" u="none" dirty="0" err="1">
                           <a:solidFill>
                             <a:srgbClr val="334155"/>
                           </a:solidFill>
                           <a:latin typeface="Inter"/>
                         </a:rPr>
-                        <a:t>P3 - Nuevo Riesgo Bajo</a:t>
+                        <a:t>Bucket</a:t>
                       </a:r>
+                      <a:r>
+                        <a:rPr lang="es-EC" sz="1125" b="1" i="0" u="none">
+                          <a:solidFill>
+                            <a:srgbClr val="334155"/>
+                          </a:solidFill>
+                          <a:latin typeface="Inter"/>
+                        </a:rPr>
+                        <a:t> 3</a:t>
+                      </a:r>
+                      <a:endParaRPr sz="1125" b="1" i="0" u="none" dirty="0">
+                        <a:solidFill>
+                          <a:srgbClr val="334155"/>
+                        </a:solidFill>
+                        <a:latin typeface="Inter"/>
+                      </a:endParaRPr>
                     </a:p>
                   </a:txBody>
-                  <a:tcPr anchor="ctr" marL="63500" marR="63500" marT="25400" marB="25400">
+                  <a:tcPr marL="63500" marR="63500" marT="25400" marB="25400" anchor="ctr">
                     <a:lnL>
                       <a:noFill/>
                     </a:lnL>
@@ -9663,7 +9892,7 @@
                     <a:p>
                       <a:pPr algn="ctr"/>
                       <a:r>
-                        <a:rPr b="0" sz="1125" i="0" u="none">
+                        <a:rPr sz="1125" b="0" i="0" u="none" dirty="0">
                           <a:solidFill>
                             <a:srgbClr val="64748B"/>
                           </a:solidFill>
@@ -9673,7 +9902,7 @@
                       </a:r>
                     </a:p>
                   </a:txBody>
-                  <a:tcPr anchor="ctr" marL="63500" marR="63500" marT="25400" marB="25400">
+                  <a:tcPr marL="63500" marR="63500" marT="25400" marB="25400" anchor="ctr">
                     <a:lnL>
                       <a:noFill/>
                     </a:lnL>
@@ -9698,7 +9927,7 @@
                     <a:p>
                       <a:pPr algn="ctr"/>
                       <a:r>
-                        <a:rPr b="1" sz="1125" i="0" u="none">
+                        <a:rPr sz="1125" b="1" i="0" u="none">
                           <a:solidFill>
                             <a:srgbClr val="047857"/>
                           </a:solidFill>
@@ -9708,7 +9937,7 @@
                       </a:r>
                     </a:p>
                   </a:txBody>
-                  <a:tcPr anchor="ctr" marL="63500" marR="63500" marT="25400" marB="25400">
+                  <a:tcPr marL="63500" marR="63500" marT="25400" marB="25400" anchor="ctr">
                     <a:lnL>
                       <a:noFill/>
                     </a:lnL>
@@ -9733,7 +9962,7 @@
                     <a:p>
                       <a:pPr algn="ctr"/>
                       <a:r>
-                        <a:rPr b="1" sz="1125" i="0" u="none">
+                        <a:rPr sz="1125" b="1" i="0" u="none" dirty="0">
                           <a:solidFill>
                             <a:srgbClr val="047857"/>
                           </a:solidFill>
@@ -9743,7 +9972,7 @@
                       </a:r>
                     </a:p>
                   </a:txBody>
-                  <a:tcPr anchor="ctr" marL="63500" marR="63500" marT="25400" marB="25400">
+                  <a:tcPr marL="63500" marR="63500" marT="25400" marB="25400" anchor="ctr">
                     <a:lnL>
                       <a:noFill/>
                     </a:lnL>
@@ -9768,7 +9997,7 @@
                     <a:p>
                       <a:pPr algn="ctr"/>
                       <a:r>
-                        <a:rPr b="1" sz="1125" i="0" u="none">
+                        <a:rPr sz="1125" b="1" i="0" u="none" dirty="0">
                           <a:solidFill>
                             <a:srgbClr val="B91C1C"/>
                           </a:solidFill>
@@ -9778,7 +10007,7 @@
                       </a:r>
                     </a:p>
                   </a:txBody>
-                  <a:tcPr anchor="ctr" marL="63500" marR="63500" marT="25400" marB="25400">
+                  <a:tcPr marL="63500" marR="63500" marT="25400" marB="25400" anchor="ctr">
                     <a:lnL>
                       <a:noFill/>
                     </a:lnL>
@@ -9803,7 +10032,7 @@
                     <a:p>
                       <a:pPr algn="ctr"/>
                       <a:r>
-                        <a:rPr b="1" sz="1125" i="0" u="none">
+                        <a:rPr sz="1125" b="1" i="0" u="none" dirty="0">
                           <a:solidFill>
                             <a:srgbClr val="B91C1C"/>
                           </a:solidFill>
@@ -9813,7 +10042,7 @@
                       </a:r>
                     </a:p>
                   </a:txBody>
-                  <a:tcPr anchor="ctr" marL="63500" marR="63500" marT="25400" marB="25400">
+                  <a:tcPr marL="63500" marR="63500" marT="25400" marB="25400" anchor="ctr">
                     <a:lnL>
                       <a:noFill/>
                     </a:lnL>
@@ -9831,6 +10060,11 @@
                     </a:solidFill>
                   </a:tcPr>
                 </a:tc>
+                <a:extLst>
+                  <a:ext uri="{0D108BD9-81ED-4DB2-BD59-A6C34878D82A}">
+                    <a16:rowId xmlns:a16="http://schemas.microsoft.com/office/drawing/2014/main" val="10003"/>
+                  </a:ext>
+                </a:extLst>
               </a:tr>
             </a:tbl>
           </a:graphicData>
@@ -9853,14 +10087,14 @@
           <a:noFill/>
         </p:spPr>
         <p:txBody>
-          <a:bodyPr wrap="none" lIns="0" rIns="0" tIns="0" bIns="0" anchor="t">
+          <a:bodyPr wrap="none" lIns="0" tIns="0" rIns="0" bIns="0" anchor="t">
             <a:spAutoFit/>
           </a:bodyPr>
           <a:lstStyle/>
           <a:p>
             <a:pPr algn="l"/>
             <a:r>
-              <a:rPr b="1" sz="1050" i="0" u="none">
+              <a:rPr sz="1050" b="1" i="0" u="none">
                 <a:solidFill>
                   <a:srgbClr val="2563EB"/>
                 </a:solidFill>
@@ -9888,7 +10122,7 @@
           <a:noFill/>
         </p:spPr>
         <p:txBody>
-          <a:bodyPr wrap="none" lIns="0" rIns="0" tIns="0" bIns="0" anchor="t">
+          <a:bodyPr wrap="none" lIns="0" tIns="0" rIns="0" bIns="0" anchor="t">
             <a:spAutoFit/>
           </a:bodyPr>
           <a:lstStyle/>
@@ -9899,7 +10133,7 @@
               </a:lnSpc>
             </a:pPr>
             <a:r>
-              <a:rPr b="1" sz="2400" i="0" u="none">
+              <a:rPr sz="2400" b="1" i="0" u="none">
                 <a:solidFill>
                   <a:srgbClr val="0F172A"/>
                 </a:solidFill>
@@ -9927,14 +10161,14 @@
           <a:noFill/>
         </p:spPr>
         <p:txBody>
-          <a:bodyPr wrap="none" lIns="0" rIns="0" tIns="0" bIns="0" anchor="t">
+          <a:bodyPr wrap="none" lIns="0" tIns="0" rIns="0" bIns="0" anchor="t">
             <a:spAutoFit/>
           </a:bodyPr>
           <a:lstStyle/>
           <a:p>
             <a:pPr algn="l"/>
             <a:r>
-              <a:rPr b="0" sz="1200" i="0" u="none">
+              <a:rPr sz="1200" b="0" i="0" u="none">
                 <a:solidFill>
                   <a:srgbClr val="64748B"/>
                 </a:solidFill>
@@ -9962,83 +10196,299 @@
           <a:noFill/>
         </p:spPr>
         <p:txBody>
-          <a:bodyPr wrap="square" lIns="0" rIns="0" tIns="0" bIns="0" anchor="t">
+          <a:bodyPr wrap="square" lIns="0" tIns="0" rIns="0" bIns="0" anchor="t">
             <a:spAutoFit/>
           </a:bodyPr>
           <a:lstStyle/>
           <a:p>
             <a:pPr algn="l"/>
             <a:r>
-              <a:rPr b="1" sz="1125" i="0" u="none">
+              <a:rPr sz="1125" b="1" i="0" u="none" dirty="0" err="1">
                 <a:solidFill>
                   <a:srgbClr val="1E40AF"/>
                 </a:solidFill>
                 <a:latin typeface="Inter"/>
               </a:rPr>
-              <a:t>Ejemplo de uso para Negocio:</a:t>
-            </a:r>
-            <a:r>
-              <a:rPr b="0" sz="1125" i="0" u="none">
+              <a:t>Ejemplo</a:t>
+            </a:r>
+            <a:r>
+              <a:rPr sz="1125" b="1" i="0" u="none" dirty="0">
                 <a:solidFill>
                   <a:srgbClr val="1E40AF"/>
                 </a:solidFill>
                 <a:latin typeface="Inter"/>
               </a:rPr>
-              <a:t> "Si para el segmento </a:t>
-            </a:r>
-            <a:r>
-              <a:rPr b="1" sz="1125" i="0" u="none">
+              <a:t> de </a:t>
+            </a:r>
+            <a:r>
+              <a:rPr sz="1125" b="1" i="0" u="none" dirty="0" err="1">
                 <a:solidFill>
                   <a:srgbClr val="1E40AF"/>
                 </a:solidFill>
                 <a:latin typeface="Inter"/>
               </a:rPr>
+              <a:t>uso</a:t>
+            </a:r>
+            <a:r>
+              <a:rPr sz="1125" b="1" i="0" u="none" dirty="0">
+                <a:solidFill>
+                  <a:srgbClr val="1E40AF"/>
+                </a:solidFill>
+                <a:latin typeface="Inter"/>
+              </a:rPr>
+              <a:t> para </a:t>
+            </a:r>
+            <a:r>
+              <a:rPr sz="1125" b="1" i="0" u="none" dirty="0" err="1">
+                <a:solidFill>
+                  <a:srgbClr val="1E40AF"/>
+                </a:solidFill>
+                <a:latin typeface="Inter"/>
+              </a:rPr>
+              <a:t>Negocio</a:t>
+            </a:r>
+            <a:r>
+              <a:rPr sz="1125" b="1" i="0" u="none" dirty="0">
+                <a:solidFill>
+                  <a:srgbClr val="1E40AF"/>
+                </a:solidFill>
+                <a:latin typeface="Inter"/>
+              </a:rPr>
+              <a:t>:</a:t>
+            </a:r>
+            <a:r>
+              <a:rPr sz="1125" b="0" i="0" u="none" dirty="0">
+                <a:solidFill>
+                  <a:srgbClr val="1E40AF"/>
+                </a:solidFill>
+                <a:latin typeface="Inter"/>
+              </a:rPr>
+              <a:t> "Si para el </a:t>
+            </a:r>
+            <a:r>
+              <a:rPr sz="1125" b="0" i="0" u="none" dirty="0" err="1">
+                <a:solidFill>
+                  <a:srgbClr val="1E40AF"/>
+                </a:solidFill>
+                <a:latin typeface="Inter"/>
+              </a:rPr>
+              <a:t>segmento</a:t>
+            </a:r>
+            <a:r>
+              <a:rPr sz="1125" b="0" i="0" u="none" dirty="0">
+                <a:solidFill>
+                  <a:srgbClr val="1E40AF"/>
+                </a:solidFill>
+                <a:latin typeface="Inter"/>
+              </a:rPr>
+              <a:t> </a:t>
+            </a:r>
+            <a:r>
+              <a:rPr sz="1125" b="1" i="0" u="none" dirty="0">
+                <a:solidFill>
+                  <a:srgbClr val="1E40AF"/>
+                </a:solidFill>
+                <a:latin typeface="Inter"/>
+              </a:rPr>
               <a:t>P1</a:t>
             </a:r>
             <a:r>
-              <a:rPr b="0" sz="1125" i="0" u="none">
+              <a:rPr sz="1125" b="0" i="0" u="none" dirty="0">
                 <a:solidFill>
                   <a:srgbClr val="1E40AF"/>
                 </a:solidFill>
                 <a:latin typeface="Inter"/>
               </a:rPr>
-              <a:t> decidimos subir </a:t>
-            </a:r>
-            <a:r>
-              <a:rPr b="1" sz="1125" i="0" u="none">
+              <a:t> </a:t>
+            </a:r>
+            <a:r>
+              <a:rPr sz="1125" b="0" i="0" u="none" dirty="0" err="1">
                 <a:solidFill>
                   <a:srgbClr val="1E40AF"/>
                 </a:solidFill>
                 <a:latin typeface="Inter"/>
               </a:rPr>
+              <a:t>decidimos</a:t>
+            </a:r>
+            <a:r>
+              <a:rPr sz="1125" b="0" i="0" u="none" dirty="0">
+                <a:solidFill>
+                  <a:srgbClr val="1E40AF"/>
+                </a:solidFill>
+                <a:latin typeface="Inter"/>
+              </a:rPr>
+              <a:t> </a:t>
+            </a:r>
+            <a:r>
+              <a:rPr sz="1125" b="0" i="0" u="none" dirty="0" err="1">
+                <a:solidFill>
+                  <a:srgbClr val="1E40AF"/>
+                </a:solidFill>
+                <a:latin typeface="Inter"/>
+              </a:rPr>
+              <a:t>subir</a:t>
+            </a:r>
+            <a:r>
+              <a:rPr sz="1125" b="0" i="0" u="none" dirty="0">
+                <a:solidFill>
+                  <a:srgbClr val="1E40AF"/>
+                </a:solidFill>
+                <a:latin typeface="Inter"/>
+              </a:rPr>
+              <a:t> </a:t>
+            </a:r>
+            <a:r>
+              <a:rPr sz="1125" b="1" i="0" u="none" dirty="0">
+                <a:solidFill>
+                  <a:srgbClr val="1E40AF"/>
+                </a:solidFill>
+                <a:latin typeface="Inter"/>
+              </a:rPr>
               <a:t>50 bps</a:t>
             </a:r>
             <a:r>
-              <a:rPr b="0" sz="1125" i="0" u="none">
+              <a:rPr sz="1125" b="0" i="0" u="none" dirty="0">
                 <a:solidFill>
                   <a:srgbClr val="1E40AF"/>
                 </a:solidFill>
                 <a:latin typeface="Inter"/>
               </a:rPr>
-              <a:t> a la tasa base, proyectamos una caída de </a:t>
-            </a:r>
-            <a:r>
-              <a:rPr b="1" sz="1125" i="0" u="none">
+              <a:t> a la </a:t>
+            </a:r>
+            <a:r>
+              <a:rPr sz="1125" b="0" i="0" u="none" dirty="0" err="1">
                 <a:solidFill>
                   <a:srgbClr val="1E40AF"/>
                 </a:solidFill>
                 <a:latin typeface="Inter"/>
               </a:rPr>
-              <a:t>3.5% en la efectividad</a:t>
-            </a:r>
-            <a:r>
-              <a:rPr b="0" sz="1125" i="0" u="none">
+              <a:t>tasa</a:t>
+            </a:r>
+            <a:r>
+              <a:rPr sz="1125" b="0" i="0" u="none" dirty="0">
                 <a:solidFill>
                   <a:srgbClr val="1E40AF"/>
                 </a:solidFill>
                 <a:latin typeface="Inter"/>
               </a:rPr>
-              <a:t> de la campaña."</a:t>
+              <a:t> base, </a:t>
+            </a:r>
+            <a:r>
+              <a:rPr sz="1125" b="0" i="0" u="none" dirty="0" err="1">
+                <a:solidFill>
+                  <a:srgbClr val="1E40AF"/>
+                </a:solidFill>
+                <a:latin typeface="Inter"/>
+              </a:rPr>
+              <a:t>proyectamos</a:t>
+            </a:r>
+            <a:r>
+              <a:rPr sz="1125" b="0" i="0" u="none" dirty="0">
+                <a:solidFill>
+                  <a:srgbClr val="1E40AF"/>
+                </a:solidFill>
+                <a:latin typeface="Inter"/>
+              </a:rPr>
+              <a:t> </a:t>
+            </a:r>
+            <a:r>
+              <a:rPr sz="1125" b="0" i="0" u="none" dirty="0" err="1">
+                <a:solidFill>
+                  <a:srgbClr val="1E40AF"/>
+                </a:solidFill>
+                <a:latin typeface="Inter"/>
+              </a:rPr>
+              <a:t>una</a:t>
+            </a:r>
+            <a:r>
+              <a:rPr sz="1125" b="0" i="0" u="none" dirty="0">
+                <a:solidFill>
+                  <a:srgbClr val="1E40AF"/>
+                </a:solidFill>
+                <a:latin typeface="Inter"/>
+              </a:rPr>
+              <a:t> </a:t>
+            </a:r>
+            <a:r>
+              <a:rPr sz="1125" b="0" i="0" u="none" dirty="0" err="1">
+                <a:solidFill>
+                  <a:srgbClr val="1E40AF"/>
+                </a:solidFill>
+                <a:latin typeface="Inter"/>
+              </a:rPr>
+              <a:t>caída</a:t>
+            </a:r>
+            <a:r>
+              <a:rPr sz="1125" b="0" i="0" u="none" dirty="0">
+                <a:solidFill>
+                  <a:srgbClr val="1E40AF"/>
+                </a:solidFill>
+                <a:latin typeface="Inter"/>
+              </a:rPr>
+              <a:t> de </a:t>
+            </a:r>
+            <a:r>
+              <a:rPr sz="1125" b="1" i="0" u="none" dirty="0">
+                <a:solidFill>
+                  <a:srgbClr val="1E40AF"/>
+                </a:solidFill>
+                <a:latin typeface="Inter"/>
+              </a:rPr>
+              <a:t>3.5% </a:t>
+            </a:r>
+            <a:r>
+              <a:rPr sz="1125" b="1" i="0" u="none" dirty="0" err="1">
+                <a:solidFill>
+                  <a:srgbClr val="1E40AF"/>
+                </a:solidFill>
+                <a:latin typeface="Inter"/>
+              </a:rPr>
+              <a:t>en</a:t>
+            </a:r>
+            <a:r>
+              <a:rPr sz="1125" b="1" i="0" u="none" dirty="0">
+                <a:solidFill>
+                  <a:srgbClr val="1E40AF"/>
+                </a:solidFill>
+                <a:latin typeface="Inter"/>
+              </a:rPr>
+              <a:t> la </a:t>
+            </a:r>
+            <a:r>
+              <a:rPr sz="1125" b="1" i="0" u="none" dirty="0" err="1">
+                <a:solidFill>
+                  <a:srgbClr val="1E40AF"/>
+                </a:solidFill>
+                <a:latin typeface="Inter"/>
+              </a:rPr>
+              <a:t>efectividad</a:t>
+            </a:r>
+            <a:r>
+              <a:rPr sz="1125" b="0" i="0" u="none" dirty="0">
+                <a:solidFill>
+                  <a:srgbClr val="1E40AF"/>
+                </a:solidFill>
+                <a:latin typeface="Inter"/>
+              </a:rPr>
+              <a:t> de la </a:t>
+            </a:r>
+            <a:r>
+              <a:rPr sz="1125" b="0" i="0" u="none" dirty="0" err="1">
+                <a:solidFill>
+                  <a:srgbClr val="1E40AF"/>
+                </a:solidFill>
+                <a:latin typeface="Inter"/>
+              </a:rPr>
+              <a:t>campaña</a:t>
+            </a:r>
+            <a:r>
+              <a:rPr sz="1125" b="0" i="0" u="none" dirty="0">
+                <a:solidFill>
+                  <a:srgbClr val="1E40AF"/>
+                </a:solidFill>
+                <a:latin typeface="Inter"/>
+              </a:rPr>
+              <a:t>."</a:t>
             </a:r>
           </a:p>
         </p:txBody>
@@ -10052,7 +10502,7 @@
 </file>
 
 <file path=ppt/slides/slide8.xml><?xml version="1.0" encoding="utf-8"?>
-<p:sld xmlns:a="http://schemas.openxmlformats.org/drawingml/2006/main" xmlns:p="http://schemas.openxmlformats.org/presentationml/2006/main" xmlns:r="http://schemas.openxmlformats.org/officeDocument/2006/relationships">
+<p:sld xmlns:a="http://schemas.openxmlformats.org/drawingml/2006/main" xmlns:r="http://schemas.openxmlformats.org/officeDocument/2006/relationships" xmlns:p="http://schemas.openxmlformats.org/presentationml/2006/main">
   <p:cSld>
     <p:bg>
       <p:bgPr>
@@ -10068,7 +10518,14 @@
         <p:cNvGrpSpPr/>
         <p:nvPr/>
       </p:nvGrpSpPr>
-      <p:grpSpPr/>
+      <p:grpSpPr>
+        <a:xfrm>
+          <a:off x="0" y="0"/>
+          <a:ext cx="0" cy="0"/>
+          <a:chOff x="0" y="0"/>
+          <a:chExt cx="0" cy="0"/>
+        </a:xfrm>
+      </p:grpSpPr>
       <p:sp>
         <p:nvSpPr>
           <p:cNvPr id="2" name="Rounded Rectangle 1"/>
@@ -10112,6 +10569,7 @@
           <a:lstStyle/>
           <a:p>
             <a:pPr algn="ctr"/>
+            <a:endParaRPr/>
           </a:p>
         </p:txBody>
       </p:sp>
@@ -10160,6 +10618,7 @@
           <a:lstStyle/>
           <a:p>
             <a:pPr algn="ctr"/>
+            <a:endParaRPr/>
           </a:p>
         </p:txBody>
       </p:sp>
@@ -10208,6 +10667,7 @@
           <a:lstStyle/>
           <a:p>
             <a:pPr algn="ctr"/>
+            <a:endParaRPr/>
           </a:p>
         </p:txBody>
       </p:sp>
@@ -10256,6 +10716,7 @@
           <a:lstStyle/>
           <a:p>
             <a:pPr algn="ctr"/>
+            <a:endParaRPr/>
           </a:p>
         </p:txBody>
       </p:sp>
@@ -10302,6 +10763,7 @@
           <a:lstStyle/>
           <a:p>
             <a:pPr algn="ctr"/>
+            <a:endParaRPr/>
           </a:p>
         </p:txBody>
       </p:sp>
@@ -10370,14 +10832,14 @@
           <a:noFill/>
         </p:spPr>
         <p:txBody>
-          <a:bodyPr wrap="none" lIns="0" rIns="0" tIns="0" bIns="0" anchor="t">
+          <a:bodyPr wrap="none" lIns="0" tIns="0" rIns="0" bIns="0" anchor="t">
             <a:spAutoFit/>
           </a:bodyPr>
           <a:lstStyle/>
           <a:p>
             <a:pPr algn="l"/>
             <a:r>
-              <a:rPr b="1" sz="1050" i="0" u="none">
+              <a:rPr sz="1050" b="1" i="0" u="none">
                 <a:solidFill>
                   <a:srgbClr val="2563EB"/>
                 </a:solidFill>
@@ -10405,7 +10867,7 @@
           <a:noFill/>
         </p:spPr>
         <p:txBody>
-          <a:bodyPr wrap="none" lIns="0" rIns="0" tIns="0" bIns="0" anchor="t">
+          <a:bodyPr wrap="none" lIns="0" tIns="0" rIns="0" bIns="0" anchor="t">
             <a:spAutoFit/>
           </a:bodyPr>
           <a:lstStyle/>
@@ -10416,7 +10878,7 @@
               </a:lnSpc>
             </a:pPr>
             <a:r>
-              <a:rPr b="1" sz="2400" i="0" u="none">
+              <a:rPr sz="2400" b="1" i="0" u="none">
                 <a:solidFill>
                   <a:srgbClr val="0F172A"/>
                 </a:solidFill>
@@ -10444,14 +10906,14 @@
           <a:noFill/>
         </p:spPr>
         <p:txBody>
-          <a:bodyPr wrap="none" lIns="0" rIns="0" tIns="0" bIns="0" anchor="t">
+          <a:bodyPr wrap="none" lIns="0" tIns="0" rIns="0" bIns="0" anchor="t">
             <a:spAutoFit/>
           </a:bodyPr>
           <a:lstStyle/>
           <a:p>
             <a:pPr algn="l"/>
             <a:r>
-              <a:rPr b="0" sz="1200" i="0" u="none">
+              <a:rPr sz="1200" b="0" i="0" u="none">
                 <a:solidFill>
                   <a:srgbClr val="64748B"/>
                 </a:solidFill>
@@ -10479,14 +10941,14 @@
           <a:noFill/>
         </p:spPr>
         <p:txBody>
-          <a:bodyPr wrap="none" lIns="0" rIns="0" tIns="0" bIns="0" anchor="t">
+          <a:bodyPr wrap="none" lIns="0" tIns="0" rIns="0" bIns="0" anchor="t">
             <a:spAutoFit/>
           </a:bodyPr>
           <a:lstStyle/>
           <a:p>
             <a:pPr algn="ctr"/>
             <a:r>
-              <a:rPr b="0" sz="975" i="0" u="none">
+              <a:rPr sz="975" b="0" i="0" u="none">
                 <a:solidFill>
                   <a:srgbClr val="CBD5E1"/>
                 </a:solidFill>
@@ -10514,14 +10976,14 @@
           <a:noFill/>
         </p:spPr>
         <p:txBody>
-          <a:bodyPr wrap="square" lIns="0" rIns="0" tIns="0" bIns="0" anchor="t">
+          <a:bodyPr wrap="square" lIns="0" tIns="0" rIns="0" bIns="0" anchor="t">
             <a:spAutoFit/>
           </a:bodyPr>
           <a:lstStyle/>
           <a:p>
             <a:pPr algn="l"/>
             <a:r>
-              <a:rPr b="1" sz="975" i="0" u="none">
+              <a:rPr sz="975" b="1" i="0" u="none">
                 <a:solidFill>
                   <a:srgbClr val="38BDF8"/>
                 </a:solidFill>
@@ -10549,14 +11011,14 @@
           <a:noFill/>
         </p:spPr>
         <p:txBody>
-          <a:bodyPr wrap="none" lIns="0" rIns="0" tIns="0" bIns="0" anchor="t">
+          <a:bodyPr wrap="none" lIns="0" tIns="0" rIns="0" bIns="0" anchor="t">
             <a:spAutoFit/>
           </a:bodyPr>
           <a:lstStyle/>
           <a:p>
             <a:pPr algn="l"/>
             <a:r>
-              <a:rPr b="1" sz="1500" i="0" u="none">
+              <a:rPr sz="1500" b="1" i="0" u="none">
                 <a:solidFill>
                   <a:srgbClr val="FFFFFF"/>
                 </a:solidFill>
@@ -10584,14 +11046,14 @@
           <a:noFill/>
         </p:spPr>
         <p:txBody>
-          <a:bodyPr wrap="none" lIns="0" rIns="0" tIns="0" bIns="0" anchor="t">
+          <a:bodyPr wrap="none" lIns="0" tIns="0" rIns="0" bIns="0" anchor="t">
             <a:spAutoFit/>
           </a:bodyPr>
           <a:lstStyle/>
           <a:p>
             <a:pPr algn="l"/>
             <a:r>
-              <a:rPr b="0" sz="1050" i="0" u="none">
+              <a:rPr sz="1050" b="0" i="0" u="none">
                 <a:solidFill>
                   <a:srgbClr val="94A3B8"/>
                 </a:solidFill>
@@ -10619,14 +11081,14 @@
           <a:noFill/>
         </p:spPr>
         <p:txBody>
-          <a:bodyPr wrap="none" lIns="0" rIns="0" tIns="0" bIns="0" anchor="t">
+          <a:bodyPr wrap="none" lIns="0" tIns="0" rIns="0" bIns="0" anchor="t">
             <a:spAutoFit/>
           </a:bodyPr>
           <a:lstStyle/>
           <a:p>
             <a:pPr algn="l"/>
             <a:r>
-              <a:rPr b="1" sz="900" i="0" u="none">
+              <a:rPr sz="900" b="1" i="0" u="none">
                 <a:solidFill>
                   <a:srgbClr val="64748B"/>
                 </a:solidFill>
@@ -10654,14 +11116,14 @@
           <a:noFill/>
         </p:spPr>
         <p:txBody>
-          <a:bodyPr wrap="none" lIns="0" rIns="0" tIns="0" bIns="0" anchor="t">
+          <a:bodyPr wrap="none" lIns="0" tIns="0" rIns="0" bIns="0" anchor="t">
             <a:spAutoFit/>
           </a:bodyPr>
           <a:lstStyle/>
           <a:p>
             <a:pPr algn="l"/>
             <a:r>
-              <a:rPr b="1" sz="1125" i="0" u="none">
+              <a:rPr sz="1125" b="1" i="0" u="none">
                 <a:solidFill>
                   <a:srgbClr val="0F172A"/>
                 </a:solidFill>
@@ -10670,7 +11132,7 @@
               <a:t>Segmento:</a:t>
             </a:r>
             <a:r>
-              <a:rPr b="0" sz="1125" i="0" u="none">
+              <a:rPr sz="1125" b="0" i="0" u="none">
                 <a:solidFill>
                   <a:srgbClr val="0F172A"/>
                 </a:solidFill>
@@ -10698,14 +11160,14 @@
           <a:noFill/>
         </p:spPr>
         <p:txBody>
-          <a:bodyPr wrap="none" lIns="0" rIns="0" tIns="0" bIns="0" anchor="t">
+          <a:bodyPr wrap="none" lIns="0" tIns="0" rIns="0" bIns="0" anchor="t">
             <a:spAutoFit/>
           </a:bodyPr>
           <a:lstStyle/>
           <a:p>
             <a:pPr algn="l"/>
             <a:r>
-              <a:rPr b="1" sz="1125" i="0" u="none">
+              <a:rPr sz="1125" b="1" i="0" u="none">
                 <a:solidFill>
                   <a:srgbClr val="0F172A"/>
                 </a:solidFill>
@@ -10714,7 +11176,7 @@
               <a:t>Cambio de Tasa ($\Delta$):</a:t>
             </a:r>
             <a:r>
-              <a:rPr b="0" sz="1125" i="0" u="none">
+              <a:rPr sz="1125" b="0" i="0" u="none">
                 <a:solidFill>
                   <a:srgbClr val="0F172A"/>
                 </a:solidFill>
@@ -10742,14 +11204,14 @@
           <a:noFill/>
         </p:spPr>
         <p:txBody>
-          <a:bodyPr wrap="none" lIns="0" rIns="0" tIns="0" bIns="0" anchor="t">
+          <a:bodyPr wrap="none" lIns="0" tIns="0" rIns="0" bIns="0" anchor="t">
             <a:spAutoFit/>
           </a:bodyPr>
           <a:lstStyle/>
           <a:p>
             <a:pPr algn="l"/>
             <a:r>
-              <a:rPr b="1" sz="900" i="0" u="none">
+              <a:rPr sz="900" b="1" i="0" u="none">
                 <a:solidFill>
                   <a:srgbClr val="166534"/>
                 </a:solidFill>
@@ -10777,14 +11239,14 @@
           <a:noFill/>
         </p:spPr>
         <p:txBody>
-          <a:bodyPr wrap="none" lIns="0" rIns="0" tIns="0" bIns="0" anchor="t">
+          <a:bodyPr wrap="none" lIns="0" tIns="0" rIns="0" bIns="0" anchor="t">
             <a:spAutoFit/>
           </a:bodyPr>
           <a:lstStyle/>
           <a:p>
             <a:pPr algn="l"/>
             <a:r>
-              <a:rPr b="1" sz="1800" i="0" u="none">
+              <a:rPr sz="1800" b="1" i="0" u="none">
                 <a:solidFill>
                   <a:srgbClr val="15803D"/>
                 </a:solidFill>
@@ -10812,14 +11274,14 @@
           <a:noFill/>
         </p:spPr>
         <p:txBody>
-          <a:bodyPr wrap="none" lIns="0" rIns="0" tIns="0" bIns="0" anchor="t">
+          <a:bodyPr wrap="none" lIns="0" tIns="0" rIns="0" bIns="0" anchor="t">
             <a:spAutoFit/>
           </a:bodyPr>
           <a:lstStyle/>
           <a:p>
             <a:pPr algn="l"/>
             <a:r>
-              <a:rPr b="0" sz="1050" i="0" u="none">
+              <a:rPr sz="1050" b="0" i="0" u="none">
                 <a:solidFill>
                   <a:srgbClr val="166534"/>
                 </a:solidFill>
@@ -10847,14 +11309,14 @@
           <a:noFill/>
         </p:spPr>
         <p:txBody>
-          <a:bodyPr wrap="square" lIns="123825" rIns="0" tIns="0" bIns="0" anchor="t">
+          <a:bodyPr wrap="square" lIns="123825" tIns="0" rIns="0" bIns="0" anchor="t">
             <a:spAutoFit/>
           </a:bodyPr>
           <a:lstStyle/>
           <a:p>
             <a:pPr algn="l"/>
             <a:r>
-              <a:rPr b="0" sz="975" i="0" u="none">
+              <a:rPr sz="975" b="0" i="0" u="none">
                 <a:solidFill>
                   <a:srgbClr val="B45309"/>
                 </a:solidFill>
@@ -10874,7 +11336,7 @@
 </file>
 
 <file path=ppt/slides/slide9.xml><?xml version="1.0" encoding="utf-8"?>
-<p:sld xmlns:a="http://schemas.openxmlformats.org/drawingml/2006/main" xmlns:p="http://schemas.openxmlformats.org/presentationml/2006/main" xmlns:r="http://schemas.openxmlformats.org/officeDocument/2006/relationships">
+<p:sld xmlns:a="http://schemas.openxmlformats.org/drawingml/2006/main" xmlns:r="http://schemas.openxmlformats.org/officeDocument/2006/relationships" xmlns:p="http://schemas.openxmlformats.org/presentationml/2006/main">
   <p:cSld>
     <p:bg>
       <p:bgPr>
@@ -10890,7 +11352,14 @@
         <p:cNvGrpSpPr/>
         <p:nvPr/>
       </p:nvGrpSpPr>
-      <p:grpSpPr/>
+      <p:grpSpPr>
+        <a:xfrm>
+          <a:off x="0" y="0"/>
+          <a:ext cx="0" cy="0"/>
+          <a:chOff x="0" y="0"/>
+          <a:chExt cx="0" cy="0"/>
+        </a:xfrm>
+      </p:grpSpPr>
       <p:sp>
         <p:nvSpPr>
           <p:cNvPr id="2" name="Rounded Rectangle 1"/>
@@ -10934,6 +11403,7 @@
           <a:lstStyle/>
           <a:p>
             <a:pPr algn="ctr"/>
+            <a:endParaRPr/>
           </a:p>
         </p:txBody>
       </p:sp>
@@ -10980,6 +11450,7 @@
           <a:lstStyle/>
           <a:p>
             <a:pPr algn="ctr"/>
+            <a:endParaRPr/>
           </a:p>
         </p:txBody>
       </p:sp>
@@ -11024,6 +11495,7 @@
           <a:lstStyle/>
           <a:p>
             <a:pPr algn="ctr"/>
+            <a:endParaRPr/>
           </a:p>
         </p:txBody>
       </p:sp>
@@ -11042,34 +11514,57 @@
         <a:graphic>
           <a:graphicData uri="http://schemas.openxmlformats.org/drawingml/2006/table">
             <a:tbl>
-              <a:tblPr firstRow="0" bandRow="0">
-                <a:lnL>
-                  <a:noFill/>
-                </a:lnL>
-                <a:lnR>
-                  <a:noFill/>
-                </a:lnR>
-                <a:lnT>
-                  <a:noFill/>
-                </a:lnT>
-                <a:lnB>
-                  <a:noFill/>
-                </a:lnB>
-                <a:lnV>
-                  <a:noFill/>
-                </a:lnV>
-                <a:lnH>
-                  <a:noFill/>
-                </a:lnH>
-              </a:tblPr>
+              <a:tblPr/>
               <a:tblGrid>
-                <a:gridCol w="1385292"/>
-                <a:gridCol w="1436489"/>
-                <a:gridCol w="1179909"/>
-                <a:gridCol w="1397942"/>
-                <a:gridCol w="1744265"/>
-                <a:gridCol w="1795611"/>
-                <a:gridCol w="2014239"/>
+                <a:gridCol w="1385292">
+                  <a:extLst>
+                    <a:ext uri="{9D8B030D-6E8A-4147-A177-3AD203B41FA5}">
+                      <a16:colId xmlns:a16="http://schemas.microsoft.com/office/drawing/2014/main" val="20000"/>
+                    </a:ext>
+                  </a:extLst>
+                </a:gridCol>
+                <a:gridCol w="1436489">
+                  <a:extLst>
+                    <a:ext uri="{9D8B030D-6E8A-4147-A177-3AD203B41FA5}">
+                      <a16:colId xmlns:a16="http://schemas.microsoft.com/office/drawing/2014/main" val="20001"/>
+                    </a:ext>
+                  </a:extLst>
+                </a:gridCol>
+                <a:gridCol w="1179909">
+                  <a:extLst>
+                    <a:ext uri="{9D8B030D-6E8A-4147-A177-3AD203B41FA5}">
+                      <a16:colId xmlns:a16="http://schemas.microsoft.com/office/drawing/2014/main" val="20002"/>
+                    </a:ext>
+                  </a:extLst>
+                </a:gridCol>
+                <a:gridCol w="1397942">
+                  <a:extLst>
+                    <a:ext uri="{9D8B030D-6E8A-4147-A177-3AD203B41FA5}">
+                      <a16:colId xmlns:a16="http://schemas.microsoft.com/office/drawing/2014/main" val="20003"/>
+                    </a:ext>
+                  </a:extLst>
+                </a:gridCol>
+                <a:gridCol w="1744265">
+                  <a:extLst>
+                    <a:ext uri="{9D8B030D-6E8A-4147-A177-3AD203B41FA5}">
+                      <a16:colId xmlns:a16="http://schemas.microsoft.com/office/drawing/2014/main" val="20004"/>
+                    </a:ext>
+                  </a:extLst>
+                </a:gridCol>
+                <a:gridCol w="1795611">
+                  <a:extLst>
+                    <a:ext uri="{9D8B030D-6E8A-4147-A177-3AD203B41FA5}">
+                      <a16:colId xmlns:a16="http://schemas.microsoft.com/office/drawing/2014/main" val="20005"/>
+                    </a:ext>
+                  </a:extLst>
+                </a:gridCol>
+                <a:gridCol w="2014239">
+                  <a:extLst>
+                    <a:ext uri="{9D8B030D-6E8A-4147-A177-3AD203B41FA5}">
+                      <a16:colId xmlns:a16="http://schemas.microsoft.com/office/drawing/2014/main" val="20006"/>
+                    </a:ext>
+                  </a:extLst>
+                </a:gridCol>
               </a:tblGrid>
               <a:tr h="400050">
                 <a:tc>
@@ -11079,7 +11574,7 @@
                     <a:p>
                       <a:pPr algn="l"/>
                       <a:r>
-                        <a:rPr b="1" sz="1050" i="0" u="none">
+                        <a:rPr sz="1050" b="1" i="0" u="none">
                           <a:solidFill>
                             <a:srgbClr val="0F172A"/>
                           </a:solidFill>
@@ -11089,7 +11584,7 @@
                       </a:r>
                     </a:p>
                   </a:txBody>
-                  <a:tcPr anchor="ctr" marL="63500" marR="63500" marT="25400" marB="25400">
+                  <a:tcPr marL="63500" marR="63500" marT="25400" marB="25400" anchor="ctr">
                     <a:lnL>
                       <a:noFill/>
                     </a:lnL>
@@ -11114,7 +11609,7 @@
                     <a:p>
                       <a:pPr algn="ctr"/>
                       <a:r>
-                        <a:rPr b="1" sz="1050" i="0" u="none">
+                        <a:rPr sz="1050" b="1" i="0" u="none">
                           <a:solidFill>
                             <a:srgbClr val="0F172A"/>
                           </a:solidFill>
@@ -11124,7 +11619,7 @@
                       </a:r>
                     </a:p>
                   </a:txBody>
-                  <a:tcPr anchor="ctr" marL="63500" marR="63500" marT="25400" marB="25400">
+                  <a:tcPr marL="63500" marR="63500" marT="25400" marB="25400" anchor="ctr">
                     <a:lnL>
                       <a:noFill/>
                     </a:lnL>
@@ -11149,7 +11644,7 @@
                     <a:p>
                       <a:pPr algn="ctr"/>
                       <a:r>
-                        <a:rPr b="1" sz="1050" i="0" u="none">
+                        <a:rPr sz="1050" b="1" i="0" u="none">
                           <a:solidFill>
                             <a:srgbClr val="0F172A"/>
                           </a:solidFill>
@@ -11159,7 +11654,7 @@
                       </a:r>
                     </a:p>
                   </a:txBody>
-                  <a:tcPr anchor="ctr" marL="63500" marR="63500" marT="25400" marB="25400">
+                  <a:tcPr marL="63500" marR="63500" marT="25400" marB="25400" anchor="ctr">
                     <a:lnL>
                       <a:noFill/>
                     </a:lnL>
@@ -11184,7 +11679,7 @@
                     <a:p>
                       <a:pPr algn="ctr"/>
                       <a:r>
-                        <a:rPr b="1" sz="1050" i="0" u="none">
+                        <a:rPr sz="1050" b="1" i="0" u="none">
                           <a:solidFill>
                             <a:srgbClr val="2563EB"/>
                           </a:solidFill>
@@ -11194,7 +11689,7 @@
                       </a:r>
                     </a:p>
                   </a:txBody>
-                  <a:tcPr anchor="ctr" marL="63500" marR="63500" marT="25400" marB="25400">
+                  <a:tcPr marL="63500" marR="63500" marT="25400" marB="25400" anchor="ctr">
                     <a:lnL>
                       <a:noFill/>
                     </a:lnL>
@@ -11219,7 +11714,7 @@
                     <a:p>
                       <a:pPr algn="ctr"/>
                       <a:r>
-                        <a:rPr b="1" sz="1050" i="0" u="none">
+                        <a:rPr sz="1050" b="1" i="0" u="none">
                           <a:solidFill>
                             <a:srgbClr val="0F172A"/>
                           </a:solidFill>
@@ -11229,7 +11724,7 @@
                       </a:r>
                     </a:p>
                   </a:txBody>
-                  <a:tcPr anchor="ctr" marL="63500" marR="63500" marT="25400" marB="25400">
+                  <a:tcPr marL="63500" marR="63500" marT="25400" marB="25400" anchor="ctr">
                     <a:lnL>
                       <a:noFill/>
                     </a:lnL>
@@ -11254,7 +11749,7 @@
                     <a:p>
                       <a:pPr algn="ctr"/>
                       <a:r>
-                        <a:rPr b="1" sz="1050" i="0" u="none">
+                        <a:rPr sz="1050" b="1" i="0" u="none">
                           <a:solidFill>
                             <a:srgbClr val="0F172A"/>
                           </a:solidFill>
@@ -11264,7 +11759,7 @@
                       </a:r>
                     </a:p>
                   </a:txBody>
-                  <a:tcPr anchor="ctr" marL="63500" marR="63500" marT="25400" marB="25400">
+                  <a:tcPr marL="63500" marR="63500" marT="25400" marB="25400" anchor="ctr">
                     <a:lnL>
                       <a:noFill/>
                     </a:lnL>
@@ -11289,7 +11784,7 @@
                     <a:p>
                       <a:pPr algn="ctr"/>
                       <a:r>
-                        <a:rPr b="1" sz="1050" i="0" u="none">
+                        <a:rPr sz="1050" b="1" i="0" u="none">
                           <a:solidFill>
                             <a:srgbClr val="0F172A"/>
                           </a:solidFill>
@@ -11299,7 +11794,7 @@
                       </a:r>
                     </a:p>
                   </a:txBody>
-                  <a:tcPr anchor="ctr" marL="63500" marR="63500" marT="25400" marB="25400">
+                  <a:tcPr marL="63500" marR="63500" marT="25400" marB="25400" anchor="ctr">
                     <a:lnL>
                       <a:noFill/>
                     </a:lnL>
@@ -11317,6 +11812,11 @@
                     </a:solidFill>
                   </a:tcPr>
                 </a:tc>
+                <a:extLst>
+                  <a:ext uri="{0D108BD9-81ED-4DB2-BD59-A6C34878D82A}">
+                    <a16:rowId xmlns:a16="http://schemas.microsoft.com/office/drawing/2014/main" val="10000"/>
+                  </a:ext>
+                </a:extLst>
               </a:tr>
               <a:tr h="400050">
                 <a:tc>
@@ -11326,7 +11826,7 @@
                     <a:p>
                       <a:pPr algn="l"/>
                       <a:r>
-                        <a:rPr b="0" sz="1050" i="0" u="none">
+                        <a:rPr sz="1050" b="0" i="0" u="none">
                           <a:solidFill>
                             <a:srgbClr val="334155"/>
                           </a:solidFill>
@@ -11336,7 +11836,7 @@
                       </a:r>
                     </a:p>
                   </a:txBody>
-                  <a:tcPr anchor="ctr" marL="63500" marR="63500" marT="25400" marB="25400">
+                  <a:tcPr marL="63500" marR="63500" marT="25400" marB="25400" anchor="ctr">
                     <a:lnL>
                       <a:noFill/>
                     </a:lnL>
@@ -11361,7 +11861,7 @@
                     <a:p>
                       <a:pPr algn="ctr"/>
                       <a:r>
-                        <a:rPr b="0" sz="1050" i="0" u="none">
+                        <a:rPr sz="1050" b="0" i="0" u="none">
                           <a:solidFill>
                             <a:srgbClr val="334155"/>
                           </a:solidFill>
@@ -11371,7 +11871,7 @@
                       </a:r>
                     </a:p>
                   </a:txBody>
-                  <a:tcPr anchor="ctr" marL="63500" marR="63500" marT="25400" marB="25400">
+                  <a:tcPr marL="63500" marR="63500" marT="25400" marB="25400" anchor="ctr">
                     <a:lnL>
                       <a:noFill/>
                     </a:lnL>
@@ -11396,7 +11896,7 @@
                     <a:p>
                       <a:pPr algn="ctr"/>
                       <a:r>
-                        <a:rPr b="0" sz="1050" i="0" u="none">
+                        <a:rPr sz="1050" b="0" i="0" u="none">
                           <a:solidFill>
                             <a:srgbClr val="64748B"/>
                           </a:solidFill>
@@ -11406,7 +11906,7 @@
                       </a:r>
                     </a:p>
                   </a:txBody>
-                  <a:tcPr anchor="ctr" marL="63500" marR="63500" marT="25400" marB="25400">
+                  <a:tcPr marL="63500" marR="63500" marT="25400" marB="25400" anchor="ctr">
                     <a:lnL>
                       <a:noFill/>
                     </a:lnL>
@@ -11431,7 +11931,7 @@
                     <a:p>
                       <a:pPr algn="ctr"/>
                       <a:r>
-                        <a:rPr b="1" sz="1050" i="0" u="none">
+                        <a:rPr sz="1050" b="1" i="0" u="none">
                           <a:solidFill>
                             <a:srgbClr val="2563EB"/>
                           </a:solidFill>
@@ -11441,7 +11941,7 @@
                       </a:r>
                     </a:p>
                   </a:txBody>
-                  <a:tcPr anchor="ctr" marL="63500" marR="63500" marT="25400" marB="25400">
+                  <a:tcPr marL="63500" marR="63500" marT="25400" marB="25400" anchor="ctr">
                     <a:lnL>
                       <a:noFill/>
                     </a:lnL>
@@ -11466,7 +11966,7 @@
                     <a:p>
                       <a:pPr algn="ctr"/>
                       <a:r>
-                        <a:rPr b="1" sz="1050" i="0" u="none">
+                        <a:rPr sz="1050" b="1" i="0" u="none">
                           <a:solidFill>
                             <a:srgbClr val="047857"/>
                           </a:solidFill>
@@ -11476,7 +11976,7 @@
                       </a:r>
                     </a:p>
                   </a:txBody>
-                  <a:tcPr anchor="ctr" marL="63500" marR="63500" marT="25400" marB="25400">
+                  <a:tcPr marL="63500" marR="63500" marT="25400" marB="25400" anchor="ctr">
                     <a:lnL>
                       <a:noFill/>
                     </a:lnL>
@@ -11501,7 +12001,7 @@
                     <a:p>
                       <a:pPr algn="ctr"/>
                       <a:r>
-                        <a:rPr b="0" sz="1050" i="0" u="none">
+                        <a:rPr sz="1050" b="0" i="0" u="none">
                           <a:solidFill>
                             <a:srgbClr val="64748B"/>
                           </a:solidFill>
@@ -11511,7 +12011,7 @@
                       </a:r>
                     </a:p>
                   </a:txBody>
-                  <a:tcPr anchor="ctr" marL="63500" marR="63500" marT="25400" marB="25400">
+                  <a:tcPr marL="63500" marR="63500" marT="25400" marB="25400" anchor="ctr">
                     <a:lnL>
                       <a:noFill/>
                     </a:lnL>
@@ -11536,7 +12036,7 @@
                     <a:p>
                       <a:pPr algn="ctr"/>
                       <a:r>
-                        <a:rPr b="1" sz="1050" i="0" u="none">
+                        <a:rPr sz="1050" b="1" i="0" u="none">
                           <a:solidFill>
                             <a:srgbClr val="334155"/>
                           </a:solidFill>
@@ -11546,7 +12046,7 @@
                       </a:r>
                     </a:p>
                   </a:txBody>
-                  <a:tcPr anchor="ctr" marL="63500" marR="63500" marT="25400" marB="25400">
+                  <a:tcPr marL="63500" marR="63500" marT="25400" marB="25400" anchor="ctr">
                     <a:lnL>
                       <a:noFill/>
                     </a:lnL>
@@ -11564,6 +12064,11 @@
                     </a:solidFill>
                   </a:tcPr>
                 </a:tc>
+                <a:extLst>
+                  <a:ext uri="{0D108BD9-81ED-4DB2-BD59-A6C34878D82A}">
+                    <a16:rowId xmlns:a16="http://schemas.microsoft.com/office/drawing/2014/main" val="10001"/>
+                  </a:ext>
+                </a:extLst>
               </a:tr>
               <a:tr h="400050">
                 <a:tc>
@@ -11573,7 +12078,7 @@
                     <a:p>
                       <a:pPr algn="l"/>
                       <a:r>
-                        <a:rPr b="0" sz="1050" i="0" u="none">
+                        <a:rPr sz="1050" b="0" i="0" u="none">
                           <a:solidFill>
                             <a:srgbClr val="334155"/>
                           </a:solidFill>
@@ -11583,7 +12088,7 @@
                       </a:r>
                     </a:p>
                   </a:txBody>
-                  <a:tcPr anchor="ctr" marL="63500" marR="63500" marT="25400" marB="25400">
+                  <a:tcPr marL="63500" marR="63500" marT="25400" marB="25400" anchor="ctr">
                     <a:lnL>
                       <a:noFill/>
                     </a:lnL>
@@ -11608,7 +12113,7 @@
                     <a:p>
                       <a:pPr algn="ctr"/>
                       <a:r>
-                        <a:rPr b="0" sz="1050" i="0" u="none">
+                        <a:rPr sz="1050" b="0" i="0" u="none">
                           <a:solidFill>
                             <a:srgbClr val="334155"/>
                           </a:solidFill>
@@ -11618,7 +12123,7 @@
                       </a:r>
                     </a:p>
                   </a:txBody>
-                  <a:tcPr anchor="ctr" marL="63500" marR="63500" marT="25400" marB="25400">
+                  <a:tcPr marL="63500" marR="63500" marT="25400" marB="25400" anchor="ctr">
                     <a:lnL>
                       <a:noFill/>
                     </a:lnL>
@@ -11643,7 +12148,7 @@
                     <a:p>
                       <a:pPr algn="ctr"/>
                       <a:r>
-                        <a:rPr b="0" sz="1050" i="0" u="none">
+                        <a:rPr sz="1050" b="0" i="0" u="none">
                           <a:solidFill>
                             <a:srgbClr val="64748B"/>
                           </a:solidFill>
@@ -11653,7 +12158,7 @@
                       </a:r>
                     </a:p>
                   </a:txBody>
-                  <a:tcPr anchor="ctr" marL="63500" marR="63500" marT="25400" marB="25400">
+                  <a:tcPr marL="63500" marR="63500" marT="25400" marB="25400" anchor="ctr">
                     <a:lnL>
                       <a:noFill/>
                     </a:lnL>
@@ -11678,7 +12183,7 @@
                     <a:p>
                       <a:pPr algn="ctr"/>
                       <a:r>
-                        <a:rPr b="1" sz="1050" i="0" u="none">
+                        <a:rPr sz="1050" b="1" i="0" u="none">
                           <a:solidFill>
                             <a:srgbClr val="2563EB"/>
                           </a:solidFill>
@@ -11688,7 +12193,7 @@
                       </a:r>
                     </a:p>
                   </a:txBody>
-                  <a:tcPr anchor="ctr" marL="63500" marR="63500" marT="25400" marB="25400">
+                  <a:tcPr marL="63500" marR="63500" marT="25400" marB="25400" anchor="ctr">
                     <a:lnL>
                       <a:noFill/>
                     </a:lnL>
@@ -11713,7 +12218,7 @@
                     <a:p>
                       <a:pPr algn="ctr"/>
                       <a:r>
-                        <a:rPr b="1" sz="1050" i="0" u="none">
+                        <a:rPr sz="1050" b="1" i="0" u="none">
                           <a:solidFill>
                             <a:srgbClr val="B91C1C"/>
                           </a:solidFill>
@@ -11723,7 +12228,7 @@
                       </a:r>
                     </a:p>
                   </a:txBody>
-                  <a:tcPr anchor="ctr" marL="63500" marR="63500" marT="25400" marB="25400">
+                  <a:tcPr marL="63500" marR="63500" marT="25400" marB="25400" anchor="ctr">
                     <a:lnL>
                       <a:noFill/>
                     </a:lnL>
@@ -11748,7 +12253,7 @@
                     <a:p>
                       <a:pPr algn="ctr"/>
                       <a:r>
-                        <a:rPr b="0" sz="1050" i="0" u="none">
+                        <a:rPr sz="1050" b="0" i="0" u="none">
                           <a:solidFill>
                             <a:srgbClr val="64748B"/>
                           </a:solidFill>
@@ -11758,7 +12263,7 @@
                       </a:r>
                     </a:p>
                   </a:txBody>
-                  <a:tcPr anchor="ctr" marL="63500" marR="63500" marT="25400" marB="25400">
+                  <a:tcPr marL="63500" marR="63500" marT="25400" marB="25400" anchor="ctr">
                     <a:lnL>
                       <a:noFill/>
                     </a:lnL>
@@ -11783,7 +12288,7 @@
                     <a:p>
                       <a:pPr algn="ctr"/>
                       <a:r>
-                        <a:rPr b="1" sz="1050" i="0" u="none">
+                        <a:rPr sz="1050" b="1" i="0" u="none">
                           <a:solidFill>
                             <a:srgbClr val="334155"/>
                           </a:solidFill>
@@ -11793,7 +12298,7 @@
                       </a:r>
                     </a:p>
                   </a:txBody>
-                  <a:tcPr anchor="ctr" marL="63500" marR="63500" marT="25400" marB="25400">
+                  <a:tcPr marL="63500" marR="63500" marT="25400" marB="25400" anchor="ctr">
                     <a:lnL>
                       <a:noFill/>
                     </a:lnL>
@@ -11811,6 +12316,11 @@
                     </a:solidFill>
                   </a:tcPr>
                 </a:tc>
+                <a:extLst>
+                  <a:ext uri="{0D108BD9-81ED-4DB2-BD59-A6C34878D82A}">
+                    <a16:rowId xmlns:a16="http://schemas.microsoft.com/office/drawing/2014/main" val="10002"/>
+                  </a:ext>
+                </a:extLst>
               </a:tr>
               <a:tr h="400050">
                 <a:tc>
@@ -11820,7 +12330,7 @@
                     <a:p>
                       <a:pPr algn="l"/>
                       <a:r>
-                        <a:rPr b="0" sz="1050" i="0" u="none">
+                        <a:rPr sz="1050" b="0" i="0" u="none">
                           <a:solidFill>
                             <a:srgbClr val="334155"/>
                           </a:solidFill>
@@ -11830,7 +12340,7 @@
                       </a:r>
                     </a:p>
                   </a:txBody>
-                  <a:tcPr anchor="ctr" marL="63500" marR="63500" marT="25400" marB="25400">
+                  <a:tcPr marL="63500" marR="63500" marT="25400" marB="25400" anchor="ctr">
                     <a:lnL>
                       <a:noFill/>
                     </a:lnL>
@@ -11855,7 +12365,7 @@
                     <a:p>
                       <a:pPr algn="ctr"/>
                       <a:r>
-                        <a:rPr b="0" sz="1050" i="0" u="none">
+                        <a:rPr sz="1050" b="0" i="0" u="none">
                           <a:solidFill>
                             <a:srgbClr val="334155"/>
                           </a:solidFill>
@@ -11865,7 +12375,7 @@
                       </a:r>
                     </a:p>
                   </a:txBody>
-                  <a:tcPr anchor="ctr" marL="63500" marR="63500" marT="25400" marB="25400">
+                  <a:tcPr marL="63500" marR="63500" marT="25400" marB="25400" anchor="ctr">
                     <a:lnL>
                       <a:noFill/>
                     </a:lnL>
@@ -11890,7 +12400,7 @@
                     <a:p>
                       <a:pPr algn="ctr"/>
                       <a:r>
-                        <a:rPr b="0" sz="1050" i="0" u="none">
+                        <a:rPr sz="1050" b="0" i="0" u="none">
                           <a:solidFill>
                             <a:srgbClr val="64748B"/>
                           </a:solidFill>
@@ -11900,7 +12410,7 @@
                       </a:r>
                     </a:p>
                   </a:txBody>
-                  <a:tcPr anchor="ctr" marL="63500" marR="63500" marT="25400" marB="25400">
+                  <a:tcPr marL="63500" marR="63500" marT="25400" marB="25400" anchor="ctr">
                     <a:lnL>
                       <a:noFill/>
                     </a:lnL>
@@ -11925,7 +12435,7 @@
                     <a:p>
                       <a:pPr algn="ctr"/>
                       <a:r>
-                        <a:rPr b="1" sz="1050" i="0" u="none">
+                        <a:rPr sz="1050" b="1" i="0" u="none">
                           <a:solidFill>
                             <a:srgbClr val="2563EB"/>
                           </a:solidFill>
@@ -11935,7 +12445,7 @@
                       </a:r>
                     </a:p>
                   </a:txBody>
-                  <a:tcPr anchor="ctr" marL="63500" marR="63500" marT="25400" marB="25400">
+                  <a:tcPr marL="63500" marR="63500" marT="25400" marB="25400" anchor="ctr">
                     <a:lnL>
                       <a:noFill/>
                     </a:lnL>
@@ -11960,7 +12470,7 @@
                     <a:p>
                       <a:pPr algn="ctr"/>
                       <a:r>
-                        <a:rPr b="1" sz="1050" i="0" u="none">
+                        <a:rPr sz="1050" b="1" i="0" u="none">
                           <a:solidFill>
                             <a:srgbClr val="64748B"/>
                           </a:solidFill>
@@ -11970,7 +12480,7 @@
                       </a:r>
                     </a:p>
                   </a:txBody>
-                  <a:tcPr anchor="ctr" marL="63500" marR="63500" marT="25400" marB="25400">
+                  <a:tcPr marL="63500" marR="63500" marT="25400" marB="25400" anchor="ctr">
                     <a:lnL>
                       <a:noFill/>
                     </a:lnL>
@@ -11995,7 +12505,7 @@
                     <a:p>
                       <a:pPr algn="ctr"/>
                       <a:r>
-                        <a:rPr b="0" sz="1050" i="0" u="none">
+                        <a:rPr sz="1050" b="0" i="0" u="none">
                           <a:solidFill>
                             <a:srgbClr val="64748B"/>
                           </a:solidFill>
@@ -12005,7 +12515,7 @@
                       </a:r>
                     </a:p>
                   </a:txBody>
-                  <a:tcPr anchor="ctr" marL="63500" marR="63500" marT="25400" marB="25400">
+                  <a:tcPr marL="63500" marR="63500" marT="25400" marB="25400" anchor="ctr">
                     <a:lnL>
                       <a:noFill/>
                     </a:lnL>
@@ -12030,7 +12540,7 @@
                     <a:p>
                       <a:pPr algn="ctr"/>
                       <a:r>
-                        <a:rPr b="1" sz="1050" i="0" u="none">
+                        <a:rPr sz="1050" b="1" i="0" u="none">
                           <a:solidFill>
                             <a:srgbClr val="334155"/>
                           </a:solidFill>
@@ -12040,7 +12550,7 @@
                       </a:r>
                     </a:p>
                   </a:txBody>
-                  <a:tcPr anchor="ctr" marL="63500" marR="63500" marT="25400" marB="25400">
+                  <a:tcPr marL="63500" marR="63500" marT="25400" marB="25400" anchor="ctr">
                     <a:lnL>
                       <a:noFill/>
                     </a:lnL>
@@ -12058,6 +12568,11 @@
                     </a:solidFill>
                   </a:tcPr>
                 </a:tc>
+                <a:extLst>
+                  <a:ext uri="{0D108BD9-81ED-4DB2-BD59-A6C34878D82A}">
+                    <a16:rowId xmlns:a16="http://schemas.microsoft.com/office/drawing/2014/main" val="10003"/>
+                  </a:ext>
+                </a:extLst>
               </a:tr>
             </a:tbl>
           </a:graphicData>
@@ -12080,14 +12595,14 @@
           <a:noFill/>
         </p:spPr>
         <p:txBody>
-          <a:bodyPr wrap="none" lIns="0" rIns="0" tIns="0" bIns="0" anchor="t">
+          <a:bodyPr wrap="none" lIns="0" tIns="0" rIns="0" bIns="0" anchor="t">
             <a:spAutoFit/>
           </a:bodyPr>
           <a:lstStyle/>
           <a:p>
             <a:pPr algn="l"/>
             <a:r>
-              <a:rPr b="1" sz="1050" i="0" u="none">
+              <a:rPr sz="1050" b="1" i="0" u="none">
                 <a:solidFill>
                   <a:srgbClr val="2563EB"/>
                 </a:solidFill>
@@ -12115,7 +12630,7 @@
           <a:noFill/>
         </p:spPr>
         <p:txBody>
-          <a:bodyPr wrap="none" lIns="0" rIns="0" tIns="0" bIns="0" anchor="t">
+          <a:bodyPr wrap="none" lIns="0" tIns="0" rIns="0" bIns="0" anchor="t">
             <a:spAutoFit/>
           </a:bodyPr>
           <a:lstStyle/>
@@ -12126,7 +12641,7 @@
               </a:lnSpc>
             </a:pPr>
             <a:r>
-              <a:rPr b="1" sz="2400" i="0" u="none">
+              <a:rPr sz="2400" b="1" i="0" u="none">
                 <a:solidFill>
                   <a:srgbClr val="0F172A"/>
                 </a:solidFill>
@@ -12154,14 +12669,14 @@
           <a:noFill/>
         </p:spPr>
         <p:txBody>
-          <a:bodyPr wrap="none" lIns="0" rIns="0" tIns="0" bIns="0" anchor="t">
+          <a:bodyPr wrap="none" lIns="0" tIns="0" rIns="0" bIns="0" anchor="t">
             <a:spAutoFit/>
           </a:bodyPr>
           <a:lstStyle/>
           <a:p>
             <a:pPr algn="l"/>
             <a:r>
-              <a:rPr b="0" sz="1200" i="0" u="none">
+              <a:rPr sz="1200" b="0" i="0" u="none">
                 <a:solidFill>
                   <a:srgbClr val="64748B"/>
                 </a:solidFill>
@@ -12189,14 +12704,14 @@
           <a:noFill/>
         </p:spPr>
         <p:txBody>
-          <a:bodyPr wrap="square" lIns="0" rIns="0" tIns="0" bIns="0" anchor="t">
+          <a:bodyPr wrap="square" lIns="0" tIns="0" rIns="0" bIns="0" anchor="t">
             <a:spAutoFit/>
           </a:bodyPr>
           <a:lstStyle/>
           <a:p>
             <a:pPr algn="l"/>
             <a:r>
-              <a:rPr b="1" sz="1050" i="0" u="none">
+              <a:rPr sz="1050" b="1" i="0" u="none">
                 <a:solidFill>
                   <a:srgbClr val="991B1B"/>
                 </a:solidFill>
@@ -12205,7 +12720,7 @@
               <a:t>Limitación Operativa Actual:</a:t>
             </a:r>
             <a:r>
-              <a:rPr b="0" sz="1050" i="0" u="none">
+              <a:rPr sz="1050" b="0" i="0" u="none">
                 <a:solidFill>
                   <a:srgbClr val="991B1B"/>
                 </a:solidFill>
